--- a/output/wordlabs-anti-prefix-3day.pptx
+++ b/output/wordlabs-anti-prefix-3day.pptx
@@ -5622,7 +5622,7 @@
                 <a:ea typeface="Trebuchet MS" pitchFamily="34" charset="-122"/>
                 <a:cs typeface="Trebuchet MS" pitchFamily="34" charset="-120"/>
               </a:rPr>
-              <a:t>1</a:t>
+              <a:t>2</a:t>
             </a:r>
             <a:pPr algn="ctr" indent="0" marL="0">
               <a:buNone/>
@@ -5636,7 +5636,7 @@
                 <a:ea typeface="Trebuchet MS" pitchFamily="34" charset="-122"/>
                 <a:cs typeface="Trebuchet MS" pitchFamily="34" charset="-120"/>
               </a:rPr>
-              <a:t>  punctuation mark</a:t>
+              <a:t>  punctuation marks</a:t>
             </a:r>
             <a:endParaRPr lang="en-US" sz="2800" dirty="0"/>
           </a:p>
@@ -6040,7 +6040,7 @@
                 <a:ea typeface="Calibri" pitchFamily="34" charset="-122"/>
                 <a:cs typeface="Calibri" pitchFamily="34" charset="-120"/>
               </a:rPr>
-              <a:t>The nurse applied </a:t>
+              <a:t>The </a:t>
             </a:r>
             <a:pPr algn="l" indent="0" marL="0">
               <a:buNone/>
@@ -6071,7 +6071,7 @@
                 <a:ea typeface="Calibri" pitchFamily="34" charset="-122"/>
                 <a:cs typeface="Calibri" pitchFamily="34" charset="-120"/>
               </a:rPr>
-              <a:t> cream to stop the </a:t>
+              <a:t> cream stopped the infection, and the </a:t>
             </a:r>
             <a:pPr algn="l" indent="0" marL="0">
               <a:buNone/>
@@ -6088,7 +6088,7 @@
                 <a:ea typeface="Calibri" pitchFamily="34" charset="-122"/>
                 <a:cs typeface="Calibri" pitchFamily="34" charset="-120"/>
               </a:rPr>
-              <a:t>antivirus</a:t>
+              <a:t>antidote</a:t>
             </a:r>
             <a:pPr algn="l" indent="0" marL="0">
               <a:buNone/>
@@ -6102,7 +6102,7 @@
                 <a:ea typeface="Calibri" pitchFamily="34" charset="-122"/>
                 <a:cs typeface="Calibri" pitchFamily="34" charset="-120"/>
               </a:rPr>
-              <a:t> tablet from being confused with the wrong medicine.</a:t>
+              <a:t> worked quickly.</a:t>
             </a:r>
             <a:endParaRPr lang="en-US" sz="1800" dirty="0"/>
           </a:p>
@@ -6385,7 +6385,7 @@
                 <a:ea typeface="Trebuchet MS" pitchFamily="34" charset="-122"/>
                 <a:cs typeface="Trebuchet MS" pitchFamily="34" charset="-120"/>
               </a:rPr>
-              <a:t>antivirus</a:t>
+              <a:t>antidote</a:t>
             </a:r>
             <a:endParaRPr lang="en-US" sz="1400" dirty="0"/>
           </a:p>
@@ -11201,8 +11201,8 @@
         </p:nvSpPr>
         <p:spPr>
           <a:xfrm>
-            <a:off x="1951828" y="4169664"/>
-            <a:ext cx="603504" cy="384048"/>
+            <a:off x="1951330" y="4169664"/>
+            <a:ext cx="676656" cy="384048"/>
           </a:xfrm>
           <a:prstGeom prst="rect">
             <a:avLst>
@@ -11228,8 +11228,8 @@
         </p:nvSpPr>
         <p:spPr>
           <a:xfrm>
-            <a:off x="1951828" y="4169664"/>
-            <a:ext cx="603504" cy="384048"/>
+            <a:off x="1951330" y="4169664"/>
+            <a:ext cx="676656" cy="384048"/>
           </a:xfrm>
           <a:prstGeom prst="rect">
             <a:avLst/>
@@ -11267,8 +11267,8 @@
         </p:nvSpPr>
         <p:spPr>
           <a:xfrm>
-            <a:off x="2605209" y="4169664"/>
-            <a:ext cx="603504" cy="384048"/>
+            <a:off x="2677363" y="4169664"/>
+            <a:ext cx="676656" cy="384048"/>
           </a:xfrm>
           <a:prstGeom prst="rect">
             <a:avLst>
@@ -11294,8 +11294,8 @@
         </p:nvSpPr>
         <p:spPr>
           <a:xfrm>
-            <a:off x="2605209" y="4169664"/>
-            <a:ext cx="603504" cy="384048"/>
+            <a:off x="2677363" y="4169664"/>
+            <a:ext cx="676656" cy="384048"/>
           </a:xfrm>
           <a:prstGeom prst="rect">
             <a:avLst/>
@@ -11333,8 +11333,8 @@
         </p:nvSpPr>
         <p:spPr>
           <a:xfrm>
-            <a:off x="3258589" y="4169664"/>
-            <a:ext cx="603504" cy="384048"/>
+            <a:off x="3403397" y="4169664"/>
+            <a:ext cx="676656" cy="384048"/>
           </a:xfrm>
           <a:prstGeom prst="rect">
             <a:avLst>
@@ -11360,8 +11360,8 @@
         </p:nvSpPr>
         <p:spPr>
           <a:xfrm>
-            <a:off x="3258589" y="4169664"/>
-            <a:ext cx="603504" cy="384048"/>
+            <a:off x="3403397" y="4169664"/>
+            <a:ext cx="676656" cy="384048"/>
           </a:xfrm>
           <a:prstGeom prst="rect">
             <a:avLst/>
@@ -11399,8 +11399,8 @@
         </p:nvSpPr>
         <p:spPr>
           <a:xfrm>
-            <a:off x="3911969" y="4169664"/>
-            <a:ext cx="603504" cy="384048"/>
+            <a:off x="4129430" y="4169664"/>
+            <a:ext cx="676656" cy="384048"/>
           </a:xfrm>
           <a:prstGeom prst="rect">
             <a:avLst>
@@ -11426,8 +11426,8 @@
         </p:nvSpPr>
         <p:spPr>
           <a:xfrm>
-            <a:off x="3911969" y="4169664"/>
-            <a:ext cx="603504" cy="384048"/>
+            <a:off x="4129430" y="4169664"/>
+            <a:ext cx="676656" cy="384048"/>
           </a:xfrm>
           <a:prstGeom prst="rect">
             <a:avLst/>
@@ -11465,8 +11465,8 @@
         </p:nvSpPr>
         <p:spPr>
           <a:xfrm>
-            <a:off x="4565350" y="4169664"/>
-            <a:ext cx="603504" cy="384048"/>
+            <a:off x="4855464" y="4169664"/>
+            <a:ext cx="676656" cy="384048"/>
           </a:xfrm>
           <a:prstGeom prst="rect">
             <a:avLst>
@@ -11492,8 +11492,8 @@
         </p:nvSpPr>
         <p:spPr>
           <a:xfrm>
-            <a:off x="4565350" y="4169664"/>
-            <a:ext cx="603504" cy="384048"/>
+            <a:off x="4855464" y="4169664"/>
+            <a:ext cx="676656" cy="384048"/>
           </a:xfrm>
           <a:prstGeom prst="rect">
             <a:avLst/>
@@ -11531,8 +11531,8 @@
         </p:nvSpPr>
         <p:spPr>
           <a:xfrm>
-            <a:off x="5218730" y="4169664"/>
-            <a:ext cx="603504" cy="384048"/>
+            <a:off x="5581498" y="4169664"/>
+            <a:ext cx="676656" cy="384048"/>
           </a:xfrm>
           <a:prstGeom prst="rect">
             <a:avLst>
@@ -11558,8 +11558,8 @@
         </p:nvSpPr>
         <p:spPr>
           <a:xfrm>
-            <a:off x="5218730" y="4169664"/>
-            <a:ext cx="603504" cy="384048"/>
+            <a:off x="5581498" y="4169664"/>
+            <a:ext cx="676656" cy="384048"/>
           </a:xfrm>
           <a:prstGeom prst="rect">
             <a:avLst/>
@@ -11597,8 +11597,8 @@
         </p:nvSpPr>
         <p:spPr>
           <a:xfrm>
-            <a:off x="5872111" y="4169664"/>
-            <a:ext cx="603504" cy="384048"/>
+            <a:off x="6307531" y="4169664"/>
+            <a:ext cx="676656" cy="384048"/>
           </a:xfrm>
           <a:prstGeom prst="rect">
             <a:avLst>
@@ -11624,8 +11624,8 @@
         </p:nvSpPr>
         <p:spPr>
           <a:xfrm>
-            <a:off x="5872111" y="4169664"/>
-            <a:ext cx="603504" cy="384048"/>
+            <a:off x="6307531" y="4169664"/>
+            <a:ext cx="676656" cy="384048"/>
           </a:xfrm>
           <a:prstGeom prst="rect">
             <a:avLst/>
@@ -11663,8 +11663,8 @@
         </p:nvSpPr>
         <p:spPr>
           <a:xfrm>
-            <a:off x="6525491" y="4169664"/>
-            <a:ext cx="603504" cy="384048"/>
+            <a:off x="7033565" y="4169664"/>
+            <a:ext cx="676656" cy="384048"/>
           </a:xfrm>
           <a:prstGeom prst="rect">
             <a:avLst>
@@ -11690,8 +11690,8 @@
         </p:nvSpPr>
         <p:spPr>
           <a:xfrm>
-            <a:off x="6525491" y="4169664"/>
-            <a:ext cx="603504" cy="384048"/>
+            <a:off x="7033565" y="4169664"/>
+            <a:ext cx="676656" cy="384048"/>
           </a:xfrm>
           <a:prstGeom prst="rect">
             <a:avLst/>
@@ -11729,8 +11729,8 @@
         </p:nvSpPr>
         <p:spPr>
           <a:xfrm>
-            <a:off x="7178871" y="4169664"/>
-            <a:ext cx="603504" cy="384048"/>
+            <a:off x="7759598" y="4169664"/>
+            <a:ext cx="676656" cy="384048"/>
           </a:xfrm>
           <a:prstGeom prst="rect">
             <a:avLst>
@@ -11756,8 +11756,8 @@
         </p:nvSpPr>
         <p:spPr>
           <a:xfrm>
-            <a:off x="7178871" y="4169664"/>
-            <a:ext cx="603504" cy="384048"/>
+            <a:off x="7759598" y="4169664"/>
+            <a:ext cx="676656" cy="384048"/>
           </a:xfrm>
           <a:prstGeom prst="rect">
             <a:avLst/>
@@ -11781,7 +11781,7 @@
                 <a:ea typeface="Trebuchet MS" pitchFamily="34" charset="-122"/>
                 <a:cs typeface="Trebuchet MS" pitchFamily="34" charset="-120"/>
               </a:rPr>
-              <a:t>i</a:t>
+              <a:t>ic</a:t>
             </a:r>
             <a:endParaRPr lang="en-US" sz="900" dirty="0"/>
           </a:p>
@@ -11789,80 +11789,14 @@
       </p:sp>
       <p:sp>
         <p:nvSpPr>
-          <p:cNvPr id="60" name="Shape 58"/>
-          <p:cNvSpPr/>
-          <p:nvPr/>
-        </p:nvSpPr>
-        <p:spPr>
-          <a:xfrm>
-            <a:off x="7832252" y="4169664"/>
-            <a:ext cx="603504" cy="384048"/>
-          </a:xfrm>
-          <a:prstGeom prst="rect">
-            <a:avLst>
-              <a:gd name="adj" fmla="val 9524"/>
-            </a:avLst>
-          </a:prstGeom>
-          <a:solidFill>
-            <a:srgbClr val="FFFFFF"/>
-          </a:solidFill>
-          <a:ln w="12700">
-            <a:solidFill>
-              <a:srgbClr val="DB2777"/>
-            </a:solidFill>
-            <a:prstDash val="solid"/>
-          </a:ln>
-        </p:spPr>
-      </p:sp>
-      <p:sp>
-        <p:nvSpPr>
-          <p:cNvPr id="61" name="Text 59"/>
-          <p:cNvSpPr/>
-          <p:nvPr/>
-        </p:nvSpPr>
-        <p:spPr>
-          <a:xfrm>
-            <a:off x="7832252" y="4169664"/>
-            <a:ext cx="603504" cy="384048"/>
-          </a:xfrm>
-          <a:prstGeom prst="rect">
-            <a:avLst/>
-          </a:prstGeom>
-          <a:noFill/>
-          <a:ln/>
-        </p:spPr>
-        <p:txBody>
-          <a:bodyPr wrap="square" lIns="0" tIns="0" rIns="0" bIns="0" rtlCol="0" anchor="ctr"/>
-          <a:lstStyle/>
-          <a:p>
-            <a:pPr algn="ctr" indent="0" marL="0">
-              <a:buNone/>
-            </a:pPr>
-            <a:r>
-              <a:rPr lang="en-US" sz="900" b="1" dirty="0">
-                <a:solidFill>
-                  <a:srgbClr val="9D174D"/>
-                </a:solidFill>
-                <a:latin typeface="Trebuchet MS" pitchFamily="34" charset="0"/>
-                <a:ea typeface="Trebuchet MS" pitchFamily="34" charset="-122"/>
-                <a:cs typeface="Trebuchet MS" pitchFamily="34" charset="-120"/>
-              </a:rPr>
-              <a:t>c</a:t>
-            </a:r>
-            <a:endParaRPr lang="en-US" sz="900" dirty="0"/>
-          </a:p>
-        </p:txBody>
-      </p:sp>
-      <p:sp>
-        <p:nvSpPr>
-          <p:cNvPr id="62" name="Text 60"/>
-          <p:cNvSpPr/>
-          <p:nvPr/>
-        </p:nvSpPr>
-        <p:spPr>
-          <a:xfrm>
-            <a:off x="7832252" y="4572000"/>
-            <a:ext cx="603504" cy="219456"/>
+          <p:cNvPr id="60" name="Text 58"/>
+          <p:cNvSpPr/>
+          <p:nvPr/>
+        </p:nvSpPr>
+        <p:spPr>
+          <a:xfrm>
+            <a:off x="7759598" y="4572000"/>
+            <a:ext cx="676656" cy="219456"/>
           </a:xfrm>
           <a:prstGeom prst="rect">
             <a:avLst/>
@@ -11886,7 +11820,7 @@
                 <a:ea typeface="Calibri" pitchFamily="34" charset="-122"/>
                 <a:cs typeface="Calibri" pitchFamily="34" charset="-120"/>
               </a:rPr>
-              <a:t>/k/</a:t>
+              <a:t>/ik/</a:t>
             </a:r>
             <a:endParaRPr lang="en-US" sz="750" dirty="0"/>
           </a:p>
@@ -12317,7 +12251,7 @@
                 <a:ea typeface="Trebuchet MS" pitchFamily="34" charset="-122"/>
                 <a:cs typeface="Trebuchet MS" pitchFamily="34" charset="-120"/>
               </a:rPr>
-              <a:t>antivirus</a:t>
+              <a:t>antidote</a:t>
             </a:r>
             <a:endParaRPr lang="en-US" sz="2800" dirty="0"/>
           </a:p>
@@ -13144,7 +13078,7 @@
                 <a:ea typeface="Trebuchet MS" pitchFamily="34" charset="-122"/>
                 <a:cs typeface="Trebuchet MS" pitchFamily="34" charset="-120"/>
               </a:rPr>
-              <a:t>antivirus</a:t>
+              <a:t>antidote</a:t>
             </a:r>
             <a:endParaRPr lang="en-US" sz="2800" dirty="0"/>
           </a:p>
@@ -13395,7 +13329,7 @@
                 <a:ea typeface="Trebuchet MS" pitchFamily="34" charset="-122"/>
                 <a:cs typeface="Trebuchet MS" pitchFamily="34" charset="-120"/>
               </a:rPr>
-              <a:t>virus</a:t>
+              <a:t>dote</a:t>
             </a:r>
             <a:endParaRPr lang="en-US" sz="1300" dirty="0"/>
           </a:p>
@@ -13434,7 +13368,7 @@
                 <a:ea typeface="Calibri" pitchFamily="34" charset="-122"/>
                 <a:cs typeface="Calibri" pitchFamily="34" charset="-120"/>
               </a:rPr>
-              <a:t>harmful agent</a:t>
+              <a:t>that which is given</a:t>
             </a:r>
             <a:endParaRPr lang="en-US" sz="850" dirty="0"/>
           </a:p>
@@ -14129,7 +14063,7 @@
                 <a:ea typeface="Trebuchet MS" pitchFamily="34" charset="-122"/>
                 <a:cs typeface="Trebuchet MS" pitchFamily="34" charset="-120"/>
               </a:rPr>
-              <a:t>antivirus</a:t>
+              <a:t>antidote</a:t>
             </a:r>
             <a:endParaRPr lang="en-US" sz="2800" dirty="0"/>
           </a:p>
@@ -14380,7 +14314,7 @@
                 <a:ea typeface="Trebuchet MS" pitchFamily="34" charset="-122"/>
                 <a:cs typeface="Trebuchet MS" pitchFamily="34" charset="-120"/>
               </a:rPr>
-              <a:t>virus</a:t>
+              <a:t>dote</a:t>
             </a:r>
             <a:endParaRPr lang="en-US" sz="1300" dirty="0"/>
           </a:p>
@@ -14419,7 +14353,7 @@
                 <a:ea typeface="Calibri" pitchFamily="34" charset="-122"/>
                 <a:cs typeface="Calibri" pitchFamily="34" charset="-120"/>
               </a:rPr>
-              <a:t>harmful agent</a:t>
+              <a:t>that which is given</a:t>
             </a:r>
             <a:endParaRPr lang="en-US" sz="850" dirty="0"/>
           </a:p>
@@ -14526,8 +14460,8 @@
         </p:nvSpPr>
         <p:spPr>
           <a:xfrm>
-            <a:off x="1975104" y="3364992"/>
-            <a:ext cx="1554480" cy="475488"/>
+            <a:off x="2313432" y="3364992"/>
+            <a:ext cx="1645920" cy="475488"/>
           </a:xfrm>
           <a:prstGeom prst="rect">
             <a:avLst>
@@ -14553,8 +14487,8 @@
         </p:nvSpPr>
         <p:spPr>
           <a:xfrm>
-            <a:off x="1975104" y="3364992"/>
-            <a:ext cx="1554480" cy="475488"/>
+            <a:off x="2313432" y="3364992"/>
+            <a:ext cx="1645920" cy="475488"/>
           </a:xfrm>
           <a:prstGeom prst="rect">
             <a:avLst/>
@@ -14592,8 +14526,8 @@
         </p:nvSpPr>
         <p:spPr>
           <a:xfrm>
-            <a:off x="3529584" y="3364992"/>
-            <a:ext cx="73152" cy="475488"/>
+            <a:off x="3959352" y="3364992"/>
+            <a:ext cx="411480" cy="475488"/>
           </a:xfrm>
           <a:prstGeom prst="rect">
             <a:avLst/>
@@ -14631,8 +14565,8 @@
         </p:nvSpPr>
         <p:spPr>
           <a:xfrm>
-            <a:off x="3602736" y="3364992"/>
-            <a:ext cx="1554480" cy="475488"/>
+            <a:off x="4370832" y="3364992"/>
+            <a:ext cx="1645920" cy="475488"/>
           </a:xfrm>
           <a:prstGeom prst="rect">
             <a:avLst>
@@ -14658,8 +14592,8 @@
         </p:nvSpPr>
         <p:spPr>
           <a:xfrm>
-            <a:off x="3602736" y="3364992"/>
-            <a:ext cx="1554480" cy="475488"/>
+            <a:off x="4370832" y="3364992"/>
+            <a:ext cx="1645920" cy="475488"/>
           </a:xfrm>
           <a:prstGeom prst="rect">
             <a:avLst/>
@@ -14697,8 +14631,8 @@
         </p:nvSpPr>
         <p:spPr>
           <a:xfrm>
-            <a:off x="5157216" y="3364992"/>
-            <a:ext cx="73152" cy="475488"/>
+            <a:off x="6016752" y="3364992"/>
+            <a:ext cx="411480" cy="475488"/>
           </a:xfrm>
           <a:prstGeom prst="rect">
             <a:avLst/>
@@ -14736,8 +14670,8 @@
         </p:nvSpPr>
         <p:spPr>
           <a:xfrm>
-            <a:off x="5230368" y="3364992"/>
-            <a:ext cx="1554480" cy="475488"/>
+            <a:off x="6428232" y="3364992"/>
+            <a:ext cx="1645920" cy="475488"/>
           </a:xfrm>
           <a:prstGeom prst="rect">
             <a:avLst>
@@ -14763,8 +14697,8 @@
         </p:nvSpPr>
         <p:spPr>
           <a:xfrm>
-            <a:off x="5230368" y="3364992"/>
-            <a:ext cx="1554480" cy="475488"/>
+            <a:off x="6428232" y="3364992"/>
+            <a:ext cx="1645920" cy="475488"/>
           </a:xfrm>
           <a:prstGeom prst="rect">
             <a:avLst/>
@@ -14788,7 +14722,7 @@
                 <a:ea typeface="Trebuchet MS" pitchFamily="34" charset="-122"/>
                 <a:cs typeface="Trebuchet MS" pitchFamily="34" charset="-120"/>
               </a:rPr>
-              <a:t>vi</a:t>
+              <a:t>dote</a:t>
             </a:r>
             <a:endParaRPr lang="en-US" sz="1400" dirty="0"/>
           </a:p>
@@ -14796,119 +14730,80 @@
       </p:sp>
       <p:sp>
         <p:nvSpPr>
-          <p:cNvPr id="33" name="Text 31"/>
-          <p:cNvSpPr/>
-          <p:nvPr/>
-        </p:nvSpPr>
-        <p:spPr>
-          <a:xfrm>
-            <a:off x="6784848" y="3364992"/>
-            <a:ext cx="73152" cy="475488"/>
-          </a:xfrm>
-          <a:prstGeom prst="rect">
-            <a:avLst/>
-          </a:prstGeom>
-          <a:noFill/>
-          <a:ln/>
-        </p:spPr>
-        <p:txBody>
-          <a:bodyPr wrap="square" lIns="0" tIns="0" rIns="0" bIns="0" rtlCol="0" anchor="ctr"/>
-          <a:lstStyle/>
-          <a:p>
-            <a:pPr algn="ctr" indent="0" marL="0">
-              <a:buNone/>
-            </a:pPr>
-            <a:r>
-              <a:rPr lang="en-US" sz="1600" b="1" dirty="0">
-                <a:solidFill>
-                  <a:srgbClr val="0D9488"/>
+          <p:cNvPr id="33" name="Shape 31"/>
+          <p:cNvSpPr/>
+          <p:nvPr/>
+        </p:nvSpPr>
+        <p:spPr>
+          <a:xfrm>
+            <a:off x="365760" y="4096512"/>
+            <a:ext cx="1371600" cy="804672"/>
+          </a:xfrm>
+          <a:prstGeom prst="rect">
+            <a:avLst>
+              <a:gd name="adj" fmla="val 6818"/>
+            </a:avLst>
+          </a:prstGeom>
+          <a:solidFill>
+            <a:srgbClr val="E2E8F0"/>
+          </a:solidFill>
+          <a:ln w="12700">
+            <a:solidFill>
+              <a:srgbClr val="E2E8F0"/>
+            </a:solidFill>
+            <a:prstDash val="solid"/>
+          </a:ln>
+        </p:spPr>
+      </p:sp>
+      <p:sp>
+        <p:nvSpPr>
+          <p:cNvPr id="34" name="Text 32"/>
+          <p:cNvSpPr/>
+          <p:nvPr/>
+        </p:nvSpPr>
+        <p:spPr>
+          <a:xfrm>
+            <a:off x="365760" y="4096512"/>
+            <a:ext cx="1371600" cy="804672"/>
+          </a:xfrm>
+          <a:prstGeom prst="rect">
+            <a:avLst/>
+          </a:prstGeom>
+          <a:noFill/>
+          <a:ln/>
+        </p:spPr>
+        <p:txBody>
+          <a:bodyPr wrap="square" lIns="0" tIns="0" rIns="0" bIns="0" rtlCol="0" anchor="ctr"/>
+          <a:lstStyle/>
+          <a:p>
+            <a:pPr algn="ctr" indent="0" marL="0">
+              <a:buNone/>
+            </a:pPr>
+            <a:r>
+              <a:rPr lang="en-US" sz="1100" b="1" dirty="0">
+                <a:solidFill>
+                  <a:srgbClr val="475569"/>
                 </a:solidFill>
                 <a:latin typeface="Trebuchet MS" pitchFamily="34" charset="0"/>
                 <a:ea typeface="Trebuchet MS" pitchFamily="34" charset="-122"/>
                 <a:cs typeface="Trebuchet MS" pitchFamily="34" charset="-120"/>
               </a:rPr>
-              <a:t>·</a:t>
-            </a:r>
-            <a:endParaRPr lang="en-US" sz="1600" dirty="0"/>
-          </a:p>
-        </p:txBody>
-      </p:sp>
-      <p:sp>
-        <p:nvSpPr>
-          <p:cNvPr id="34" name="Shape 32"/>
-          <p:cNvSpPr/>
-          <p:nvPr/>
-        </p:nvSpPr>
-        <p:spPr>
-          <a:xfrm>
-            <a:off x="6858000" y="3364992"/>
-            <a:ext cx="1554480" cy="475488"/>
-          </a:xfrm>
-          <a:prstGeom prst="rect">
-            <a:avLst>
-              <a:gd name="adj" fmla="val 9615"/>
-            </a:avLst>
-          </a:prstGeom>
-          <a:solidFill>
-            <a:srgbClr val="FFFFFF"/>
-          </a:solidFill>
-          <a:ln w="12700">
-            <a:solidFill>
-              <a:srgbClr val="0D9488"/>
-            </a:solidFill>
-            <a:prstDash val="solid"/>
-          </a:ln>
-        </p:spPr>
-      </p:sp>
-      <p:sp>
-        <p:nvSpPr>
-          <p:cNvPr id="35" name="Text 33"/>
-          <p:cNvSpPr/>
-          <p:nvPr/>
-        </p:nvSpPr>
-        <p:spPr>
-          <a:xfrm>
-            <a:off x="6858000" y="3364992"/>
-            <a:ext cx="1554480" cy="475488"/>
-          </a:xfrm>
-          <a:prstGeom prst="rect">
-            <a:avLst/>
-          </a:prstGeom>
-          <a:noFill/>
-          <a:ln/>
-        </p:spPr>
-        <p:txBody>
-          <a:bodyPr wrap="square" lIns="0" tIns="0" rIns="0" bIns="0" rtlCol="0" anchor="ctr"/>
-          <a:lstStyle/>
-          <a:p>
-            <a:pPr algn="ctr" indent="0" marL="0">
-              <a:buNone/>
-            </a:pPr>
-            <a:r>
-              <a:rPr lang="en-US" sz="1400" b="1" dirty="0">
-                <a:solidFill>
-                  <a:srgbClr val="0D9488"/>
-                </a:solidFill>
-                <a:latin typeface="Trebuchet MS" pitchFamily="34" charset="0"/>
-                <a:ea typeface="Trebuchet MS" pitchFamily="34" charset="-122"/>
-                <a:cs typeface="Trebuchet MS" pitchFamily="34" charset="-120"/>
-              </a:rPr>
-              <a:t>rus</a:t>
-            </a:r>
-            <a:endParaRPr lang="en-US" sz="1400" dirty="0"/>
-          </a:p>
-        </p:txBody>
-      </p:sp>
-      <p:sp>
-        <p:nvSpPr>
-          <p:cNvPr id="36" name="Shape 34"/>
-          <p:cNvSpPr/>
-          <p:nvPr/>
-        </p:nvSpPr>
-        <p:spPr>
-          <a:xfrm>
-            <a:off x="365760" y="4096512"/>
-            <a:ext cx="1371600" cy="804672"/>
+              <a:t>Phonemes</a:t>
+            </a:r>
+            <a:endParaRPr lang="en-US" sz="1100" dirty="0"/>
+          </a:p>
+        </p:txBody>
+      </p:sp>
+      <p:sp>
+        <p:nvSpPr>
+          <p:cNvPr id="35" name="Shape 33"/>
+          <p:cNvSpPr/>
+          <p:nvPr/>
+        </p:nvSpPr>
+        <p:spPr>
+          <a:xfrm>
+            <a:off x="1874520" y="4096512"/>
+            <a:ext cx="6903720" cy="804672"/>
           </a:xfrm>
           <a:prstGeom prst="rect">
             <a:avLst>
@@ -14916,85 +14811,19 @@
             </a:avLst>
           </a:prstGeom>
           <a:solidFill>
-            <a:srgbClr val="E2E8F0"/>
+            <a:srgbClr val="F8FAFC"/>
           </a:solidFill>
           <a:ln w="12700">
             <a:solidFill>
               <a:srgbClr val="E2E8F0"/>
             </a:solidFill>
-            <a:prstDash val="solid"/>
-          </a:ln>
-        </p:spPr>
-      </p:sp>
-      <p:sp>
-        <p:nvSpPr>
-          <p:cNvPr id="37" name="Text 35"/>
-          <p:cNvSpPr/>
-          <p:nvPr/>
-        </p:nvSpPr>
-        <p:spPr>
-          <a:xfrm>
-            <a:off x="365760" y="4096512"/>
-            <a:ext cx="1371600" cy="804672"/>
-          </a:xfrm>
-          <a:prstGeom prst="rect">
-            <a:avLst/>
-          </a:prstGeom>
-          <a:noFill/>
-          <a:ln/>
-        </p:spPr>
-        <p:txBody>
-          <a:bodyPr wrap="square" lIns="0" tIns="0" rIns="0" bIns="0" rtlCol="0" anchor="ctr"/>
-          <a:lstStyle/>
-          <a:p>
-            <a:pPr algn="ctr" indent="0" marL="0">
-              <a:buNone/>
-            </a:pPr>
-            <a:r>
-              <a:rPr lang="en-US" sz="1100" b="1" dirty="0">
-                <a:solidFill>
-                  <a:srgbClr val="475569"/>
-                </a:solidFill>
-                <a:latin typeface="Trebuchet MS" pitchFamily="34" charset="0"/>
-                <a:ea typeface="Trebuchet MS" pitchFamily="34" charset="-122"/>
-                <a:cs typeface="Trebuchet MS" pitchFamily="34" charset="-120"/>
-              </a:rPr>
-              <a:t>Phonemes</a:t>
-            </a:r>
-            <a:endParaRPr lang="en-US" sz="1100" dirty="0"/>
-          </a:p>
-        </p:txBody>
-      </p:sp>
-      <p:sp>
-        <p:nvSpPr>
-          <p:cNvPr id="38" name="Shape 36"/>
-          <p:cNvSpPr/>
-          <p:nvPr/>
-        </p:nvSpPr>
-        <p:spPr>
-          <a:xfrm>
-            <a:off x="1874520" y="4096512"/>
-            <a:ext cx="6903720" cy="804672"/>
-          </a:xfrm>
-          <a:prstGeom prst="rect">
-            <a:avLst>
-              <a:gd name="adj" fmla="val 6818"/>
-            </a:avLst>
-          </a:prstGeom>
-          <a:solidFill>
-            <a:srgbClr val="F8FAFC"/>
-          </a:solidFill>
-          <a:ln w="12700">
-            <a:solidFill>
-              <a:srgbClr val="E2E8F0"/>
-            </a:solidFill>
             <a:prstDash val="dash"/>
           </a:ln>
         </p:spPr>
       </p:sp>
       <p:sp>
         <p:nvSpPr>
-          <p:cNvPr id="39" name="Text 37"/>
+          <p:cNvPr id="36" name="Text 34"/>
           <p:cNvSpPr/>
           <p:nvPr/>
         </p:nvSpPr>
@@ -15721,7 +15550,7 @@
                 <a:ea typeface="Trebuchet MS" pitchFamily="34" charset="-122"/>
                 <a:cs typeface="Trebuchet MS" pitchFamily="34" charset="-120"/>
               </a:rPr>
-              <a:t>antivirus</a:t>
+              <a:t>antidote</a:t>
             </a:r>
             <a:endParaRPr lang="en-US" sz="2800" dirty="0"/>
           </a:p>
@@ -15972,7 +15801,7 @@
                 <a:ea typeface="Trebuchet MS" pitchFamily="34" charset="-122"/>
                 <a:cs typeface="Trebuchet MS" pitchFamily="34" charset="-120"/>
               </a:rPr>
-              <a:t>virus</a:t>
+              <a:t>dote</a:t>
             </a:r>
             <a:endParaRPr lang="en-US" sz="1300" dirty="0"/>
           </a:p>
@@ -16011,7 +15840,7 @@
                 <a:ea typeface="Calibri" pitchFamily="34" charset="-122"/>
                 <a:cs typeface="Calibri" pitchFamily="34" charset="-120"/>
               </a:rPr>
-              <a:t>harmful agent</a:t>
+              <a:t>that which is given</a:t>
             </a:r>
             <a:endParaRPr lang="en-US" sz="850" dirty="0"/>
           </a:p>
@@ -16118,8 +15947,8 @@
         </p:nvSpPr>
         <p:spPr>
           <a:xfrm>
-            <a:off x="1975104" y="3364992"/>
-            <a:ext cx="1554480" cy="475488"/>
+            <a:off x="2313432" y="3364992"/>
+            <a:ext cx="1645920" cy="475488"/>
           </a:xfrm>
           <a:prstGeom prst="rect">
             <a:avLst>
@@ -16145,8 +15974,8 @@
         </p:nvSpPr>
         <p:spPr>
           <a:xfrm>
-            <a:off x="1975104" y="3364992"/>
-            <a:ext cx="1554480" cy="475488"/>
+            <a:off x="2313432" y="3364992"/>
+            <a:ext cx="1645920" cy="475488"/>
           </a:xfrm>
           <a:prstGeom prst="rect">
             <a:avLst/>
@@ -16184,8 +16013,8 @@
         </p:nvSpPr>
         <p:spPr>
           <a:xfrm>
-            <a:off x="3529584" y="3364992"/>
-            <a:ext cx="73152" cy="475488"/>
+            <a:off x="3959352" y="3364992"/>
+            <a:ext cx="411480" cy="475488"/>
           </a:xfrm>
           <a:prstGeom prst="rect">
             <a:avLst/>
@@ -16223,8 +16052,8 @@
         </p:nvSpPr>
         <p:spPr>
           <a:xfrm>
-            <a:off x="3602736" y="3364992"/>
-            <a:ext cx="1554480" cy="475488"/>
+            <a:off x="4370832" y="3364992"/>
+            <a:ext cx="1645920" cy="475488"/>
           </a:xfrm>
           <a:prstGeom prst="rect">
             <a:avLst>
@@ -16250,8 +16079,8 @@
         </p:nvSpPr>
         <p:spPr>
           <a:xfrm>
-            <a:off x="3602736" y="3364992"/>
-            <a:ext cx="1554480" cy="475488"/>
+            <a:off x="4370832" y="3364992"/>
+            <a:ext cx="1645920" cy="475488"/>
           </a:xfrm>
           <a:prstGeom prst="rect">
             <a:avLst/>
@@ -16289,8 +16118,8 @@
         </p:nvSpPr>
         <p:spPr>
           <a:xfrm>
-            <a:off x="5157216" y="3364992"/>
-            <a:ext cx="73152" cy="475488"/>
+            <a:off x="6016752" y="3364992"/>
+            <a:ext cx="411480" cy="475488"/>
           </a:xfrm>
           <a:prstGeom prst="rect">
             <a:avLst/>
@@ -16328,8 +16157,8 @@
         </p:nvSpPr>
         <p:spPr>
           <a:xfrm>
-            <a:off x="5230368" y="3364992"/>
-            <a:ext cx="1554480" cy="475488"/>
+            <a:off x="6428232" y="3364992"/>
+            <a:ext cx="1645920" cy="475488"/>
           </a:xfrm>
           <a:prstGeom prst="rect">
             <a:avLst>
@@ -16355,8 +16184,8 @@
         </p:nvSpPr>
         <p:spPr>
           <a:xfrm>
-            <a:off x="5230368" y="3364992"/>
-            <a:ext cx="1554480" cy="475488"/>
+            <a:off x="6428232" y="3364992"/>
+            <a:ext cx="1645920" cy="475488"/>
           </a:xfrm>
           <a:prstGeom prst="rect">
             <a:avLst/>
@@ -16380,7 +16209,7 @@
                 <a:ea typeface="Trebuchet MS" pitchFamily="34" charset="-122"/>
                 <a:cs typeface="Trebuchet MS" pitchFamily="34" charset="-120"/>
               </a:rPr>
-              <a:t>vi</a:t>
+              <a:t>dote</a:t>
             </a:r>
             <a:endParaRPr lang="en-US" sz="1400" dirty="0"/>
           </a:p>
@@ -16388,193 +16217,247 @@
       </p:sp>
       <p:sp>
         <p:nvSpPr>
-          <p:cNvPr id="33" name="Text 31"/>
-          <p:cNvSpPr/>
-          <p:nvPr/>
-        </p:nvSpPr>
-        <p:spPr>
-          <a:xfrm>
-            <a:off x="6784848" y="3364992"/>
-            <a:ext cx="73152" cy="475488"/>
-          </a:xfrm>
-          <a:prstGeom prst="rect">
-            <a:avLst/>
-          </a:prstGeom>
-          <a:noFill/>
-          <a:ln/>
-        </p:spPr>
-        <p:txBody>
-          <a:bodyPr wrap="square" lIns="0" tIns="0" rIns="0" bIns="0" rtlCol="0" anchor="ctr"/>
-          <a:lstStyle/>
-          <a:p>
-            <a:pPr algn="ctr" indent="0" marL="0">
-              <a:buNone/>
-            </a:pPr>
-            <a:r>
-              <a:rPr lang="en-US" sz="1600" b="1" dirty="0">
-                <a:solidFill>
-                  <a:srgbClr val="0D9488"/>
+          <p:cNvPr id="33" name="Shape 31"/>
+          <p:cNvSpPr/>
+          <p:nvPr/>
+        </p:nvSpPr>
+        <p:spPr>
+          <a:xfrm>
+            <a:off x="365760" y="4096512"/>
+            <a:ext cx="1371600" cy="804672"/>
+          </a:xfrm>
+          <a:prstGeom prst="rect">
+            <a:avLst>
+              <a:gd name="adj" fmla="val 6818"/>
+            </a:avLst>
+          </a:prstGeom>
+          <a:solidFill>
+            <a:srgbClr val="E2E8F0"/>
+          </a:solidFill>
+          <a:ln w="12700">
+            <a:solidFill>
+              <a:srgbClr val="E2E8F0"/>
+            </a:solidFill>
+            <a:prstDash val="solid"/>
+          </a:ln>
+        </p:spPr>
+      </p:sp>
+      <p:sp>
+        <p:nvSpPr>
+          <p:cNvPr id="34" name="Text 32"/>
+          <p:cNvSpPr/>
+          <p:nvPr/>
+        </p:nvSpPr>
+        <p:spPr>
+          <a:xfrm>
+            <a:off x="365760" y="4096512"/>
+            <a:ext cx="1371600" cy="804672"/>
+          </a:xfrm>
+          <a:prstGeom prst="rect">
+            <a:avLst/>
+          </a:prstGeom>
+          <a:noFill/>
+          <a:ln/>
+        </p:spPr>
+        <p:txBody>
+          <a:bodyPr wrap="square" lIns="0" tIns="0" rIns="0" bIns="0" rtlCol="0" anchor="ctr"/>
+          <a:lstStyle/>
+          <a:p>
+            <a:pPr algn="ctr" indent="0" marL="0">
+              <a:buNone/>
+            </a:pPr>
+            <a:r>
+              <a:rPr lang="en-US" sz="1100" b="1" dirty="0">
+                <a:solidFill>
+                  <a:srgbClr val="475569"/>
                 </a:solidFill>
                 <a:latin typeface="Trebuchet MS" pitchFamily="34" charset="0"/>
                 <a:ea typeface="Trebuchet MS" pitchFamily="34" charset="-122"/>
                 <a:cs typeface="Trebuchet MS" pitchFamily="34" charset="-120"/>
               </a:rPr>
-              <a:t>·</a:t>
-            </a:r>
-            <a:endParaRPr lang="en-US" sz="1600" dirty="0"/>
-          </a:p>
-        </p:txBody>
-      </p:sp>
-      <p:sp>
-        <p:nvSpPr>
-          <p:cNvPr id="34" name="Shape 32"/>
-          <p:cNvSpPr/>
-          <p:nvPr/>
-        </p:nvSpPr>
-        <p:spPr>
-          <a:xfrm>
-            <a:off x="6858000" y="3364992"/>
-            <a:ext cx="1554480" cy="475488"/>
+              <a:t>Phonemes</a:t>
+            </a:r>
+            <a:endParaRPr lang="en-US" sz="1100" dirty="0"/>
+          </a:p>
+        </p:txBody>
+      </p:sp>
+      <p:sp>
+        <p:nvSpPr>
+          <p:cNvPr id="35" name="Shape 33"/>
+          <p:cNvSpPr/>
+          <p:nvPr/>
+        </p:nvSpPr>
+        <p:spPr>
+          <a:xfrm>
+            <a:off x="1874520" y="4096512"/>
+            <a:ext cx="6903720" cy="804672"/>
           </a:xfrm>
           <a:prstGeom prst="rect">
             <a:avLst>
-              <a:gd name="adj" fmla="val 9615"/>
+              <a:gd name="adj" fmla="val 6818"/>
             </a:avLst>
           </a:prstGeom>
           <a:solidFill>
+            <a:srgbClr val="FCE7F3"/>
+          </a:solidFill>
+          <a:ln w="12700">
+            <a:solidFill>
+              <a:srgbClr val="DB2777"/>
+            </a:solidFill>
+            <a:prstDash val="solid"/>
+          </a:ln>
+        </p:spPr>
+      </p:sp>
+      <p:sp>
+        <p:nvSpPr>
+          <p:cNvPr id="36" name="Shape 34"/>
+          <p:cNvSpPr/>
+          <p:nvPr/>
+        </p:nvSpPr>
+        <p:spPr>
+          <a:xfrm>
+            <a:off x="2124837" y="4169664"/>
+            <a:ext cx="685800" cy="384048"/>
+          </a:xfrm>
+          <a:prstGeom prst="rect">
+            <a:avLst>
+              <a:gd name="adj" fmla="val 9524"/>
+            </a:avLst>
+          </a:prstGeom>
+          <a:solidFill>
             <a:srgbClr val="FFFFFF"/>
           </a:solidFill>
           <a:ln w="12700">
             <a:solidFill>
-              <a:srgbClr val="0D9488"/>
-            </a:solidFill>
-            <a:prstDash val="solid"/>
-          </a:ln>
-        </p:spPr>
-      </p:sp>
-      <p:sp>
-        <p:nvSpPr>
-          <p:cNvPr id="35" name="Text 33"/>
-          <p:cNvSpPr/>
-          <p:nvPr/>
-        </p:nvSpPr>
-        <p:spPr>
-          <a:xfrm>
-            <a:off x="6858000" y="3364992"/>
-            <a:ext cx="1554480" cy="475488"/>
-          </a:xfrm>
-          <a:prstGeom prst="rect">
-            <a:avLst/>
-          </a:prstGeom>
-          <a:noFill/>
-          <a:ln/>
-        </p:spPr>
-        <p:txBody>
-          <a:bodyPr wrap="square" lIns="0" tIns="0" rIns="0" bIns="0" rtlCol="0" anchor="ctr"/>
-          <a:lstStyle/>
-          <a:p>
-            <a:pPr algn="ctr" indent="0" marL="0">
-              <a:buNone/>
-            </a:pPr>
-            <a:r>
-              <a:rPr lang="en-US" sz="1400" b="1" dirty="0">
-                <a:solidFill>
-                  <a:srgbClr val="0D9488"/>
+              <a:srgbClr val="DB2777"/>
+            </a:solidFill>
+            <a:prstDash val="solid"/>
+          </a:ln>
+        </p:spPr>
+      </p:sp>
+      <p:sp>
+        <p:nvSpPr>
+          <p:cNvPr id="37" name="Text 35"/>
+          <p:cNvSpPr/>
+          <p:nvPr/>
+        </p:nvSpPr>
+        <p:spPr>
+          <a:xfrm>
+            <a:off x="2124837" y="4169664"/>
+            <a:ext cx="685800" cy="384048"/>
+          </a:xfrm>
+          <a:prstGeom prst="rect">
+            <a:avLst/>
+          </a:prstGeom>
+          <a:noFill/>
+          <a:ln/>
+        </p:spPr>
+        <p:txBody>
+          <a:bodyPr wrap="square" lIns="0" tIns="0" rIns="0" bIns="0" rtlCol="0" anchor="ctr"/>
+          <a:lstStyle/>
+          <a:p>
+            <a:pPr algn="ctr" indent="0" marL="0">
+              <a:buNone/>
+            </a:pPr>
+            <a:r>
+              <a:rPr lang="en-US" sz="900" b="1" dirty="0">
+                <a:solidFill>
+                  <a:srgbClr val="9D174D"/>
                 </a:solidFill>
                 <a:latin typeface="Trebuchet MS" pitchFamily="34" charset="0"/>
                 <a:ea typeface="Trebuchet MS" pitchFamily="34" charset="-122"/>
                 <a:cs typeface="Trebuchet MS" pitchFamily="34" charset="-120"/>
               </a:rPr>
-              <a:t>rus</a:t>
-            </a:r>
-            <a:endParaRPr lang="en-US" sz="1400" dirty="0"/>
-          </a:p>
-        </p:txBody>
-      </p:sp>
-      <p:sp>
-        <p:nvSpPr>
-          <p:cNvPr id="36" name="Shape 34"/>
-          <p:cNvSpPr/>
-          <p:nvPr/>
-        </p:nvSpPr>
-        <p:spPr>
-          <a:xfrm>
-            <a:off x="365760" y="4096512"/>
-            <a:ext cx="1371600" cy="804672"/>
+              <a:t>a</a:t>
+            </a:r>
+            <a:endParaRPr lang="en-US" sz="900" dirty="0"/>
+          </a:p>
+        </p:txBody>
+      </p:sp>
+      <p:sp>
+        <p:nvSpPr>
+          <p:cNvPr id="38" name="Shape 36"/>
+          <p:cNvSpPr/>
+          <p:nvPr/>
+        </p:nvSpPr>
+        <p:spPr>
+          <a:xfrm>
+            <a:off x="3033522" y="4169664"/>
+            <a:ext cx="685800" cy="384048"/>
           </a:xfrm>
           <a:prstGeom prst="rect">
             <a:avLst>
-              <a:gd name="adj" fmla="val 6818"/>
+              <a:gd name="adj" fmla="val 9524"/>
             </a:avLst>
           </a:prstGeom>
           <a:solidFill>
-            <a:srgbClr val="E2E8F0"/>
-          </a:solidFill>
-          <a:ln w="12700">
-            <a:solidFill>
-              <a:srgbClr val="E2E8F0"/>
-            </a:solidFill>
-            <a:prstDash val="solid"/>
-          </a:ln>
-        </p:spPr>
-      </p:sp>
-      <p:sp>
-        <p:nvSpPr>
-          <p:cNvPr id="37" name="Text 35"/>
-          <p:cNvSpPr/>
-          <p:nvPr/>
-        </p:nvSpPr>
-        <p:spPr>
-          <a:xfrm>
-            <a:off x="365760" y="4096512"/>
-            <a:ext cx="1371600" cy="804672"/>
-          </a:xfrm>
-          <a:prstGeom prst="rect">
-            <a:avLst/>
-          </a:prstGeom>
-          <a:noFill/>
-          <a:ln/>
-        </p:spPr>
-        <p:txBody>
-          <a:bodyPr wrap="square" lIns="0" tIns="0" rIns="0" bIns="0" rtlCol="0" anchor="ctr"/>
-          <a:lstStyle/>
-          <a:p>
-            <a:pPr algn="ctr" indent="0" marL="0">
-              <a:buNone/>
-            </a:pPr>
-            <a:r>
-              <a:rPr lang="en-US" sz="1100" b="1" dirty="0">
-                <a:solidFill>
-                  <a:srgbClr val="475569"/>
+            <a:srgbClr val="FFFFFF"/>
+          </a:solidFill>
+          <a:ln w="12700">
+            <a:solidFill>
+              <a:srgbClr val="DB2777"/>
+            </a:solidFill>
+            <a:prstDash val="solid"/>
+          </a:ln>
+        </p:spPr>
+      </p:sp>
+      <p:sp>
+        <p:nvSpPr>
+          <p:cNvPr id="39" name="Text 37"/>
+          <p:cNvSpPr/>
+          <p:nvPr/>
+        </p:nvSpPr>
+        <p:spPr>
+          <a:xfrm>
+            <a:off x="3033522" y="4169664"/>
+            <a:ext cx="685800" cy="384048"/>
+          </a:xfrm>
+          <a:prstGeom prst="rect">
+            <a:avLst/>
+          </a:prstGeom>
+          <a:noFill/>
+          <a:ln/>
+        </p:spPr>
+        <p:txBody>
+          <a:bodyPr wrap="square" lIns="0" tIns="0" rIns="0" bIns="0" rtlCol="0" anchor="ctr"/>
+          <a:lstStyle/>
+          <a:p>
+            <a:pPr algn="ctr" indent="0" marL="0">
+              <a:buNone/>
+            </a:pPr>
+            <a:r>
+              <a:rPr lang="en-US" sz="900" b="1" dirty="0">
+                <a:solidFill>
+                  <a:srgbClr val="9D174D"/>
                 </a:solidFill>
                 <a:latin typeface="Trebuchet MS" pitchFamily="34" charset="0"/>
                 <a:ea typeface="Trebuchet MS" pitchFamily="34" charset="-122"/>
                 <a:cs typeface="Trebuchet MS" pitchFamily="34" charset="-120"/>
               </a:rPr>
-              <a:t>Phonemes</a:t>
-            </a:r>
-            <a:endParaRPr lang="en-US" sz="1100" dirty="0"/>
-          </a:p>
-        </p:txBody>
-      </p:sp>
-      <p:sp>
-        <p:nvSpPr>
-          <p:cNvPr id="38" name="Shape 36"/>
-          <p:cNvSpPr/>
-          <p:nvPr/>
-        </p:nvSpPr>
-        <p:spPr>
-          <a:xfrm>
-            <a:off x="1874520" y="4096512"/>
-            <a:ext cx="6903720" cy="658368"/>
+              <a:t>n</a:t>
+            </a:r>
+            <a:endParaRPr lang="en-US" sz="900" dirty="0"/>
+          </a:p>
+        </p:txBody>
+      </p:sp>
+      <p:sp>
+        <p:nvSpPr>
+          <p:cNvPr id="40" name="Shape 38"/>
+          <p:cNvSpPr/>
+          <p:nvPr/>
+        </p:nvSpPr>
+        <p:spPr>
+          <a:xfrm>
+            <a:off x="3942207" y="4169664"/>
+            <a:ext cx="685800" cy="384048"/>
           </a:xfrm>
           <a:prstGeom prst="rect">
             <a:avLst>
-              <a:gd name="adj" fmla="val 8333"/>
+              <a:gd name="adj" fmla="val 9524"/>
             </a:avLst>
           </a:prstGeom>
           <a:solidFill>
-            <a:srgbClr val="FCE7F3"/>
+            <a:srgbClr val="FFFFFF"/>
           </a:solidFill>
           <a:ln w="12700">
             <a:solidFill>
@@ -16586,41 +16469,14 @@
       </p:sp>
       <p:sp>
         <p:nvSpPr>
-          <p:cNvPr id="39" name="Shape 37"/>
-          <p:cNvSpPr/>
-          <p:nvPr/>
-        </p:nvSpPr>
-        <p:spPr>
-          <a:xfrm>
-            <a:off x="1951330" y="4169664"/>
-            <a:ext cx="676656" cy="475488"/>
-          </a:xfrm>
-          <a:prstGeom prst="rect">
-            <a:avLst>
-              <a:gd name="adj" fmla="val 7692"/>
-            </a:avLst>
-          </a:prstGeom>
-          <a:solidFill>
-            <a:srgbClr val="FFFFFF"/>
-          </a:solidFill>
-          <a:ln w="12700">
-            <a:solidFill>
-              <a:srgbClr val="DB2777"/>
-            </a:solidFill>
-            <a:prstDash val="solid"/>
-          </a:ln>
-        </p:spPr>
-      </p:sp>
-      <p:sp>
-        <p:nvSpPr>
-          <p:cNvPr id="40" name="Text 38"/>
-          <p:cNvSpPr/>
-          <p:nvPr/>
-        </p:nvSpPr>
-        <p:spPr>
-          <a:xfrm>
-            <a:off x="1951330" y="4169664"/>
-            <a:ext cx="676656" cy="475488"/>
+          <p:cNvPr id="41" name="Text 39"/>
+          <p:cNvSpPr/>
+          <p:nvPr/>
+        </p:nvSpPr>
+        <p:spPr>
+          <a:xfrm>
+            <a:off x="3942207" y="4169664"/>
+            <a:ext cx="685800" cy="384048"/>
           </a:xfrm>
           <a:prstGeom prst="rect">
             <a:avLst/>
@@ -16644,7 +16500,7 @@
                 <a:ea typeface="Trebuchet MS" pitchFamily="34" charset="-122"/>
                 <a:cs typeface="Trebuchet MS" pitchFamily="34" charset="-120"/>
               </a:rPr>
-              <a:t>a</a:t>
+              <a:t>t</a:t>
             </a:r>
             <a:endParaRPr lang="en-US" sz="900" dirty="0"/>
           </a:p>
@@ -16652,18 +16508,18 @@
       </p:sp>
       <p:sp>
         <p:nvSpPr>
-          <p:cNvPr id="41" name="Shape 39"/>
-          <p:cNvSpPr/>
-          <p:nvPr/>
-        </p:nvSpPr>
-        <p:spPr>
-          <a:xfrm>
-            <a:off x="2677363" y="4169664"/>
-            <a:ext cx="676656" cy="475488"/>
+          <p:cNvPr id="42" name="Shape 40"/>
+          <p:cNvSpPr/>
+          <p:nvPr/>
+        </p:nvSpPr>
+        <p:spPr>
+          <a:xfrm>
+            <a:off x="4850892" y="4169664"/>
+            <a:ext cx="685800" cy="384048"/>
           </a:xfrm>
           <a:prstGeom prst="rect">
             <a:avLst>
-              <a:gd name="adj" fmla="val 7692"/>
+              <a:gd name="adj" fmla="val 9524"/>
             </a:avLst>
           </a:prstGeom>
           <a:solidFill>
@@ -16679,14 +16535,14 @@
       </p:sp>
       <p:sp>
         <p:nvSpPr>
-          <p:cNvPr id="42" name="Text 40"/>
-          <p:cNvSpPr/>
-          <p:nvPr/>
-        </p:nvSpPr>
-        <p:spPr>
-          <a:xfrm>
-            <a:off x="2677363" y="4169664"/>
-            <a:ext cx="676656" cy="475488"/>
+          <p:cNvPr id="43" name="Text 41"/>
+          <p:cNvSpPr/>
+          <p:nvPr/>
+        </p:nvSpPr>
+        <p:spPr>
+          <a:xfrm>
+            <a:off x="4850892" y="4169664"/>
+            <a:ext cx="685800" cy="384048"/>
           </a:xfrm>
           <a:prstGeom prst="rect">
             <a:avLst/>
@@ -16710,7 +16566,7 @@
                 <a:ea typeface="Trebuchet MS" pitchFamily="34" charset="-122"/>
                 <a:cs typeface="Trebuchet MS" pitchFamily="34" charset="-120"/>
               </a:rPr>
-              <a:t>n</a:t>
+              <a:t>i</a:t>
             </a:r>
             <a:endParaRPr lang="en-US" sz="900" dirty="0"/>
           </a:p>
@@ -16718,18 +16574,18 @@
       </p:sp>
       <p:sp>
         <p:nvSpPr>
-          <p:cNvPr id="43" name="Shape 41"/>
-          <p:cNvSpPr/>
-          <p:nvPr/>
-        </p:nvSpPr>
-        <p:spPr>
-          <a:xfrm>
-            <a:off x="3403397" y="4169664"/>
-            <a:ext cx="676656" cy="475488"/>
+          <p:cNvPr id="44" name="Shape 42"/>
+          <p:cNvSpPr/>
+          <p:nvPr/>
+        </p:nvSpPr>
+        <p:spPr>
+          <a:xfrm>
+            <a:off x="5759577" y="4169664"/>
+            <a:ext cx="685800" cy="384048"/>
           </a:xfrm>
           <a:prstGeom prst="rect">
             <a:avLst>
-              <a:gd name="adj" fmla="val 7692"/>
+              <a:gd name="adj" fmla="val 9524"/>
             </a:avLst>
           </a:prstGeom>
           <a:solidFill>
@@ -16745,14 +16601,14 @@
       </p:sp>
       <p:sp>
         <p:nvSpPr>
-          <p:cNvPr id="44" name="Text 42"/>
-          <p:cNvSpPr/>
-          <p:nvPr/>
-        </p:nvSpPr>
-        <p:spPr>
-          <a:xfrm>
-            <a:off x="3403397" y="4169664"/>
-            <a:ext cx="676656" cy="475488"/>
+          <p:cNvPr id="45" name="Text 43"/>
+          <p:cNvSpPr/>
+          <p:nvPr/>
+        </p:nvSpPr>
+        <p:spPr>
+          <a:xfrm>
+            <a:off x="5759577" y="4169664"/>
+            <a:ext cx="685800" cy="384048"/>
           </a:xfrm>
           <a:prstGeom prst="rect">
             <a:avLst/>
@@ -16776,7 +16632,7 @@
                 <a:ea typeface="Trebuchet MS" pitchFamily="34" charset="-122"/>
                 <a:cs typeface="Trebuchet MS" pitchFamily="34" charset="-120"/>
               </a:rPr>
-              <a:t>t</a:t>
+              <a:t>d</a:t>
             </a:r>
             <a:endParaRPr lang="en-US" sz="900" dirty="0"/>
           </a:p>
@@ -16784,18 +16640,18 @@
       </p:sp>
       <p:sp>
         <p:nvSpPr>
-          <p:cNvPr id="45" name="Shape 43"/>
-          <p:cNvSpPr/>
-          <p:nvPr/>
-        </p:nvSpPr>
-        <p:spPr>
-          <a:xfrm>
-            <a:off x="4129430" y="4169664"/>
-            <a:ext cx="676656" cy="475488"/>
+          <p:cNvPr id="46" name="Shape 44"/>
+          <p:cNvSpPr/>
+          <p:nvPr/>
+        </p:nvSpPr>
+        <p:spPr>
+          <a:xfrm>
+            <a:off x="6668262" y="4169664"/>
+            <a:ext cx="685800" cy="384048"/>
           </a:xfrm>
           <a:prstGeom prst="rect">
             <a:avLst>
-              <a:gd name="adj" fmla="val 7692"/>
+              <a:gd name="adj" fmla="val 9524"/>
             </a:avLst>
           </a:prstGeom>
           <a:solidFill>
@@ -16811,14 +16667,14 @@
       </p:sp>
       <p:sp>
         <p:nvSpPr>
-          <p:cNvPr id="46" name="Text 44"/>
-          <p:cNvSpPr/>
-          <p:nvPr/>
-        </p:nvSpPr>
-        <p:spPr>
-          <a:xfrm>
-            <a:off x="4129430" y="4169664"/>
-            <a:ext cx="676656" cy="475488"/>
+          <p:cNvPr id="47" name="Text 45"/>
+          <p:cNvSpPr/>
+          <p:nvPr/>
+        </p:nvSpPr>
+        <p:spPr>
+          <a:xfrm>
+            <a:off x="6668262" y="4169664"/>
+            <a:ext cx="685800" cy="384048"/>
           </a:xfrm>
           <a:prstGeom prst="rect">
             <a:avLst/>
@@ -16842,7 +16698,7 @@
                 <a:ea typeface="Trebuchet MS" pitchFamily="34" charset="-122"/>
                 <a:cs typeface="Trebuchet MS" pitchFamily="34" charset="-120"/>
               </a:rPr>
-              <a:t>i</a:t>
+              <a:t>o</a:t>
             </a:r>
             <a:endParaRPr lang="en-US" sz="900" dirty="0"/>
           </a:p>
@@ -16850,18 +16706,18 @@
       </p:sp>
       <p:sp>
         <p:nvSpPr>
-          <p:cNvPr id="47" name="Shape 45"/>
-          <p:cNvSpPr/>
-          <p:nvPr/>
-        </p:nvSpPr>
-        <p:spPr>
-          <a:xfrm>
-            <a:off x="4855464" y="4169664"/>
-            <a:ext cx="676656" cy="475488"/>
+          <p:cNvPr id="48" name="Shape 46"/>
+          <p:cNvSpPr/>
+          <p:nvPr/>
+        </p:nvSpPr>
+        <p:spPr>
+          <a:xfrm>
+            <a:off x="7576947" y="4169664"/>
+            <a:ext cx="685800" cy="384048"/>
           </a:xfrm>
           <a:prstGeom prst="rect">
             <a:avLst>
-              <a:gd name="adj" fmla="val 7692"/>
+              <a:gd name="adj" fmla="val 9524"/>
             </a:avLst>
           </a:prstGeom>
           <a:solidFill>
@@ -16877,14 +16733,14 @@
       </p:sp>
       <p:sp>
         <p:nvSpPr>
-          <p:cNvPr id="48" name="Text 46"/>
-          <p:cNvSpPr/>
-          <p:nvPr/>
-        </p:nvSpPr>
-        <p:spPr>
-          <a:xfrm>
-            <a:off x="4855464" y="4169664"/>
-            <a:ext cx="676656" cy="475488"/>
+          <p:cNvPr id="49" name="Text 47"/>
+          <p:cNvSpPr/>
+          <p:nvPr/>
+        </p:nvSpPr>
+        <p:spPr>
+          <a:xfrm>
+            <a:off x="7576947" y="4169664"/>
+            <a:ext cx="685800" cy="384048"/>
           </a:xfrm>
           <a:prstGeom prst="rect">
             <a:avLst/>
@@ -16908,7 +16764,7 @@
                 <a:ea typeface="Trebuchet MS" pitchFamily="34" charset="-122"/>
                 <a:cs typeface="Trebuchet MS" pitchFamily="34" charset="-120"/>
               </a:rPr>
-              <a:t>v</a:t>
+              <a:t>te</a:t>
             </a:r>
             <a:endParaRPr lang="en-US" sz="900" dirty="0"/>
           </a:p>
@@ -16916,265 +16772,40 @@
       </p:sp>
       <p:sp>
         <p:nvSpPr>
-          <p:cNvPr id="49" name="Shape 47"/>
-          <p:cNvSpPr/>
-          <p:nvPr/>
-        </p:nvSpPr>
-        <p:spPr>
-          <a:xfrm>
-            <a:off x="5581498" y="4169664"/>
-            <a:ext cx="676656" cy="475488"/>
-          </a:xfrm>
-          <a:prstGeom prst="rect">
-            <a:avLst>
-              <a:gd name="adj" fmla="val 7692"/>
-            </a:avLst>
-          </a:prstGeom>
-          <a:solidFill>
-            <a:srgbClr val="FFFFFF"/>
-          </a:solidFill>
-          <a:ln w="12700">
-            <a:solidFill>
-              <a:srgbClr val="DB2777"/>
-            </a:solidFill>
-            <a:prstDash val="solid"/>
-          </a:ln>
-        </p:spPr>
-      </p:sp>
-      <p:sp>
-        <p:nvSpPr>
           <p:cNvPr id="50" name="Text 48"/>
           <p:cNvSpPr/>
           <p:nvPr/>
         </p:nvSpPr>
         <p:spPr>
           <a:xfrm>
-            <a:off x="5581498" y="4169664"/>
-            <a:ext cx="676656" cy="475488"/>
-          </a:xfrm>
-          <a:prstGeom prst="rect">
-            <a:avLst/>
-          </a:prstGeom>
-          <a:noFill/>
-          <a:ln/>
-        </p:spPr>
-        <p:txBody>
-          <a:bodyPr wrap="square" lIns="0" tIns="0" rIns="0" bIns="0" rtlCol="0" anchor="ctr"/>
-          <a:lstStyle/>
-          <a:p>
-            <a:pPr algn="ctr" indent="0" marL="0">
-              <a:buNone/>
-            </a:pPr>
-            <a:r>
-              <a:rPr lang="en-US" sz="900" b="1" dirty="0">
-                <a:solidFill>
-                  <a:srgbClr val="9D174D"/>
-                </a:solidFill>
-                <a:latin typeface="Trebuchet MS" pitchFamily="34" charset="0"/>
-                <a:ea typeface="Trebuchet MS" pitchFamily="34" charset="-122"/>
-                <a:cs typeface="Trebuchet MS" pitchFamily="34" charset="-120"/>
-              </a:rPr>
-              <a:t>i</a:t>
-            </a:r>
-            <a:endParaRPr lang="en-US" sz="900" dirty="0"/>
-          </a:p>
-        </p:txBody>
-      </p:sp>
-      <p:sp>
-        <p:nvSpPr>
-          <p:cNvPr id="51" name="Shape 49"/>
-          <p:cNvSpPr/>
-          <p:nvPr/>
-        </p:nvSpPr>
-        <p:spPr>
-          <a:xfrm>
-            <a:off x="6307531" y="4169664"/>
-            <a:ext cx="676656" cy="475488"/>
-          </a:xfrm>
-          <a:prstGeom prst="rect">
-            <a:avLst>
-              <a:gd name="adj" fmla="val 7692"/>
-            </a:avLst>
-          </a:prstGeom>
-          <a:solidFill>
-            <a:srgbClr val="FFFFFF"/>
-          </a:solidFill>
-          <a:ln w="12700">
-            <a:solidFill>
-              <a:srgbClr val="DB2777"/>
-            </a:solidFill>
-            <a:prstDash val="solid"/>
-          </a:ln>
-        </p:spPr>
-      </p:sp>
-      <p:sp>
-        <p:nvSpPr>
-          <p:cNvPr id="52" name="Text 50"/>
-          <p:cNvSpPr/>
-          <p:nvPr/>
-        </p:nvSpPr>
-        <p:spPr>
-          <a:xfrm>
-            <a:off x="6307531" y="4169664"/>
-            <a:ext cx="676656" cy="475488"/>
-          </a:xfrm>
-          <a:prstGeom prst="rect">
-            <a:avLst/>
-          </a:prstGeom>
-          <a:noFill/>
-          <a:ln/>
-        </p:spPr>
-        <p:txBody>
-          <a:bodyPr wrap="square" lIns="0" tIns="0" rIns="0" bIns="0" rtlCol="0" anchor="ctr"/>
-          <a:lstStyle/>
-          <a:p>
-            <a:pPr algn="ctr" indent="0" marL="0">
-              <a:buNone/>
-            </a:pPr>
-            <a:r>
-              <a:rPr lang="en-US" sz="900" b="1" dirty="0">
-                <a:solidFill>
-                  <a:srgbClr val="9D174D"/>
-                </a:solidFill>
-                <a:latin typeface="Trebuchet MS" pitchFamily="34" charset="0"/>
-                <a:ea typeface="Trebuchet MS" pitchFamily="34" charset="-122"/>
-                <a:cs typeface="Trebuchet MS" pitchFamily="34" charset="-120"/>
-              </a:rPr>
-              <a:t>r</a:t>
-            </a:r>
-            <a:endParaRPr lang="en-US" sz="900" dirty="0"/>
-          </a:p>
-        </p:txBody>
-      </p:sp>
-      <p:sp>
-        <p:nvSpPr>
-          <p:cNvPr id="53" name="Shape 51"/>
-          <p:cNvSpPr/>
-          <p:nvPr/>
-        </p:nvSpPr>
-        <p:spPr>
-          <a:xfrm>
-            <a:off x="7033565" y="4169664"/>
-            <a:ext cx="676656" cy="475488"/>
-          </a:xfrm>
-          <a:prstGeom prst="rect">
-            <a:avLst>
-              <a:gd name="adj" fmla="val 7692"/>
-            </a:avLst>
-          </a:prstGeom>
-          <a:solidFill>
-            <a:srgbClr val="FFFFFF"/>
-          </a:solidFill>
-          <a:ln w="12700">
-            <a:solidFill>
-              <a:srgbClr val="DB2777"/>
-            </a:solidFill>
-            <a:prstDash val="solid"/>
-          </a:ln>
-        </p:spPr>
-      </p:sp>
-      <p:sp>
-        <p:nvSpPr>
-          <p:cNvPr id="54" name="Text 52"/>
-          <p:cNvSpPr/>
-          <p:nvPr/>
-        </p:nvSpPr>
-        <p:spPr>
-          <a:xfrm>
-            <a:off x="7033565" y="4169664"/>
-            <a:ext cx="676656" cy="475488"/>
-          </a:xfrm>
-          <a:prstGeom prst="rect">
-            <a:avLst/>
-          </a:prstGeom>
-          <a:noFill/>
-          <a:ln/>
-        </p:spPr>
-        <p:txBody>
-          <a:bodyPr wrap="square" lIns="0" tIns="0" rIns="0" bIns="0" rtlCol="0" anchor="ctr"/>
-          <a:lstStyle/>
-          <a:p>
-            <a:pPr algn="ctr" indent="0" marL="0">
-              <a:buNone/>
-            </a:pPr>
-            <a:r>
-              <a:rPr lang="en-US" sz="900" b="1" dirty="0">
-                <a:solidFill>
-                  <a:srgbClr val="9D174D"/>
-                </a:solidFill>
-                <a:latin typeface="Trebuchet MS" pitchFamily="34" charset="0"/>
-                <a:ea typeface="Trebuchet MS" pitchFamily="34" charset="-122"/>
-                <a:cs typeface="Trebuchet MS" pitchFamily="34" charset="-120"/>
-              </a:rPr>
-              <a:t>u</a:t>
-            </a:r>
-            <a:endParaRPr lang="en-US" sz="900" dirty="0"/>
-          </a:p>
-        </p:txBody>
-      </p:sp>
-      <p:sp>
-        <p:nvSpPr>
-          <p:cNvPr id="55" name="Shape 53"/>
-          <p:cNvSpPr/>
-          <p:nvPr/>
-        </p:nvSpPr>
-        <p:spPr>
-          <a:xfrm>
-            <a:off x="7759598" y="4169664"/>
-            <a:ext cx="676656" cy="475488"/>
-          </a:xfrm>
-          <a:prstGeom prst="rect">
-            <a:avLst>
-              <a:gd name="adj" fmla="val 7692"/>
-            </a:avLst>
-          </a:prstGeom>
-          <a:solidFill>
-            <a:srgbClr val="FFFFFF"/>
-          </a:solidFill>
-          <a:ln w="12700">
-            <a:solidFill>
-              <a:srgbClr val="DB2777"/>
-            </a:solidFill>
-            <a:prstDash val="solid"/>
-          </a:ln>
-        </p:spPr>
-      </p:sp>
-      <p:sp>
-        <p:nvSpPr>
-          <p:cNvPr id="56" name="Text 54"/>
-          <p:cNvSpPr/>
-          <p:nvPr/>
-        </p:nvSpPr>
-        <p:spPr>
-          <a:xfrm>
-            <a:off x="7759598" y="4169664"/>
-            <a:ext cx="676656" cy="475488"/>
-          </a:xfrm>
-          <a:prstGeom prst="rect">
-            <a:avLst/>
-          </a:prstGeom>
-          <a:noFill/>
-          <a:ln/>
-        </p:spPr>
-        <p:txBody>
-          <a:bodyPr wrap="square" lIns="0" tIns="0" rIns="0" bIns="0" rtlCol="0" anchor="ctr"/>
-          <a:lstStyle/>
-          <a:p>
-            <a:pPr algn="ctr" indent="0" marL="0">
-              <a:buNone/>
-            </a:pPr>
-            <a:r>
-              <a:rPr lang="en-US" sz="900" b="1" dirty="0">
-                <a:solidFill>
-                  <a:srgbClr val="9D174D"/>
-                </a:solidFill>
-                <a:latin typeface="Trebuchet MS" pitchFamily="34" charset="0"/>
-                <a:ea typeface="Trebuchet MS" pitchFamily="34" charset="-122"/>
-                <a:cs typeface="Trebuchet MS" pitchFamily="34" charset="-120"/>
-              </a:rPr>
-              <a:t>s</a:t>
-            </a:r>
-            <a:endParaRPr lang="en-US" sz="900" dirty="0"/>
+            <a:off x="7576947" y="4572000"/>
+            <a:ext cx="685800" cy="219456"/>
+          </a:xfrm>
+          <a:prstGeom prst="rect">
+            <a:avLst/>
+          </a:prstGeom>
+          <a:noFill/>
+          <a:ln/>
+        </p:spPr>
+        <p:txBody>
+          <a:bodyPr wrap="square" lIns="0" tIns="0" rIns="0" bIns="0" rtlCol="0" anchor="t"/>
+          <a:lstStyle/>
+          <a:p>
+            <a:pPr algn="ctr" indent="0" marL="0">
+              <a:buNone/>
+            </a:pPr>
+            <a:r>
+              <a:rPr lang="en-US" sz="750" i="1" dirty="0">
+                <a:solidFill>
+                  <a:srgbClr val="94A3B8"/>
+                </a:solidFill>
+                <a:latin typeface="Calibri" pitchFamily="34" charset="0"/>
+                <a:ea typeface="Calibri" pitchFamily="34" charset="-122"/>
+                <a:cs typeface="Calibri" pitchFamily="34" charset="-120"/>
+              </a:rPr>
+              <a:t>/t/</a:t>
+            </a:r>
+            <a:endParaRPr lang="en-US" sz="750" dirty="0"/>
           </a:p>
         </p:txBody>
       </p:sp>
@@ -18498,7 +18129,7 @@
                 <a:ea typeface="Calibri" pitchFamily="34" charset="-122"/>
                 <a:cs typeface="Calibri" pitchFamily="34" charset="-120"/>
               </a:rPr>
-              <a:t>The </a:t>
+              <a:t>Moving </a:t>
             </a:r>
             <a:pPr algn="l" indent="0" marL="0">
               <a:buNone/>
@@ -18515,7 +18146,7 @@
                 <a:ea typeface="Calibri" pitchFamily="34" charset="-122"/>
                 <a:cs typeface="Calibri" pitchFamily="34" charset="-120"/>
               </a:rPr>
-              <a:t>antibiotic</a:t>
+              <a:t>anticlockwise</a:t>
             </a:r>
             <a:pPr algn="l" indent="0" marL="0">
               <a:buNone/>
@@ -18529,7 +18160,7 @@
                 <a:ea typeface="Calibri" pitchFamily="34" charset="-122"/>
                 <a:cs typeface="Calibri" pitchFamily="34" charset="-120"/>
               </a:rPr>
-              <a:t> helped Jake recover quickly, but his </a:t>
+              <a:t>, she stirred the </a:t>
             </a:r>
             <a:pPr algn="l" indent="0" marL="0">
               <a:buNone/>
@@ -18560,7 +18191,7 @@
                 <a:ea typeface="Calibri" pitchFamily="34" charset="-122"/>
                 <a:cs typeface="Calibri" pitchFamily="34" charset="-120"/>
               </a:rPr>
-              <a:t> behaviour at the clinic and the </a:t>
+              <a:t> mixture while her </a:t>
             </a:r>
             <a:pPr algn="l" indent="0" marL="0">
               <a:buNone/>
@@ -18577,7 +18208,7 @@
                 <a:ea typeface="Calibri" pitchFamily="34" charset="-122"/>
                 <a:cs typeface="Calibri" pitchFamily="34" charset="-120"/>
               </a:rPr>
-              <a:t>anticlimax</a:t>
+              <a:t>antivirus</a:t>
             </a:r>
             <a:pPr algn="l" indent="0" marL="0">
               <a:buNone/>
@@ -18591,7 +18222,7 @@
                 <a:ea typeface="Calibri" pitchFamily="34" charset="-122"/>
                 <a:cs typeface="Calibri" pitchFamily="34" charset="-120"/>
               </a:rPr>
-              <a:t> of missing the game left him feeling upset.</a:t>
+              <a:t> program ran in the background.</a:t>
             </a:r>
             <a:endParaRPr lang="en-US" sz="1800" dirty="0"/>
           </a:p>
@@ -18746,7 +18377,7 @@
                 <a:ea typeface="Trebuchet MS" pitchFamily="34" charset="-122"/>
                 <a:cs typeface="Trebuchet MS" pitchFamily="34" charset="-120"/>
               </a:rPr>
-              <a:t>antibiotic</a:t>
+              <a:t>anticlockwise</a:t>
             </a:r>
             <a:endParaRPr lang="en-US" sz="1400" dirty="0"/>
           </a:p>
@@ -19002,7 +18633,7 @@
                 <a:ea typeface="Trebuchet MS" pitchFamily="34" charset="-122"/>
                 <a:cs typeface="Trebuchet MS" pitchFamily="34" charset="-120"/>
               </a:rPr>
-              <a:t>anticlimax</a:t>
+              <a:t>antivirus</a:t>
             </a:r>
             <a:endParaRPr lang="en-US" sz="1400" dirty="0"/>
           </a:p>
@@ -19472,7 +19103,7 @@
                 <a:ea typeface="Trebuchet MS" pitchFamily="34" charset="-122"/>
                 <a:cs typeface="Trebuchet MS" pitchFamily="34" charset="-120"/>
               </a:rPr>
-              <a:t>antibiotic</a:t>
+              <a:t>anticlockwise</a:t>
             </a:r>
             <a:endParaRPr lang="en-US" sz="2800" dirty="0"/>
           </a:p>
@@ -20299,7 +19930,7 @@
                 <a:ea typeface="Trebuchet MS" pitchFamily="34" charset="-122"/>
                 <a:cs typeface="Trebuchet MS" pitchFamily="34" charset="-120"/>
               </a:rPr>
-              <a:t>antibiotic</a:t>
+              <a:t>anticlockwise</a:t>
             </a:r>
             <a:endParaRPr lang="en-US" sz="2800" dirty="0"/>
           </a:p>
@@ -20477,7 +20108,7 @@
                 <a:ea typeface="Calibri" pitchFamily="34" charset="-122"/>
                 <a:cs typeface="Calibri" pitchFamily="34" charset="-120"/>
               </a:rPr>
-              <a:t>against</a:t>
+              <a:t>against, opposite</a:t>
             </a:r>
             <a:endParaRPr lang="en-US" sz="850" dirty="0"/>
           </a:p>
@@ -20550,7 +20181,7 @@
                 <a:ea typeface="Trebuchet MS" pitchFamily="34" charset="-122"/>
                 <a:cs typeface="Trebuchet MS" pitchFamily="34" charset="-120"/>
               </a:rPr>
-              <a:t>bio</a:t>
+              <a:t>clock</a:t>
             </a:r>
             <a:endParaRPr lang="en-US" sz="1300" dirty="0"/>
           </a:p>
@@ -20589,7 +20220,7 @@
                 <a:ea typeface="Calibri" pitchFamily="34" charset="-122"/>
                 <a:cs typeface="Calibri" pitchFamily="34" charset="-120"/>
               </a:rPr>
-              <a:t>life</a:t>
+              <a:t>a device that tells time</a:t>
             </a:r>
             <a:endParaRPr lang="en-US" sz="850" dirty="0"/>
           </a:p>
@@ -20662,7 +20293,7 @@
                 <a:ea typeface="Trebuchet MS" pitchFamily="34" charset="-122"/>
                 <a:cs typeface="Trebuchet MS" pitchFamily="34" charset="-120"/>
               </a:rPr>
-              <a:t>tic</a:t>
+              <a:t>wise</a:t>
             </a:r>
             <a:endParaRPr lang="en-US" sz="1300" dirty="0"/>
           </a:p>
@@ -20701,7 +20332,7 @@
                 <a:ea typeface="Calibri" pitchFamily="34" charset="-122"/>
                 <a:cs typeface="Calibri" pitchFamily="34" charset="-120"/>
               </a:rPr>
-              <a:t>relating to</a:t>
+              <a:t>in the direction or manner of</a:t>
             </a:r>
             <a:endParaRPr lang="en-US" sz="850" dirty="0"/>
           </a:p>
@@ -21396,7 +21027,7 @@
                 <a:ea typeface="Trebuchet MS" pitchFamily="34" charset="-122"/>
                 <a:cs typeface="Trebuchet MS" pitchFamily="34" charset="-120"/>
               </a:rPr>
-              <a:t>antibiotic</a:t>
+              <a:t>anticlockwise</a:t>
             </a:r>
             <a:endParaRPr lang="en-US" sz="2800" dirty="0"/>
           </a:p>
@@ -21574,7 +21205,7 @@
                 <a:ea typeface="Calibri" pitchFamily="34" charset="-122"/>
                 <a:cs typeface="Calibri" pitchFamily="34" charset="-120"/>
               </a:rPr>
-              <a:t>against</a:t>
+              <a:t>against, opposite</a:t>
             </a:r>
             <a:endParaRPr lang="en-US" sz="850" dirty="0"/>
           </a:p>
@@ -21647,7 +21278,7 @@
                 <a:ea typeface="Trebuchet MS" pitchFamily="34" charset="-122"/>
                 <a:cs typeface="Trebuchet MS" pitchFamily="34" charset="-120"/>
               </a:rPr>
-              <a:t>bio</a:t>
+              <a:t>clock</a:t>
             </a:r>
             <a:endParaRPr lang="en-US" sz="1300" dirty="0"/>
           </a:p>
@@ -21686,7 +21317,7 @@
                 <a:ea typeface="Calibri" pitchFamily="34" charset="-122"/>
                 <a:cs typeface="Calibri" pitchFamily="34" charset="-120"/>
               </a:rPr>
-              <a:t>life</a:t>
+              <a:t>a device that tells time</a:t>
             </a:r>
             <a:endParaRPr lang="en-US" sz="850" dirty="0"/>
           </a:p>
@@ -21759,7 +21390,7 @@
                 <a:ea typeface="Trebuchet MS" pitchFamily="34" charset="-122"/>
                 <a:cs typeface="Trebuchet MS" pitchFamily="34" charset="-120"/>
               </a:rPr>
-              <a:t>tic</a:t>
+              <a:t>wise</a:t>
             </a:r>
             <a:endParaRPr lang="en-US" sz="1300" dirty="0"/>
           </a:p>
@@ -21798,7 +21429,7 @@
                 <a:ea typeface="Calibri" pitchFamily="34" charset="-122"/>
                 <a:cs typeface="Calibri" pitchFamily="34" charset="-120"/>
               </a:rPr>
-              <a:t>relating to</a:t>
+              <a:t>in the direction or manner of</a:t>
             </a:r>
             <a:endParaRPr lang="en-US" sz="850" dirty="0"/>
           </a:p>
@@ -21905,8 +21536,8 @@
         </p:nvSpPr>
         <p:spPr>
           <a:xfrm>
-            <a:off x="1978152" y="3364992"/>
-            <a:ext cx="1225296" cy="475488"/>
+            <a:off x="1975104" y="3364992"/>
+            <a:ext cx="1554480" cy="475488"/>
           </a:xfrm>
           <a:prstGeom prst="rect">
             <a:avLst>
@@ -21932,8 +21563,8 @@
         </p:nvSpPr>
         <p:spPr>
           <a:xfrm>
-            <a:off x="1978152" y="3364992"/>
-            <a:ext cx="1225296" cy="475488"/>
+            <a:off x="1975104" y="3364992"/>
+            <a:ext cx="1554480" cy="475488"/>
           </a:xfrm>
           <a:prstGeom prst="rect">
             <a:avLst/>
@@ -21971,8 +21602,8 @@
         </p:nvSpPr>
         <p:spPr>
           <a:xfrm>
-            <a:off x="3203448" y="3364992"/>
-            <a:ext cx="76200" cy="475488"/>
+            <a:off x="3529584" y="3364992"/>
+            <a:ext cx="73152" cy="475488"/>
           </a:xfrm>
           <a:prstGeom prst="rect">
             <a:avLst/>
@@ -22010,8 +21641,8 @@
         </p:nvSpPr>
         <p:spPr>
           <a:xfrm>
-            <a:off x="3279648" y="3364992"/>
-            <a:ext cx="1225296" cy="475488"/>
+            <a:off x="3602736" y="3364992"/>
+            <a:ext cx="1554480" cy="475488"/>
           </a:xfrm>
           <a:prstGeom prst="rect">
             <a:avLst>
@@ -22037,8 +21668,8 @@
         </p:nvSpPr>
         <p:spPr>
           <a:xfrm>
-            <a:off x="3279648" y="3364992"/>
-            <a:ext cx="1225296" cy="475488"/>
+            <a:off x="3602736" y="3364992"/>
+            <a:ext cx="1554480" cy="475488"/>
           </a:xfrm>
           <a:prstGeom prst="rect">
             <a:avLst/>
@@ -22076,8 +21707,8 @@
         </p:nvSpPr>
         <p:spPr>
           <a:xfrm>
-            <a:off x="4504944" y="3364992"/>
-            <a:ext cx="76200" cy="475488"/>
+            <a:off x="5157216" y="3364992"/>
+            <a:ext cx="73152" cy="475488"/>
           </a:xfrm>
           <a:prstGeom prst="rect">
             <a:avLst/>
@@ -22115,8 +21746,8 @@
         </p:nvSpPr>
         <p:spPr>
           <a:xfrm>
-            <a:off x="4581144" y="3364992"/>
-            <a:ext cx="1225296" cy="475488"/>
+            <a:off x="5230368" y="3364992"/>
+            <a:ext cx="1554480" cy="475488"/>
           </a:xfrm>
           <a:prstGeom prst="rect">
             <a:avLst>
@@ -22142,8 +21773,8 @@
         </p:nvSpPr>
         <p:spPr>
           <a:xfrm>
-            <a:off x="4581144" y="3364992"/>
-            <a:ext cx="1225296" cy="475488"/>
+            <a:off x="5230368" y="3364992"/>
+            <a:ext cx="1554480" cy="475488"/>
           </a:xfrm>
           <a:prstGeom prst="rect">
             <a:avLst/>
@@ -22167,7 +21798,7 @@
                 <a:ea typeface="Trebuchet MS" pitchFamily="34" charset="-122"/>
                 <a:cs typeface="Trebuchet MS" pitchFamily="34" charset="-120"/>
               </a:rPr>
-              <a:t>bi</a:t>
+              <a:t>clock</a:t>
             </a:r>
             <a:endParaRPr lang="en-US" sz="1400" dirty="0"/>
           </a:p>
@@ -22181,8 +21812,8 @@
         </p:nvSpPr>
         <p:spPr>
           <a:xfrm>
-            <a:off x="5806440" y="3364992"/>
-            <a:ext cx="76200" cy="475488"/>
+            <a:off x="6784848" y="3364992"/>
+            <a:ext cx="73152" cy="475488"/>
           </a:xfrm>
           <a:prstGeom prst="rect">
             <a:avLst/>
@@ -22220,8 +21851,8 @@
         </p:nvSpPr>
         <p:spPr>
           <a:xfrm>
-            <a:off x="5882640" y="3364992"/>
-            <a:ext cx="1225296" cy="475488"/>
+            <a:off x="6858000" y="3364992"/>
+            <a:ext cx="1554480" cy="475488"/>
           </a:xfrm>
           <a:prstGeom prst="rect">
             <a:avLst>
@@ -22247,8 +21878,8 @@
         </p:nvSpPr>
         <p:spPr>
           <a:xfrm>
-            <a:off x="5882640" y="3364992"/>
-            <a:ext cx="1225296" cy="475488"/>
+            <a:off x="6858000" y="3364992"/>
+            <a:ext cx="1554480" cy="475488"/>
           </a:xfrm>
           <a:prstGeom prst="rect">
             <a:avLst/>
@@ -22272,7 +21903,7 @@
                 <a:ea typeface="Trebuchet MS" pitchFamily="34" charset="-122"/>
                 <a:cs typeface="Trebuchet MS" pitchFamily="34" charset="-120"/>
               </a:rPr>
-              <a:t>ot</a:t>
+              <a:t>wise</a:t>
             </a:r>
             <a:endParaRPr lang="en-US" sz="1400" dirty="0"/>
           </a:p>
@@ -22280,119 +21911,80 @@
       </p:sp>
       <p:sp>
         <p:nvSpPr>
-          <p:cNvPr id="39" name="Text 37"/>
-          <p:cNvSpPr/>
-          <p:nvPr/>
-        </p:nvSpPr>
-        <p:spPr>
-          <a:xfrm>
-            <a:off x="7107936" y="3364992"/>
-            <a:ext cx="76200" cy="475488"/>
-          </a:xfrm>
-          <a:prstGeom prst="rect">
-            <a:avLst/>
-          </a:prstGeom>
-          <a:noFill/>
-          <a:ln/>
-        </p:spPr>
-        <p:txBody>
-          <a:bodyPr wrap="square" lIns="0" tIns="0" rIns="0" bIns="0" rtlCol="0" anchor="ctr"/>
-          <a:lstStyle/>
-          <a:p>
-            <a:pPr algn="ctr" indent="0" marL="0">
-              <a:buNone/>
-            </a:pPr>
-            <a:r>
-              <a:rPr lang="en-US" sz="1600" b="1" dirty="0">
-                <a:solidFill>
-                  <a:srgbClr val="0D9488"/>
+          <p:cNvPr id="39" name="Shape 37"/>
+          <p:cNvSpPr/>
+          <p:nvPr/>
+        </p:nvSpPr>
+        <p:spPr>
+          <a:xfrm>
+            <a:off x="365760" y="4096512"/>
+            <a:ext cx="1371600" cy="804672"/>
+          </a:xfrm>
+          <a:prstGeom prst="rect">
+            <a:avLst>
+              <a:gd name="adj" fmla="val 6818"/>
+            </a:avLst>
+          </a:prstGeom>
+          <a:solidFill>
+            <a:srgbClr val="E2E8F0"/>
+          </a:solidFill>
+          <a:ln w="12700">
+            <a:solidFill>
+              <a:srgbClr val="E2E8F0"/>
+            </a:solidFill>
+            <a:prstDash val="solid"/>
+          </a:ln>
+        </p:spPr>
+      </p:sp>
+      <p:sp>
+        <p:nvSpPr>
+          <p:cNvPr id="40" name="Text 38"/>
+          <p:cNvSpPr/>
+          <p:nvPr/>
+        </p:nvSpPr>
+        <p:spPr>
+          <a:xfrm>
+            <a:off x="365760" y="4096512"/>
+            <a:ext cx="1371600" cy="804672"/>
+          </a:xfrm>
+          <a:prstGeom prst="rect">
+            <a:avLst/>
+          </a:prstGeom>
+          <a:noFill/>
+          <a:ln/>
+        </p:spPr>
+        <p:txBody>
+          <a:bodyPr wrap="square" lIns="0" tIns="0" rIns="0" bIns="0" rtlCol="0" anchor="ctr"/>
+          <a:lstStyle/>
+          <a:p>
+            <a:pPr algn="ctr" indent="0" marL="0">
+              <a:buNone/>
+            </a:pPr>
+            <a:r>
+              <a:rPr lang="en-US" sz="1100" b="1" dirty="0">
+                <a:solidFill>
+                  <a:srgbClr val="475569"/>
                 </a:solidFill>
                 <a:latin typeface="Trebuchet MS" pitchFamily="34" charset="0"/>
                 <a:ea typeface="Trebuchet MS" pitchFamily="34" charset="-122"/>
                 <a:cs typeface="Trebuchet MS" pitchFamily="34" charset="-120"/>
               </a:rPr>
-              <a:t>·</a:t>
-            </a:r>
-            <a:endParaRPr lang="en-US" sz="1600" dirty="0"/>
-          </a:p>
-        </p:txBody>
-      </p:sp>
-      <p:sp>
-        <p:nvSpPr>
-          <p:cNvPr id="40" name="Shape 38"/>
-          <p:cNvSpPr/>
-          <p:nvPr/>
-        </p:nvSpPr>
-        <p:spPr>
-          <a:xfrm>
-            <a:off x="7184136" y="3364992"/>
-            <a:ext cx="1225296" cy="475488"/>
-          </a:xfrm>
-          <a:prstGeom prst="rect">
-            <a:avLst>
-              <a:gd name="adj" fmla="val 9615"/>
-            </a:avLst>
-          </a:prstGeom>
-          <a:solidFill>
-            <a:srgbClr val="FFFFFF"/>
-          </a:solidFill>
-          <a:ln w="12700">
-            <a:solidFill>
-              <a:srgbClr val="0D9488"/>
-            </a:solidFill>
-            <a:prstDash val="solid"/>
-          </a:ln>
-        </p:spPr>
-      </p:sp>
-      <p:sp>
-        <p:nvSpPr>
-          <p:cNvPr id="41" name="Text 39"/>
-          <p:cNvSpPr/>
-          <p:nvPr/>
-        </p:nvSpPr>
-        <p:spPr>
-          <a:xfrm>
-            <a:off x="7184136" y="3364992"/>
-            <a:ext cx="1225296" cy="475488"/>
-          </a:xfrm>
-          <a:prstGeom prst="rect">
-            <a:avLst/>
-          </a:prstGeom>
-          <a:noFill/>
-          <a:ln/>
-        </p:spPr>
-        <p:txBody>
-          <a:bodyPr wrap="square" lIns="0" tIns="0" rIns="0" bIns="0" rtlCol="0" anchor="ctr"/>
-          <a:lstStyle/>
-          <a:p>
-            <a:pPr algn="ctr" indent="0" marL="0">
-              <a:buNone/>
-            </a:pPr>
-            <a:r>
-              <a:rPr lang="en-US" sz="1400" b="1" dirty="0">
-                <a:solidFill>
-                  <a:srgbClr val="0D9488"/>
-                </a:solidFill>
-                <a:latin typeface="Trebuchet MS" pitchFamily="34" charset="0"/>
-                <a:ea typeface="Trebuchet MS" pitchFamily="34" charset="-122"/>
-                <a:cs typeface="Trebuchet MS" pitchFamily="34" charset="-120"/>
-              </a:rPr>
-              <a:t>ic</a:t>
-            </a:r>
-            <a:endParaRPr lang="en-US" sz="1400" dirty="0"/>
-          </a:p>
-        </p:txBody>
-      </p:sp>
-      <p:sp>
-        <p:nvSpPr>
-          <p:cNvPr id="42" name="Shape 40"/>
-          <p:cNvSpPr/>
-          <p:nvPr/>
-        </p:nvSpPr>
-        <p:spPr>
-          <a:xfrm>
-            <a:off x="365760" y="4096512"/>
-            <a:ext cx="1371600" cy="804672"/>
+              <a:t>Phonemes</a:t>
+            </a:r>
+            <a:endParaRPr lang="en-US" sz="1100" dirty="0"/>
+          </a:p>
+        </p:txBody>
+      </p:sp>
+      <p:sp>
+        <p:nvSpPr>
+          <p:cNvPr id="41" name="Shape 39"/>
+          <p:cNvSpPr/>
+          <p:nvPr/>
+        </p:nvSpPr>
+        <p:spPr>
+          <a:xfrm>
+            <a:off x="1874520" y="4096512"/>
+            <a:ext cx="6903720" cy="804672"/>
           </a:xfrm>
           <a:prstGeom prst="rect">
             <a:avLst>
@@ -22400,85 +21992,19 @@
             </a:avLst>
           </a:prstGeom>
           <a:solidFill>
-            <a:srgbClr val="E2E8F0"/>
+            <a:srgbClr val="F8FAFC"/>
           </a:solidFill>
           <a:ln w="12700">
             <a:solidFill>
               <a:srgbClr val="E2E8F0"/>
             </a:solidFill>
-            <a:prstDash val="solid"/>
-          </a:ln>
-        </p:spPr>
-      </p:sp>
-      <p:sp>
-        <p:nvSpPr>
-          <p:cNvPr id="43" name="Text 41"/>
-          <p:cNvSpPr/>
-          <p:nvPr/>
-        </p:nvSpPr>
-        <p:spPr>
-          <a:xfrm>
-            <a:off x="365760" y="4096512"/>
-            <a:ext cx="1371600" cy="804672"/>
-          </a:xfrm>
-          <a:prstGeom prst="rect">
-            <a:avLst/>
-          </a:prstGeom>
-          <a:noFill/>
-          <a:ln/>
-        </p:spPr>
-        <p:txBody>
-          <a:bodyPr wrap="square" lIns="0" tIns="0" rIns="0" bIns="0" rtlCol="0" anchor="ctr"/>
-          <a:lstStyle/>
-          <a:p>
-            <a:pPr algn="ctr" indent="0" marL="0">
-              <a:buNone/>
-            </a:pPr>
-            <a:r>
-              <a:rPr lang="en-US" sz="1100" b="1" dirty="0">
-                <a:solidFill>
-                  <a:srgbClr val="475569"/>
-                </a:solidFill>
-                <a:latin typeface="Trebuchet MS" pitchFamily="34" charset="0"/>
-                <a:ea typeface="Trebuchet MS" pitchFamily="34" charset="-122"/>
-                <a:cs typeface="Trebuchet MS" pitchFamily="34" charset="-120"/>
-              </a:rPr>
-              <a:t>Phonemes</a:t>
-            </a:r>
-            <a:endParaRPr lang="en-US" sz="1100" dirty="0"/>
-          </a:p>
-        </p:txBody>
-      </p:sp>
-      <p:sp>
-        <p:nvSpPr>
-          <p:cNvPr id="44" name="Shape 42"/>
-          <p:cNvSpPr/>
-          <p:nvPr/>
-        </p:nvSpPr>
-        <p:spPr>
-          <a:xfrm>
-            <a:off x="1874520" y="4096512"/>
-            <a:ext cx="6903720" cy="804672"/>
-          </a:xfrm>
-          <a:prstGeom prst="rect">
-            <a:avLst>
-              <a:gd name="adj" fmla="val 6818"/>
-            </a:avLst>
-          </a:prstGeom>
-          <a:solidFill>
-            <a:srgbClr val="F8FAFC"/>
-          </a:solidFill>
-          <a:ln w="12700">
-            <a:solidFill>
-              <a:srgbClr val="E2E8F0"/>
-            </a:solidFill>
             <a:prstDash val="dash"/>
           </a:ln>
         </p:spPr>
       </p:sp>
       <p:sp>
         <p:nvSpPr>
-          <p:cNvPr id="45" name="Text 43"/>
+          <p:cNvPr id="42" name="Text 40"/>
           <p:cNvSpPr/>
           <p:nvPr/>
         </p:nvSpPr>
@@ -22940,7 +22466,7 @@
                 <a:ea typeface="Trebuchet MS" pitchFamily="34" charset="-122"/>
                 <a:cs typeface="Trebuchet MS" pitchFamily="34" charset="-120"/>
               </a:rPr>
-              <a:t>antibiotic</a:t>
+              <a:t>anticlockwise</a:t>
             </a:r>
             <a:endParaRPr lang="en-US" sz="2800" dirty="0"/>
           </a:p>
@@ -23118,7 +22644,7 @@
                 <a:ea typeface="Calibri" pitchFamily="34" charset="-122"/>
                 <a:cs typeface="Calibri" pitchFamily="34" charset="-120"/>
               </a:rPr>
-              <a:t>against</a:t>
+              <a:t>against, opposite</a:t>
             </a:r>
             <a:endParaRPr lang="en-US" sz="850" dirty="0"/>
           </a:p>
@@ -23191,7 +22717,7 @@
                 <a:ea typeface="Trebuchet MS" pitchFamily="34" charset="-122"/>
                 <a:cs typeface="Trebuchet MS" pitchFamily="34" charset="-120"/>
               </a:rPr>
-              <a:t>bio</a:t>
+              <a:t>clock</a:t>
             </a:r>
             <a:endParaRPr lang="en-US" sz="1300" dirty="0"/>
           </a:p>
@@ -23230,7 +22756,7 @@
                 <a:ea typeface="Calibri" pitchFamily="34" charset="-122"/>
                 <a:cs typeface="Calibri" pitchFamily="34" charset="-120"/>
               </a:rPr>
-              <a:t>life</a:t>
+              <a:t>a device that tells time</a:t>
             </a:r>
             <a:endParaRPr lang="en-US" sz="850" dirty="0"/>
           </a:p>
@@ -23303,7 +22829,7 @@
                 <a:ea typeface="Trebuchet MS" pitchFamily="34" charset="-122"/>
                 <a:cs typeface="Trebuchet MS" pitchFamily="34" charset="-120"/>
               </a:rPr>
-              <a:t>tic</a:t>
+              <a:t>wise</a:t>
             </a:r>
             <a:endParaRPr lang="en-US" sz="1300" dirty="0"/>
           </a:p>
@@ -23342,7 +22868,7 @@
                 <a:ea typeface="Calibri" pitchFamily="34" charset="-122"/>
                 <a:cs typeface="Calibri" pitchFamily="34" charset="-120"/>
               </a:rPr>
-              <a:t>relating to</a:t>
+              <a:t>in the direction or manner of</a:t>
             </a:r>
             <a:endParaRPr lang="en-US" sz="850" dirty="0"/>
           </a:p>
@@ -23449,8 +22975,8 @@
         </p:nvSpPr>
         <p:spPr>
           <a:xfrm>
-            <a:off x="1978152" y="3364992"/>
-            <a:ext cx="1225296" cy="475488"/>
+            <a:off x="1975104" y="3364992"/>
+            <a:ext cx="1554480" cy="475488"/>
           </a:xfrm>
           <a:prstGeom prst="rect">
             <a:avLst>
@@ -23476,8 +23002,8 @@
         </p:nvSpPr>
         <p:spPr>
           <a:xfrm>
-            <a:off x="1978152" y="3364992"/>
-            <a:ext cx="1225296" cy="475488"/>
+            <a:off x="1975104" y="3364992"/>
+            <a:ext cx="1554480" cy="475488"/>
           </a:xfrm>
           <a:prstGeom prst="rect">
             <a:avLst/>
@@ -23515,8 +23041,8 @@
         </p:nvSpPr>
         <p:spPr>
           <a:xfrm>
-            <a:off x="3203448" y="3364992"/>
-            <a:ext cx="76200" cy="475488"/>
+            <a:off x="3529584" y="3364992"/>
+            <a:ext cx="73152" cy="475488"/>
           </a:xfrm>
           <a:prstGeom prst="rect">
             <a:avLst/>
@@ -23554,8 +23080,8 @@
         </p:nvSpPr>
         <p:spPr>
           <a:xfrm>
-            <a:off x="3279648" y="3364992"/>
-            <a:ext cx="1225296" cy="475488"/>
+            <a:off x="3602736" y="3364992"/>
+            <a:ext cx="1554480" cy="475488"/>
           </a:xfrm>
           <a:prstGeom prst="rect">
             <a:avLst>
@@ -23581,8 +23107,8 @@
         </p:nvSpPr>
         <p:spPr>
           <a:xfrm>
-            <a:off x="3279648" y="3364992"/>
-            <a:ext cx="1225296" cy="475488"/>
+            <a:off x="3602736" y="3364992"/>
+            <a:ext cx="1554480" cy="475488"/>
           </a:xfrm>
           <a:prstGeom prst="rect">
             <a:avLst/>
@@ -23620,8 +23146,8 @@
         </p:nvSpPr>
         <p:spPr>
           <a:xfrm>
-            <a:off x="4504944" y="3364992"/>
-            <a:ext cx="76200" cy="475488"/>
+            <a:off x="5157216" y="3364992"/>
+            <a:ext cx="73152" cy="475488"/>
           </a:xfrm>
           <a:prstGeom prst="rect">
             <a:avLst/>
@@ -23659,8 +23185,8 @@
         </p:nvSpPr>
         <p:spPr>
           <a:xfrm>
-            <a:off x="4581144" y="3364992"/>
-            <a:ext cx="1225296" cy="475488"/>
+            <a:off x="5230368" y="3364992"/>
+            <a:ext cx="1554480" cy="475488"/>
           </a:xfrm>
           <a:prstGeom prst="rect">
             <a:avLst>
@@ -23686,8 +23212,8 @@
         </p:nvSpPr>
         <p:spPr>
           <a:xfrm>
-            <a:off x="4581144" y="3364992"/>
-            <a:ext cx="1225296" cy="475488"/>
+            <a:off x="5230368" y="3364992"/>
+            <a:ext cx="1554480" cy="475488"/>
           </a:xfrm>
           <a:prstGeom prst="rect">
             <a:avLst/>
@@ -23711,7 +23237,7 @@
                 <a:ea typeface="Trebuchet MS" pitchFamily="34" charset="-122"/>
                 <a:cs typeface="Trebuchet MS" pitchFamily="34" charset="-120"/>
               </a:rPr>
-              <a:t>bi</a:t>
+              <a:t>clock</a:t>
             </a:r>
             <a:endParaRPr lang="en-US" sz="1400" dirty="0"/>
           </a:p>
@@ -23725,8 +23251,8 @@
         </p:nvSpPr>
         <p:spPr>
           <a:xfrm>
-            <a:off x="5806440" y="3364992"/>
-            <a:ext cx="76200" cy="475488"/>
+            <a:off x="6784848" y="3364992"/>
+            <a:ext cx="73152" cy="475488"/>
           </a:xfrm>
           <a:prstGeom prst="rect">
             <a:avLst/>
@@ -23764,8 +23290,8 @@
         </p:nvSpPr>
         <p:spPr>
           <a:xfrm>
-            <a:off x="5882640" y="3364992"/>
-            <a:ext cx="1225296" cy="475488"/>
+            <a:off x="6858000" y="3364992"/>
+            <a:ext cx="1554480" cy="475488"/>
           </a:xfrm>
           <a:prstGeom prst="rect">
             <a:avLst>
@@ -23791,8 +23317,8 @@
         </p:nvSpPr>
         <p:spPr>
           <a:xfrm>
-            <a:off x="5882640" y="3364992"/>
-            <a:ext cx="1225296" cy="475488"/>
+            <a:off x="6858000" y="3364992"/>
+            <a:ext cx="1554480" cy="475488"/>
           </a:xfrm>
           <a:prstGeom prst="rect">
             <a:avLst/>
@@ -23816,7 +23342,7 @@
                 <a:ea typeface="Trebuchet MS" pitchFamily="34" charset="-122"/>
                 <a:cs typeface="Trebuchet MS" pitchFamily="34" charset="-120"/>
               </a:rPr>
-              <a:t>ot</a:t>
+              <a:t>wise</a:t>
             </a:r>
             <a:endParaRPr lang="en-US" sz="1400" dirty="0"/>
           </a:p>
@@ -23824,212 +23350,239 @@
       </p:sp>
       <p:sp>
         <p:nvSpPr>
-          <p:cNvPr id="39" name="Text 37"/>
-          <p:cNvSpPr/>
-          <p:nvPr/>
-        </p:nvSpPr>
-        <p:spPr>
-          <a:xfrm>
-            <a:off x="7107936" y="3364992"/>
-            <a:ext cx="76200" cy="475488"/>
-          </a:xfrm>
-          <a:prstGeom prst="rect">
-            <a:avLst/>
-          </a:prstGeom>
-          <a:noFill/>
-          <a:ln/>
-        </p:spPr>
-        <p:txBody>
-          <a:bodyPr wrap="square" lIns="0" tIns="0" rIns="0" bIns="0" rtlCol="0" anchor="ctr"/>
-          <a:lstStyle/>
-          <a:p>
-            <a:pPr algn="ctr" indent="0" marL="0">
-              <a:buNone/>
-            </a:pPr>
-            <a:r>
-              <a:rPr lang="en-US" sz="1600" b="1" dirty="0">
-                <a:solidFill>
-                  <a:srgbClr val="0D9488"/>
+          <p:cNvPr id="39" name="Shape 37"/>
+          <p:cNvSpPr/>
+          <p:nvPr/>
+        </p:nvSpPr>
+        <p:spPr>
+          <a:xfrm>
+            <a:off x="365760" y="4096512"/>
+            <a:ext cx="1371600" cy="804672"/>
+          </a:xfrm>
+          <a:prstGeom prst="rect">
+            <a:avLst>
+              <a:gd name="adj" fmla="val 6818"/>
+            </a:avLst>
+          </a:prstGeom>
+          <a:solidFill>
+            <a:srgbClr val="E2E8F0"/>
+          </a:solidFill>
+          <a:ln w="12700">
+            <a:solidFill>
+              <a:srgbClr val="E2E8F0"/>
+            </a:solidFill>
+            <a:prstDash val="solid"/>
+          </a:ln>
+        </p:spPr>
+      </p:sp>
+      <p:sp>
+        <p:nvSpPr>
+          <p:cNvPr id="40" name="Text 38"/>
+          <p:cNvSpPr/>
+          <p:nvPr/>
+        </p:nvSpPr>
+        <p:spPr>
+          <a:xfrm>
+            <a:off x="365760" y="4096512"/>
+            <a:ext cx="1371600" cy="804672"/>
+          </a:xfrm>
+          <a:prstGeom prst="rect">
+            <a:avLst/>
+          </a:prstGeom>
+          <a:noFill/>
+          <a:ln/>
+        </p:spPr>
+        <p:txBody>
+          <a:bodyPr wrap="square" lIns="0" tIns="0" rIns="0" bIns="0" rtlCol="0" anchor="ctr"/>
+          <a:lstStyle/>
+          <a:p>
+            <a:pPr algn="ctr" indent="0" marL="0">
+              <a:buNone/>
+            </a:pPr>
+            <a:r>
+              <a:rPr lang="en-US" sz="1100" b="1" dirty="0">
+                <a:solidFill>
+                  <a:srgbClr val="475569"/>
                 </a:solidFill>
                 <a:latin typeface="Trebuchet MS" pitchFamily="34" charset="0"/>
                 <a:ea typeface="Trebuchet MS" pitchFamily="34" charset="-122"/>
                 <a:cs typeface="Trebuchet MS" pitchFamily="34" charset="-120"/>
               </a:rPr>
-              <a:t>·</a:t>
-            </a:r>
-            <a:endParaRPr lang="en-US" sz="1600" dirty="0"/>
-          </a:p>
-        </p:txBody>
-      </p:sp>
-      <p:sp>
-        <p:nvSpPr>
-          <p:cNvPr id="40" name="Shape 38"/>
-          <p:cNvSpPr/>
-          <p:nvPr/>
-        </p:nvSpPr>
-        <p:spPr>
-          <a:xfrm>
-            <a:off x="7184136" y="3364992"/>
-            <a:ext cx="1225296" cy="475488"/>
+              <a:t>Phonemes</a:t>
+            </a:r>
+            <a:endParaRPr lang="en-US" sz="1100" dirty="0"/>
+          </a:p>
+        </p:txBody>
+      </p:sp>
+      <p:sp>
+        <p:nvSpPr>
+          <p:cNvPr id="41" name="Shape 39"/>
+          <p:cNvSpPr/>
+          <p:nvPr/>
+        </p:nvSpPr>
+        <p:spPr>
+          <a:xfrm>
+            <a:off x="1874520" y="4096512"/>
+            <a:ext cx="6903720" cy="804672"/>
           </a:xfrm>
           <a:prstGeom prst="rect">
             <a:avLst>
-              <a:gd name="adj" fmla="val 9615"/>
+              <a:gd name="adj" fmla="val 6818"/>
             </a:avLst>
           </a:prstGeom>
           <a:solidFill>
+            <a:srgbClr val="FCE7F3"/>
+          </a:solidFill>
+          <a:ln w="12700">
+            <a:solidFill>
+              <a:srgbClr val="DB2777"/>
+            </a:solidFill>
+            <a:prstDash val="solid"/>
+          </a:ln>
+        </p:spPr>
+      </p:sp>
+      <p:sp>
+        <p:nvSpPr>
+          <p:cNvPr id="42" name="Shape 40"/>
+          <p:cNvSpPr/>
+          <p:nvPr/>
+        </p:nvSpPr>
+        <p:spPr>
+          <a:xfrm>
+            <a:off x="1952244" y="4169664"/>
+            <a:ext cx="543652" cy="384048"/>
+          </a:xfrm>
+          <a:prstGeom prst="rect">
+            <a:avLst>
+              <a:gd name="adj" fmla="val 9524"/>
+            </a:avLst>
+          </a:prstGeom>
+          <a:solidFill>
             <a:srgbClr val="FFFFFF"/>
           </a:solidFill>
           <a:ln w="12700">
             <a:solidFill>
-              <a:srgbClr val="0D9488"/>
-            </a:solidFill>
-            <a:prstDash val="solid"/>
-          </a:ln>
-        </p:spPr>
-      </p:sp>
-      <p:sp>
-        <p:nvSpPr>
-          <p:cNvPr id="41" name="Text 39"/>
-          <p:cNvSpPr/>
-          <p:nvPr/>
-        </p:nvSpPr>
-        <p:spPr>
-          <a:xfrm>
-            <a:off x="7184136" y="3364992"/>
-            <a:ext cx="1225296" cy="475488"/>
-          </a:xfrm>
-          <a:prstGeom prst="rect">
-            <a:avLst/>
-          </a:prstGeom>
-          <a:noFill/>
-          <a:ln/>
-        </p:spPr>
-        <p:txBody>
-          <a:bodyPr wrap="square" lIns="0" tIns="0" rIns="0" bIns="0" rtlCol="0" anchor="ctr"/>
-          <a:lstStyle/>
-          <a:p>
-            <a:pPr algn="ctr" indent="0" marL="0">
-              <a:buNone/>
-            </a:pPr>
-            <a:r>
-              <a:rPr lang="en-US" sz="1400" b="1" dirty="0">
-                <a:solidFill>
-                  <a:srgbClr val="0D9488"/>
+              <a:srgbClr val="DB2777"/>
+            </a:solidFill>
+            <a:prstDash val="solid"/>
+          </a:ln>
+        </p:spPr>
+      </p:sp>
+      <p:sp>
+        <p:nvSpPr>
+          <p:cNvPr id="43" name="Text 41"/>
+          <p:cNvSpPr/>
+          <p:nvPr/>
+        </p:nvSpPr>
+        <p:spPr>
+          <a:xfrm>
+            <a:off x="1952244" y="4169664"/>
+            <a:ext cx="543652" cy="384048"/>
+          </a:xfrm>
+          <a:prstGeom prst="rect">
+            <a:avLst/>
+          </a:prstGeom>
+          <a:noFill/>
+          <a:ln/>
+        </p:spPr>
+        <p:txBody>
+          <a:bodyPr wrap="square" lIns="0" tIns="0" rIns="0" bIns="0" rtlCol="0" anchor="ctr"/>
+          <a:lstStyle/>
+          <a:p>
+            <a:pPr algn="ctr" indent="0" marL="0">
+              <a:buNone/>
+            </a:pPr>
+            <a:r>
+              <a:rPr lang="en-US" sz="900" b="1" dirty="0">
+                <a:solidFill>
+                  <a:srgbClr val="9D174D"/>
                 </a:solidFill>
                 <a:latin typeface="Trebuchet MS" pitchFamily="34" charset="0"/>
                 <a:ea typeface="Trebuchet MS" pitchFamily="34" charset="-122"/>
                 <a:cs typeface="Trebuchet MS" pitchFamily="34" charset="-120"/>
               </a:rPr>
-              <a:t>ic</a:t>
-            </a:r>
-            <a:endParaRPr lang="en-US" sz="1400" dirty="0"/>
-          </a:p>
-        </p:txBody>
-      </p:sp>
-      <p:sp>
-        <p:nvSpPr>
-          <p:cNvPr id="42" name="Shape 40"/>
-          <p:cNvSpPr/>
-          <p:nvPr/>
-        </p:nvSpPr>
-        <p:spPr>
-          <a:xfrm>
-            <a:off x="365760" y="4096512"/>
-            <a:ext cx="1371600" cy="804672"/>
+              <a:t>a</a:t>
+            </a:r>
+            <a:endParaRPr lang="en-US" sz="900" dirty="0"/>
+          </a:p>
+        </p:txBody>
+      </p:sp>
+      <p:sp>
+        <p:nvSpPr>
+          <p:cNvPr id="44" name="Shape 42"/>
+          <p:cNvSpPr/>
+          <p:nvPr/>
+        </p:nvSpPr>
+        <p:spPr>
+          <a:xfrm>
+            <a:off x="2546188" y="4169664"/>
+            <a:ext cx="543652" cy="384048"/>
           </a:xfrm>
           <a:prstGeom prst="rect">
             <a:avLst>
-              <a:gd name="adj" fmla="val 6818"/>
+              <a:gd name="adj" fmla="val 9524"/>
             </a:avLst>
           </a:prstGeom>
           <a:solidFill>
-            <a:srgbClr val="E2E8F0"/>
-          </a:solidFill>
-          <a:ln w="12700">
-            <a:solidFill>
-              <a:srgbClr val="E2E8F0"/>
-            </a:solidFill>
-            <a:prstDash val="solid"/>
-          </a:ln>
-        </p:spPr>
-      </p:sp>
-      <p:sp>
-        <p:nvSpPr>
-          <p:cNvPr id="43" name="Text 41"/>
-          <p:cNvSpPr/>
-          <p:nvPr/>
-        </p:nvSpPr>
-        <p:spPr>
-          <a:xfrm>
-            <a:off x="365760" y="4096512"/>
-            <a:ext cx="1371600" cy="804672"/>
-          </a:xfrm>
-          <a:prstGeom prst="rect">
-            <a:avLst/>
-          </a:prstGeom>
-          <a:noFill/>
-          <a:ln/>
-        </p:spPr>
-        <p:txBody>
-          <a:bodyPr wrap="square" lIns="0" tIns="0" rIns="0" bIns="0" rtlCol="0" anchor="ctr"/>
-          <a:lstStyle/>
-          <a:p>
-            <a:pPr algn="ctr" indent="0" marL="0">
-              <a:buNone/>
-            </a:pPr>
-            <a:r>
-              <a:rPr lang="en-US" sz="1100" b="1" dirty="0">
-                <a:solidFill>
-                  <a:srgbClr val="475569"/>
+            <a:srgbClr val="FFFFFF"/>
+          </a:solidFill>
+          <a:ln w="12700">
+            <a:solidFill>
+              <a:srgbClr val="DB2777"/>
+            </a:solidFill>
+            <a:prstDash val="solid"/>
+          </a:ln>
+        </p:spPr>
+      </p:sp>
+      <p:sp>
+        <p:nvSpPr>
+          <p:cNvPr id="45" name="Text 43"/>
+          <p:cNvSpPr/>
+          <p:nvPr/>
+        </p:nvSpPr>
+        <p:spPr>
+          <a:xfrm>
+            <a:off x="2546188" y="4169664"/>
+            <a:ext cx="543652" cy="384048"/>
+          </a:xfrm>
+          <a:prstGeom prst="rect">
+            <a:avLst/>
+          </a:prstGeom>
+          <a:noFill/>
+          <a:ln/>
+        </p:spPr>
+        <p:txBody>
+          <a:bodyPr wrap="square" lIns="0" tIns="0" rIns="0" bIns="0" rtlCol="0" anchor="ctr"/>
+          <a:lstStyle/>
+          <a:p>
+            <a:pPr algn="ctr" indent="0" marL="0">
+              <a:buNone/>
+            </a:pPr>
+            <a:r>
+              <a:rPr lang="en-US" sz="900" b="1" dirty="0">
+                <a:solidFill>
+                  <a:srgbClr val="9D174D"/>
                 </a:solidFill>
                 <a:latin typeface="Trebuchet MS" pitchFamily="34" charset="0"/>
                 <a:ea typeface="Trebuchet MS" pitchFamily="34" charset="-122"/>
                 <a:cs typeface="Trebuchet MS" pitchFamily="34" charset="-120"/>
               </a:rPr>
-              <a:t>Phonemes</a:t>
-            </a:r>
-            <a:endParaRPr lang="en-US" sz="1100" dirty="0"/>
-          </a:p>
-        </p:txBody>
-      </p:sp>
-      <p:sp>
-        <p:nvSpPr>
-          <p:cNvPr id="44" name="Shape 42"/>
-          <p:cNvSpPr/>
-          <p:nvPr/>
-        </p:nvSpPr>
-        <p:spPr>
-          <a:xfrm>
-            <a:off x="1874520" y="4096512"/>
-            <a:ext cx="6903720" cy="804672"/>
-          </a:xfrm>
-          <a:prstGeom prst="rect">
-            <a:avLst>
-              <a:gd name="adj" fmla="val 6818"/>
-            </a:avLst>
-          </a:prstGeom>
-          <a:solidFill>
-            <a:srgbClr val="FCE7F3"/>
-          </a:solidFill>
-          <a:ln w="12700">
-            <a:solidFill>
-              <a:srgbClr val="DB2777"/>
-            </a:solidFill>
-            <a:prstDash val="solid"/>
-          </a:ln>
-        </p:spPr>
-      </p:sp>
-      <p:sp>
-        <p:nvSpPr>
-          <p:cNvPr id="45" name="Shape 43"/>
-          <p:cNvSpPr/>
-          <p:nvPr/>
-        </p:nvSpPr>
-        <p:spPr>
-          <a:xfrm>
-            <a:off x="1951828" y="4169664"/>
-            <a:ext cx="603504" cy="384048"/>
+              <a:t>n</a:t>
+            </a:r>
+            <a:endParaRPr lang="en-US" sz="900" dirty="0"/>
+          </a:p>
+        </p:txBody>
+      </p:sp>
+      <p:sp>
+        <p:nvSpPr>
+          <p:cNvPr id="46" name="Shape 44"/>
+          <p:cNvSpPr/>
+          <p:nvPr/>
+        </p:nvSpPr>
+        <p:spPr>
+          <a:xfrm>
+            <a:off x="3140133" y="4169664"/>
+            <a:ext cx="543652" cy="384048"/>
           </a:xfrm>
           <a:prstGeom prst="rect">
             <a:avLst>
@@ -24049,14 +23602,14 @@
       </p:sp>
       <p:sp>
         <p:nvSpPr>
-          <p:cNvPr id="46" name="Text 44"/>
-          <p:cNvSpPr/>
-          <p:nvPr/>
-        </p:nvSpPr>
-        <p:spPr>
-          <a:xfrm>
-            <a:off x="1951828" y="4169664"/>
-            <a:ext cx="603504" cy="384048"/>
+          <p:cNvPr id="47" name="Text 45"/>
+          <p:cNvSpPr/>
+          <p:nvPr/>
+        </p:nvSpPr>
+        <p:spPr>
+          <a:xfrm>
+            <a:off x="3140133" y="4169664"/>
+            <a:ext cx="543652" cy="384048"/>
           </a:xfrm>
           <a:prstGeom prst="rect">
             <a:avLst/>
@@ -24080,7 +23633,7 @@
                 <a:ea typeface="Trebuchet MS" pitchFamily="34" charset="-122"/>
                 <a:cs typeface="Trebuchet MS" pitchFamily="34" charset="-120"/>
               </a:rPr>
-              <a:t>a</a:t>
+              <a:t>t</a:t>
             </a:r>
             <a:endParaRPr lang="en-US" sz="900" dirty="0"/>
           </a:p>
@@ -24088,14 +23641,14 @@
       </p:sp>
       <p:sp>
         <p:nvSpPr>
-          <p:cNvPr id="47" name="Shape 45"/>
-          <p:cNvSpPr/>
-          <p:nvPr/>
-        </p:nvSpPr>
-        <p:spPr>
-          <a:xfrm>
-            <a:off x="2605209" y="4169664"/>
-            <a:ext cx="603504" cy="384048"/>
+          <p:cNvPr id="48" name="Shape 46"/>
+          <p:cNvSpPr/>
+          <p:nvPr/>
+        </p:nvSpPr>
+        <p:spPr>
+          <a:xfrm>
+            <a:off x="3734077" y="4169664"/>
+            <a:ext cx="543652" cy="384048"/>
           </a:xfrm>
           <a:prstGeom prst="rect">
             <a:avLst>
@@ -24115,14 +23668,14 @@
       </p:sp>
       <p:sp>
         <p:nvSpPr>
-          <p:cNvPr id="48" name="Text 46"/>
-          <p:cNvSpPr/>
-          <p:nvPr/>
-        </p:nvSpPr>
-        <p:spPr>
-          <a:xfrm>
-            <a:off x="2605209" y="4169664"/>
-            <a:ext cx="603504" cy="384048"/>
+          <p:cNvPr id="49" name="Text 47"/>
+          <p:cNvSpPr/>
+          <p:nvPr/>
+        </p:nvSpPr>
+        <p:spPr>
+          <a:xfrm>
+            <a:off x="3734077" y="4169664"/>
+            <a:ext cx="543652" cy="384048"/>
           </a:xfrm>
           <a:prstGeom prst="rect">
             <a:avLst/>
@@ -24146,7 +23699,7 @@
                 <a:ea typeface="Trebuchet MS" pitchFamily="34" charset="-122"/>
                 <a:cs typeface="Trebuchet MS" pitchFamily="34" charset="-120"/>
               </a:rPr>
-              <a:t>n</a:t>
+              <a:t>i</a:t>
             </a:r>
             <a:endParaRPr lang="en-US" sz="900" dirty="0"/>
           </a:p>
@@ -24154,14 +23707,14 @@
       </p:sp>
       <p:sp>
         <p:nvSpPr>
-          <p:cNvPr id="49" name="Shape 47"/>
-          <p:cNvSpPr/>
-          <p:nvPr/>
-        </p:nvSpPr>
-        <p:spPr>
-          <a:xfrm>
-            <a:off x="3258589" y="4169664"/>
-            <a:ext cx="603504" cy="384048"/>
+          <p:cNvPr id="50" name="Shape 48"/>
+          <p:cNvSpPr/>
+          <p:nvPr/>
+        </p:nvSpPr>
+        <p:spPr>
+          <a:xfrm>
+            <a:off x="4328021" y="4169664"/>
+            <a:ext cx="543652" cy="384048"/>
           </a:xfrm>
           <a:prstGeom prst="rect">
             <a:avLst>
@@ -24181,14 +23734,14 @@
       </p:sp>
       <p:sp>
         <p:nvSpPr>
-          <p:cNvPr id="50" name="Text 48"/>
-          <p:cNvSpPr/>
-          <p:nvPr/>
-        </p:nvSpPr>
-        <p:spPr>
-          <a:xfrm>
-            <a:off x="3258589" y="4169664"/>
-            <a:ext cx="603504" cy="384048"/>
+          <p:cNvPr id="51" name="Text 49"/>
+          <p:cNvSpPr/>
+          <p:nvPr/>
+        </p:nvSpPr>
+        <p:spPr>
+          <a:xfrm>
+            <a:off x="4328021" y="4169664"/>
+            <a:ext cx="543652" cy="384048"/>
           </a:xfrm>
           <a:prstGeom prst="rect">
             <a:avLst/>
@@ -24212,7 +23765,7 @@
                 <a:ea typeface="Trebuchet MS" pitchFamily="34" charset="-122"/>
                 <a:cs typeface="Trebuchet MS" pitchFamily="34" charset="-120"/>
               </a:rPr>
-              <a:t>t</a:t>
+              <a:t>c</a:t>
             </a:r>
             <a:endParaRPr lang="en-US" sz="900" dirty="0"/>
           </a:p>
@@ -24220,14 +23773,14 @@
       </p:sp>
       <p:sp>
         <p:nvSpPr>
-          <p:cNvPr id="51" name="Shape 49"/>
-          <p:cNvSpPr/>
-          <p:nvPr/>
-        </p:nvSpPr>
-        <p:spPr>
-          <a:xfrm>
-            <a:off x="3911969" y="4169664"/>
-            <a:ext cx="603504" cy="384048"/>
+          <p:cNvPr id="52" name="Shape 50"/>
+          <p:cNvSpPr/>
+          <p:nvPr/>
+        </p:nvSpPr>
+        <p:spPr>
+          <a:xfrm>
+            <a:off x="4921966" y="4169664"/>
+            <a:ext cx="543652" cy="384048"/>
           </a:xfrm>
           <a:prstGeom prst="rect">
             <a:avLst>
@@ -24247,14 +23800,14 @@
       </p:sp>
       <p:sp>
         <p:nvSpPr>
-          <p:cNvPr id="52" name="Text 50"/>
-          <p:cNvSpPr/>
-          <p:nvPr/>
-        </p:nvSpPr>
-        <p:spPr>
-          <a:xfrm>
-            <a:off x="3911969" y="4169664"/>
-            <a:ext cx="603504" cy="384048"/>
+          <p:cNvPr id="53" name="Text 51"/>
+          <p:cNvSpPr/>
+          <p:nvPr/>
+        </p:nvSpPr>
+        <p:spPr>
+          <a:xfrm>
+            <a:off x="4921966" y="4169664"/>
+            <a:ext cx="543652" cy="384048"/>
           </a:xfrm>
           <a:prstGeom prst="rect">
             <a:avLst/>
@@ -24278,7 +23831,7 @@
                 <a:ea typeface="Trebuchet MS" pitchFamily="34" charset="-122"/>
                 <a:cs typeface="Trebuchet MS" pitchFamily="34" charset="-120"/>
               </a:rPr>
-              <a:t>i</a:t>
+              <a:t>l</a:t>
             </a:r>
             <a:endParaRPr lang="en-US" sz="900" dirty="0"/>
           </a:p>
@@ -24286,14 +23839,14 @@
       </p:sp>
       <p:sp>
         <p:nvSpPr>
-          <p:cNvPr id="53" name="Shape 51"/>
-          <p:cNvSpPr/>
-          <p:nvPr/>
-        </p:nvSpPr>
-        <p:spPr>
-          <a:xfrm>
-            <a:off x="4565350" y="4169664"/>
-            <a:ext cx="603504" cy="384048"/>
+          <p:cNvPr id="54" name="Shape 52"/>
+          <p:cNvSpPr/>
+          <p:nvPr/>
+        </p:nvSpPr>
+        <p:spPr>
+          <a:xfrm>
+            <a:off x="5515910" y="4169664"/>
+            <a:ext cx="543652" cy="384048"/>
           </a:xfrm>
           <a:prstGeom prst="rect">
             <a:avLst>
@@ -24313,14 +23866,14 @@
       </p:sp>
       <p:sp>
         <p:nvSpPr>
-          <p:cNvPr id="54" name="Text 52"/>
-          <p:cNvSpPr/>
-          <p:nvPr/>
-        </p:nvSpPr>
-        <p:spPr>
-          <a:xfrm>
-            <a:off x="4565350" y="4169664"/>
-            <a:ext cx="603504" cy="384048"/>
+          <p:cNvPr id="55" name="Text 53"/>
+          <p:cNvSpPr/>
+          <p:nvPr/>
+        </p:nvSpPr>
+        <p:spPr>
+          <a:xfrm>
+            <a:off x="5515910" y="4169664"/>
+            <a:ext cx="543652" cy="384048"/>
           </a:xfrm>
           <a:prstGeom prst="rect">
             <a:avLst/>
@@ -24344,7 +23897,7 @@
                 <a:ea typeface="Trebuchet MS" pitchFamily="34" charset="-122"/>
                 <a:cs typeface="Trebuchet MS" pitchFamily="34" charset="-120"/>
               </a:rPr>
-              <a:t>b</a:t>
+              <a:t>o</a:t>
             </a:r>
             <a:endParaRPr lang="en-US" sz="900" dirty="0"/>
           </a:p>
@@ -24352,14 +23905,14 @@
       </p:sp>
       <p:sp>
         <p:nvSpPr>
-          <p:cNvPr id="55" name="Shape 53"/>
-          <p:cNvSpPr/>
-          <p:nvPr/>
-        </p:nvSpPr>
-        <p:spPr>
-          <a:xfrm>
-            <a:off x="5218730" y="4169664"/>
-            <a:ext cx="603504" cy="384048"/>
+          <p:cNvPr id="56" name="Shape 54"/>
+          <p:cNvSpPr/>
+          <p:nvPr/>
+        </p:nvSpPr>
+        <p:spPr>
+          <a:xfrm>
+            <a:off x="6109855" y="4169664"/>
+            <a:ext cx="543652" cy="384048"/>
           </a:xfrm>
           <a:prstGeom prst="rect">
             <a:avLst>
@@ -24379,14 +23932,14 @@
       </p:sp>
       <p:sp>
         <p:nvSpPr>
-          <p:cNvPr id="56" name="Text 54"/>
-          <p:cNvSpPr/>
-          <p:nvPr/>
-        </p:nvSpPr>
-        <p:spPr>
-          <a:xfrm>
-            <a:off x="5218730" y="4169664"/>
-            <a:ext cx="603504" cy="384048"/>
+          <p:cNvPr id="57" name="Text 55"/>
+          <p:cNvSpPr/>
+          <p:nvPr/>
+        </p:nvSpPr>
+        <p:spPr>
+          <a:xfrm>
+            <a:off x="6109855" y="4169664"/>
+            <a:ext cx="543652" cy="384048"/>
           </a:xfrm>
           <a:prstGeom prst="rect">
             <a:avLst/>
@@ -24410,7 +23963,7 @@
                 <a:ea typeface="Trebuchet MS" pitchFamily="34" charset="-122"/>
                 <a:cs typeface="Trebuchet MS" pitchFamily="34" charset="-120"/>
               </a:rPr>
-              <a:t>i</a:t>
+              <a:t>ck</a:t>
             </a:r>
             <a:endParaRPr lang="en-US" sz="900" dirty="0"/>
           </a:p>
@@ -24418,14 +23971,14 @@
       </p:sp>
       <p:sp>
         <p:nvSpPr>
-          <p:cNvPr id="57" name="Shape 55"/>
-          <p:cNvSpPr/>
-          <p:nvPr/>
-        </p:nvSpPr>
-        <p:spPr>
-          <a:xfrm>
-            <a:off x="5872111" y="4169664"/>
-            <a:ext cx="603504" cy="384048"/>
+          <p:cNvPr id="58" name="Shape 56"/>
+          <p:cNvSpPr/>
+          <p:nvPr/>
+        </p:nvSpPr>
+        <p:spPr>
+          <a:xfrm>
+            <a:off x="6703799" y="4169664"/>
+            <a:ext cx="543652" cy="384048"/>
           </a:xfrm>
           <a:prstGeom prst="rect">
             <a:avLst>
@@ -24445,14 +23998,14 @@
       </p:sp>
       <p:sp>
         <p:nvSpPr>
-          <p:cNvPr id="58" name="Text 56"/>
-          <p:cNvSpPr/>
-          <p:nvPr/>
-        </p:nvSpPr>
-        <p:spPr>
-          <a:xfrm>
-            <a:off x="5872111" y="4169664"/>
-            <a:ext cx="603504" cy="384048"/>
+          <p:cNvPr id="59" name="Text 57"/>
+          <p:cNvSpPr/>
+          <p:nvPr/>
+        </p:nvSpPr>
+        <p:spPr>
+          <a:xfrm>
+            <a:off x="6703799" y="4169664"/>
+            <a:ext cx="543652" cy="384048"/>
           </a:xfrm>
           <a:prstGeom prst="rect">
             <a:avLst/>
@@ -24476,7 +24029,7 @@
                 <a:ea typeface="Trebuchet MS" pitchFamily="34" charset="-122"/>
                 <a:cs typeface="Trebuchet MS" pitchFamily="34" charset="-120"/>
               </a:rPr>
-              <a:t>o</a:t>
+              <a:t>w</a:t>
             </a:r>
             <a:endParaRPr lang="en-US" sz="900" dirty="0"/>
           </a:p>
@@ -24484,14 +24037,14 @@
       </p:sp>
       <p:sp>
         <p:nvSpPr>
-          <p:cNvPr id="59" name="Shape 57"/>
-          <p:cNvSpPr/>
-          <p:nvPr/>
-        </p:nvSpPr>
-        <p:spPr>
-          <a:xfrm>
-            <a:off x="6525491" y="4169664"/>
-            <a:ext cx="603504" cy="384048"/>
+          <p:cNvPr id="60" name="Shape 58"/>
+          <p:cNvSpPr/>
+          <p:nvPr/>
+        </p:nvSpPr>
+        <p:spPr>
+          <a:xfrm>
+            <a:off x="7297743" y="4169664"/>
+            <a:ext cx="543652" cy="384048"/>
           </a:xfrm>
           <a:prstGeom prst="rect">
             <a:avLst>
@@ -24511,14 +24064,14 @@
       </p:sp>
       <p:sp>
         <p:nvSpPr>
-          <p:cNvPr id="60" name="Text 58"/>
-          <p:cNvSpPr/>
-          <p:nvPr/>
-        </p:nvSpPr>
-        <p:spPr>
-          <a:xfrm>
-            <a:off x="6525491" y="4169664"/>
-            <a:ext cx="603504" cy="384048"/>
+          <p:cNvPr id="61" name="Text 59"/>
+          <p:cNvSpPr/>
+          <p:nvPr/>
+        </p:nvSpPr>
+        <p:spPr>
+          <a:xfrm>
+            <a:off x="7297743" y="4169664"/>
+            <a:ext cx="543652" cy="384048"/>
           </a:xfrm>
           <a:prstGeom prst="rect">
             <a:avLst/>
@@ -24542,7 +24095,7 @@
                 <a:ea typeface="Trebuchet MS" pitchFamily="34" charset="-122"/>
                 <a:cs typeface="Trebuchet MS" pitchFamily="34" charset="-120"/>
               </a:rPr>
-              <a:t>t</a:t>
+              <a:t>i</a:t>
             </a:r>
             <a:endParaRPr lang="en-US" sz="900" dirty="0"/>
           </a:p>
@@ -24550,14 +24103,14 @@
       </p:sp>
       <p:sp>
         <p:nvSpPr>
-          <p:cNvPr id="61" name="Shape 59"/>
-          <p:cNvSpPr/>
-          <p:nvPr/>
-        </p:nvSpPr>
-        <p:spPr>
-          <a:xfrm>
-            <a:off x="7178871" y="4169664"/>
-            <a:ext cx="603504" cy="384048"/>
+          <p:cNvPr id="62" name="Shape 60"/>
+          <p:cNvSpPr/>
+          <p:nvPr/>
+        </p:nvSpPr>
+        <p:spPr>
+          <a:xfrm>
+            <a:off x="7891688" y="4169664"/>
+            <a:ext cx="543652" cy="384048"/>
           </a:xfrm>
           <a:prstGeom prst="rect">
             <a:avLst>
@@ -24577,14 +24130,14 @@
       </p:sp>
       <p:sp>
         <p:nvSpPr>
-          <p:cNvPr id="62" name="Text 60"/>
-          <p:cNvSpPr/>
-          <p:nvPr/>
-        </p:nvSpPr>
-        <p:spPr>
-          <a:xfrm>
-            <a:off x="7178871" y="4169664"/>
-            <a:ext cx="603504" cy="384048"/>
+          <p:cNvPr id="63" name="Text 61"/>
+          <p:cNvSpPr/>
+          <p:nvPr/>
+        </p:nvSpPr>
+        <p:spPr>
+          <a:xfrm>
+            <a:off x="7891688" y="4169664"/>
+            <a:ext cx="543652" cy="384048"/>
           </a:xfrm>
           <a:prstGeom prst="rect">
             <a:avLst/>
@@ -24608,7 +24161,7 @@
                 <a:ea typeface="Trebuchet MS" pitchFamily="34" charset="-122"/>
                 <a:cs typeface="Trebuchet MS" pitchFamily="34" charset="-120"/>
               </a:rPr>
-              <a:t>i</a:t>
+              <a:t>se</a:t>
             </a:r>
             <a:endParaRPr lang="en-US" sz="900" dirty="0"/>
           </a:p>
@@ -24616,80 +24169,14 @@
       </p:sp>
       <p:sp>
         <p:nvSpPr>
-          <p:cNvPr id="63" name="Shape 61"/>
-          <p:cNvSpPr/>
-          <p:nvPr/>
-        </p:nvSpPr>
-        <p:spPr>
-          <a:xfrm>
-            <a:off x="7832252" y="4169664"/>
-            <a:ext cx="603504" cy="384048"/>
-          </a:xfrm>
-          <a:prstGeom prst="rect">
-            <a:avLst>
-              <a:gd name="adj" fmla="val 9524"/>
-            </a:avLst>
-          </a:prstGeom>
-          <a:solidFill>
-            <a:srgbClr val="FFFFFF"/>
-          </a:solidFill>
-          <a:ln w="12700">
-            <a:solidFill>
-              <a:srgbClr val="DB2777"/>
-            </a:solidFill>
-            <a:prstDash val="solid"/>
-          </a:ln>
-        </p:spPr>
-      </p:sp>
-      <p:sp>
-        <p:nvSpPr>
           <p:cNvPr id="64" name="Text 62"/>
           <p:cNvSpPr/>
           <p:nvPr/>
         </p:nvSpPr>
         <p:spPr>
           <a:xfrm>
-            <a:off x="7832252" y="4169664"/>
-            <a:ext cx="603504" cy="384048"/>
-          </a:xfrm>
-          <a:prstGeom prst="rect">
-            <a:avLst/>
-          </a:prstGeom>
-          <a:noFill/>
-          <a:ln/>
-        </p:spPr>
-        <p:txBody>
-          <a:bodyPr wrap="square" lIns="0" tIns="0" rIns="0" bIns="0" rtlCol="0" anchor="ctr"/>
-          <a:lstStyle/>
-          <a:p>
-            <a:pPr algn="ctr" indent="0" marL="0">
-              <a:buNone/>
-            </a:pPr>
-            <a:r>
-              <a:rPr lang="en-US" sz="900" b="1" dirty="0">
-                <a:solidFill>
-                  <a:srgbClr val="9D174D"/>
-                </a:solidFill>
-                <a:latin typeface="Trebuchet MS" pitchFamily="34" charset="0"/>
-                <a:ea typeface="Trebuchet MS" pitchFamily="34" charset="-122"/>
-                <a:cs typeface="Trebuchet MS" pitchFamily="34" charset="-120"/>
-              </a:rPr>
-              <a:t>c</a:t>
-            </a:r>
-            <a:endParaRPr lang="en-US" sz="900" dirty="0"/>
-          </a:p>
-        </p:txBody>
-      </p:sp>
-      <p:sp>
-        <p:nvSpPr>
-          <p:cNvPr id="65" name="Text 63"/>
-          <p:cNvSpPr/>
-          <p:nvPr/>
-        </p:nvSpPr>
-        <p:spPr>
-          <a:xfrm>
-            <a:off x="7832252" y="4572000"/>
-            <a:ext cx="603504" cy="219456"/>
+            <a:off x="7891688" y="4572000"/>
+            <a:ext cx="543652" cy="219456"/>
           </a:xfrm>
           <a:prstGeom prst="rect">
             <a:avLst/>
@@ -24713,7 +24200,7 @@
                 <a:ea typeface="Calibri" pitchFamily="34" charset="-122"/>
                 <a:cs typeface="Calibri" pitchFamily="34" charset="-120"/>
               </a:rPr>
-              <a:t>/k/</a:t>
+              <a:t>/z/</a:t>
             </a:r>
             <a:endParaRPr lang="en-US" sz="750" dirty="0"/>
           </a:p>
@@ -30209,8 +29696,8 @@
         </p:nvSpPr>
         <p:spPr>
           <a:xfrm>
-            <a:off x="1951330" y="4169664"/>
-            <a:ext cx="676656" cy="384048"/>
+            <a:off x="2023872" y="4169664"/>
+            <a:ext cx="685800" cy="384048"/>
           </a:xfrm>
           <a:prstGeom prst="rect">
             <a:avLst>
@@ -30236,8 +29723,8 @@
         </p:nvSpPr>
         <p:spPr>
           <a:xfrm>
-            <a:off x="1951330" y="4169664"/>
-            <a:ext cx="676656" cy="384048"/>
+            <a:off x="2023872" y="4169664"/>
+            <a:ext cx="685800" cy="384048"/>
           </a:xfrm>
           <a:prstGeom prst="rect">
             <a:avLst/>
@@ -30275,8 +29762,8 @@
         </p:nvSpPr>
         <p:spPr>
           <a:xfrm>
-            <a:off x="2677363" y="4169664"/>
-            <a:ext cx="676656" cy="384048"/>
+            <a:off x="2831592" y="4169664"/>
+            <a:ext cx="685800" cy="384048"/>
           </a:xfrm>
           <a:prstGeom prst="rect">
             <a:avLst>
@@ -30302,8 +29789,8 @@
         </p:nvSpPr>
         <p:spPr>
           <a:xfrm>
-            <a:off x="2677363" y="4169664"/>
-            <a:ext cx="676656" cy="384048"/>
+            <a:off x="2831592" y="4169664"/>
+            <a:ext cx="685800" cy="384048"/>
           </a:xfrm>
           <a:prstGeom prst="rect">
             <a:avLst/>
@@ -30341,8 +29828,8 @@
         </p:nvSpPr>
         <p:spPr>
           <a:xfrm>
-            <a:off x="3403397" y="4169664"/>
-            <a:ext cx="676656" cy="384048"/>
+            <a:off x="3639312" y="4169664"/>
+            <a:ext cx="685800" cy="384048"/>
           </a:xfrm>
           <a:prstGeom prst="rect">
             <a:avLst>
@@ -30368,8 +29855,8 @@
         </p:nvSpPr>
         <p:spPr>
           <a:xfrm>
-            <a:off x="3403397" y="4169664"/>
-            <a:ext cx="676656" cy="384048"/>
+            <a:off x="3639312" y="4169664"/>
+            <a:ext cx="685800" cy="384048"/>
           </a:xfrm>
           <a:prstGeom prst="rect">
             <a:avLst/>
@@ -30407,8 +29894,8 @@
         </p:nvSpPr>
         <p:spPr>
           <a:xfrm>
-            <a:off x="4129430" y="4169664"/>
-            <a:ext cx="676656" cy="384048"/>
+            <a:off x="4447032" y="4169664"/>
+            <a:ext cx="685800" cy="384048"/>
           </a:xfrm>
           <a:prstGeom prst="rect">
             <a:avLst>
@@ -30434,8 +29921,8 @@
         </p:nvSpPr>
         <p:spPr>
           <a:xfrm>
-            <a:off x="4129430" y="4169664"/>
-            <a:ext cx="676656" cy="384048"/>
+            <a:off x="4447032" y="4169664"/>
+            <a:ext cx="685800" cy="384048"/>
           </a:xfrm>
           <a:prstGeom prst="rect">
             <a:avLst/>
@@ -30473,8 +29960,8 @@
         </p:nvSpPr>
         <p:spPr>
           <a:xfrm>
-            <a:off x="4855464" y="4169664"/>
-            <a:ext cx="676656" cy="384048"/>
+            <a:off x="5254752" y="4169664"/>
+            <a:ext cx="685800" cy="384048"/>
           </a:xfrm>
           <a:prstGeom prst="rect">
             <a:avLst>
@@ -30500,8 +29987,8 @@
         </p:nvSpPr>
         <p:spPr>
           <a:xfrm>
-            <a:off x="4855464" y="4169664"/>
-            <a:ext cx="676656" cy="384048"/>
+            <a:off x="5254752" y="4169664"/>
+            <a:ext cx="685800" cy="384048"/>
           </a:xfrm>
           <a:prstGeom prst="rect">
             <a:avLst/>
@@ -30539,8 +30026,8 @@
         </p:nvSpPr>
         <p:spPr>
           <a:xfrm>
-            <a:off x="5581498" y="4169664"/>
-            <a:ext cx="676656" cy="384048"/>
+            <a:off x="6062472" y="4169664"/>
+            <a:ext cx="685800" cy="384048"/>
           </a:xfrm>
           <a:prstGeom prst="rect">
             <a:avLst>
@@ -30566,8 +30053,8 @@
         </p:nvSpPr>
         <p:spPr>
           <a:xfrm>
-            <a:off x="5581498" y="4169664"/>
-            <a:ext cx="676656" cy="384048"/>
+            <a:off x="6062472" y="4169664"/>
+            <a:ext cx="685800" cy="384048"/>
           </a:xfrm>
           <a:prstGeom prst="rect">
             <a:avLst/>
@@ -30605,8 +30092,8 @@
         </p:nvSpPr>
         <p:spPr>
           <a:xfrm>
-            <a:off x="6307531" y="4169664"/>
-            <a:ext cx="676656" cy="384048"/>
+            <a:off x="6870192" y="4169664"/>
+            <a:ext cx="685800" cy="384048"/>
           </a:xfrm>
           <a:prstGeom prst="rect">
             <a:avLst>
@@ -30632,8 +30119,8 @@
         </p:nvSpPr>
         <p:spPr>
           <a:xfrm>
-            <a:off x="6307531" y="4169664"/>
-            <a:ext cx="676656" cy="384048"/>
+            <a:off x="6870192" y="4169664"/>
+            <a:ext cx="685800" cy="384048"/>
           </a:xfrm>
           <a:prstGeom prst="rect">
             <a:avLst/>
@@ -30657,7 +30144,7 @@
                 <a:ea typeface="Trebuchet MS" pitchFamily="34" charset="-122"/>
                 <a:cs typeface="Trebuchet MS" pitchFamily="34" charset="-120"/>
               </a:rPr>
-              <a:t>c</a:t>
+              <a:t>ci</a:t>
             </a:r>
             <a:endParaRPr lang="en-US" sz="900" dirty="0"/>
           </a:p>
@@ -30665,14 +30152,53 @@
       </p:sp>
       <p:sp>
         <p:nvSpPr>
-          <p:cNvPr id="56" name="Shape 54"/>
-          <p:cNvSpPr/>
-          <p:nvPr/>
-        </p:nvSpPr>
-        <p:spPr>
-          <a:xfrm>
-            <a:off x="7033565" y="4169664"/>
-            <a:ext cx="676656" cy="384048"/>
+          <p:cNvPr id="56" name="Text 54"/>
+          <p:cNvSpPr/>
+          <p:nvPr/>
+        </p:nvSpPr>
+        <p:spPr>
+          <a:xfrm>
+            <a:off x="6870192" y="4572000"/>
+            <a:ext cx="685800" cy="219456"/>
+          </a:xfrm>
+          <a:prstGeom prst="rect">
+            <a:avLst/>
+          </a:prstGeom>
+          <a:noFill/>
+          <a:ln/>
+        </p:spPr>
+        <p:txBody>
+          <a:bodyPr wrap="square" lIns="0" tIns="0" rIns="0" bIns="0" rtlCol="0" anchor="t"/>
+          <a:lstStyle/>
+          <a:p>
+            <a:pPr algn="ctr" indent="0" marL="0">
+              <a:buNone/>
+            </a:pPr>
+            <a:r>
+              <a:rPr lang="en-US" sz="750" i="1" dirty="0">
+                <a:solidFill>
+                  <a:srgbClr val="94A3B8"/>
+                </a:solidFill>
+                <a:latin typeface="Calibri" pitchFamily="34" charset="0"/>
+                <a:ea typeface="Calibri" pitchFamily="34" charset="-122"/>
+                <a:cs typeface="Calibri" pitchFamily="34" charset="-120"/>
+              </a:rPr>
+              <a:t>/sh/</a:t>
+            </a:r>
+            <a:endParaRPr lang="en-US" sz="750" dirty="0"/>
+          </a:p>
+        </p:txBody>
+      </p:sp>
+      <p:sp>
+        <p:nvSpPr>
+          <p:cNvPr id="57" name="Shape 55"/>
+          <p:cNvSpPr/>
+          <p:nvPr/>
+        </p:nvSpPr>
+        <p:spPr>
+          <a:xfrm>
+            <a:off x="7677912" y="4169664"/>
+            <a:ext cx="685800" cy="384048"/>
           </a:xfrm>
           <a:prstGeom prst="rect">
             <a:avLst>
@@ -30692,14 +30218,14 @@
       </p:sp>
       <p:sp>
         <p:nvSpPr>
-          <p:cNvPr id="57" name="Text 55"/>
-          <p:cNvSpPr/>
-          <p:nvPr/>
-        </p:nvSpPr>
-        <p:spPr>
-          <a:xfrm>
-            <a:off x="7033565" y="4169664"/>
-            <a:ext cx="676656" cy="384048"/>
+          <p:cNvPr id="58" name="Text 56"/>
+          <p:cNvSpPr/>
+          <p:nvPr/>
+        </p:nvSpPr>
+        <p:spPr>
+          <a:xfrm>
+            <a:off x="7677912" y="4169664"/>
+            <a:ext cx="685800" cy="384048"/>
           </a:xfrm>
           <a:prstGeom prst="rect">
             <a:avLst/>
@@ -30723,114 +30249,9 @@
                 <a:ea typeface="Trebuchet MS" pitchFamily="34" charset="-122"/>
                 <a:cs typeface="Trebuchet MS" pitchFamily="34" charset="-120"/>
               </a:rPr>
-              <a:t>i</a:t>
+              <a:t>al</a:t>
             </a:r>
             <a:endParaRPr lang="en-US" sz="900" dirty="0"/>
-          </a:p>
-        </p:txBody>
-      </p:sp>
-      <p:sp>
-        <p:nvSpPr>
-          <p:cNvPr id="58" name="Shape 56"/>
-          <p:cNvSpPr/>
-          <p:nvPr/>
-        </p:nvSpPr>
-        <p:spPr>
-          <a:xfrm>
-            <a:off x="7759598" y="4169664"/>
-            <a:ext cx="676656" cy="384048"/>
-          </a:xfrm>
-          <a:prstGeom prst="rect">
-            <a:avLst>
-              <a:gd name="adj" fmla="val 9524"/>
-            </a:avLst>
-          </a:prstGeom>
-          <a:solidFill>
-            <a:srgbClr val="FFFFFF"/>
-          </a:solidFill>
-          <a:ln w="12700">
-            <a:solidFill>
-              <a:srgbClr val="DB2777"/>
-            </a:solidFill>
-            <a:prstDash val="solid"/>
-          </a:ln>
-        </p:spPr>
-      </p:sp>
-      <p:sp>
-        <p:nvSpPr>
-          <p:cNvPr id="59" name="Text 57"/>
-          <p:cNvSpPr/>
-          <p:nvPr/>
-        </p:nvSpPr>
-        <p:spPr>
-          <a:xfrm>
-            <a:off x="7759598" y="4169664"/>
-            <a:ext cx="676656" cy="384048"/>
-          </a:xfrm>
-          <a:prstGeom prst="rect">
-            <a:avLst/>
-          </a:prstGeom>
-          <a:noFill/>
-          <a:ln/>
-        </p:spPr>
-        <p:txBody>
-          <a:bodyPr wrap="square" lIns="0" tIns="0" rIns="0" bIns="0" rtlCol="0" anchor="ctr"/>
-          <a:lstStyle/>
-          <a:p>
-            <a:pPr algn="ctr" indent="0" marL="0">
-              <a:buNone/>
-            </a:pPr>
-            <a:r>
-              <a:rPr lang="en-US" sz="900" b="1" dirty="0">
-                <a:solidFill>
-                  <a:srgbClr val="9D174D"/>
-                </a:solidFill>
-                <a:latin typeface="Trebuchet MS" pitchFamily="34" charset="0"/>
-                <a:ea typeface="Trebuchet MS" pitchFamily="34" charset="-122"/>
-                <a:cs typeface="Trebuchet MS" pitchFamily="34" charset="-120"/>
-              </a:rPr>
-              <a:t>al</a:t>
-            </a:r>
-            <a:endParaRPr lang="en-US" sz="900" dirty="0"/>
-          </a:p>
-        </p:txBody>
-      </p:sp>
-      <p:sp>
-        <p:nvSpPr>
-          <p:cNvPr id="60" name="Text 58"/>
-          <p:cNvSpPr/>
-          <p:nvPr/>
-        </p:nvSpPr>
-        <p:spPr>
-          <a:xfrm>
-            <a:off x="7759598" y="4572000"/>
-            <a:ext cx="676656" cy="219456"/>
-          </a:xfrm>
-          <a:prstGeom prst="rect">
-            <a:avLst/>
-          </a:prstGeom>
-          <a:noFill/>
-          <a:ln/>
-        </p:spPr>
-        <p:txBody>
-          <a:bodyPr wrap="square" lIns="0" tIns="0" rIns="0" bIns="0" rtlCol="0" anchor="t"/>
-          <a:lstStyle/>
-          <a:p>
-            <a:pPr algn="ctr" indent="0" marL="0">
-              <a:buNone/>
-            </a:pPr>
-            <a:r>
-              <a:rPr lang="en-US" sz="750" i="1" dirty="0">
-                <a:solidFill>
-                  <a:srgbClr val="94A3B8"/>
-                </a:solidFill>
-                <a:latin typeface="Calibri" pitchFamily="34" charset="0"/>
-                <a:ea typeface="Calibri" pitchFamily="34" charset="-122"/>
-                <a:cs typeface="Calibri" pitchFamily="34" charset="-120"/>
-              </a:rPr>
-              <a:t>/ul/</a:t>
-            </a:r>
-            <a:endParaRPr lang="en-US" sz="750" dirty="0"/>
           </a:p>
         </p:txBody>
       </p:sp>
@@ -31259,7 +30680,7 @@
                 <a:ea typeface="Trebuchet MS" pitchFamily="34" charset="-122"/>
                 <a:cs typeface="Trebuchet MS" pitchFamily="34" charset="-120"/>
               </a:rPr>
-              <a:t>anticlimax</a:t>
+              <a:t>antivirus</a:t>
             </a:r>
             <a:endParaRPr lang="en-US" sz="2800" dirty="0"/>
           </a:p>
@@ -32086,7 +31507,7 @@
                 <a:ea typeface="Trebuchet MS" pitchFamily="34" charset="-122"/>
                 <a:cs typeface="Trebuchet MS" pitchFamily="34" charset="-120"/>
               </a:rPr>
-              <a:t>anticlimax</a:t>
+              <a:t>antivirus</a:t>
             </a:r>
             <a:endParaRPr lang="en-US" sz="2800" dirty="0"/>
           </a:p>
@@ -32166,7 +31587,7 @@
         </p:nvSpPr>
         <p:spPr>
           <a:xfrm>
-            <a:off x="2221992" y="2258568"/>
+            <a:off x="2938272" y="2258568"/>
             <a:ext cx="1828800" cy="292608"/>
           </a:xfrm>
           <a:prstGeom prst="rect">
@@ -32200,7 +31621,7 @@
         </p:nvSpPr>
         <p:spPr>
           <a:xfrm>
-            <a:off x="2221992" y="2258568"/>
+            <a:off x="2938272" y="2258568"/>
             <a:ext cx="1828800" cy="292608"/>
           </a:xfrm>
           <a:prstGeom prst="rect">
@@ -32239,7 +31660,7 @@
         </p:nvSpPr>
         <p:spPr>
           <a:xfrm>
-            <a:off x="2221992" y="2569464"/>
+            <a:off x="2938272" y="2569464"/>
             <a:ext cx="1828800" cy="201168"/>
           </a:xfrm>
           <a:prstGeom prst="rect">
@@ -32278,7 +31699,7 @@
         </p:nvSpPr>
         <p:spPr>
           <a:xfrm>
-            <a:off x="4370832" y="2258568"/>
+            <a:off x="5803392" y="2258568"/>
             <a:ext cx="1828800" cy="292608"/>
           </a:xfrm>
           <a:prstGeom prst="rect">
@@ -32312,7 +31733,7 @@
         </p:nvSpPr>
         <p:spPr>
           <a:xfrm>
-            <a:off x="4370832" y="2258568"/>
+            <a:off x="5803392" y="2258568"/>
             <a:ext cx="1828800" cy="292608"/>
           </a:xfrm>
           <a:prstGeom prst="rect">
@@ -32337,7 +31758,7 @@
                 <a:ea typeface="Trebuchet MS" pitchFamily="34" charset="-122"/>
                 <a:cs typeface="Trebuchet MS" pitchFamily="34" charset="-120"/>
               </a:rPr>
-              <a:t>clim</a:t>
+              <a:t>virus</a:t>
             </a:r>
             <a:endParaRPr lang="en-US" sz="1300" dirty="0"/>
           </a:p>
@@ -32351,7 +31772,7 @@
         </p:nvSpPr>
         <p:spPr>
           <a:xfrm>
-            <a:off x="4370832" y="2569464"/>
+            <a:off x="5803392" y="2569464"/>
             <a:ext cx="1828800" cy="201168"/>
           </a:xfrm>
           <a:prstGeom prst="rect">
@@ -32376,7 +31797,7 @@
                 <a:ea typeface="Calibri" pitchFamily="34" charset="-122"/>
                 <a:cs typeface="Calibri" pitchFamily="34" charset="-120"/>
               </a:rPr>
-              <a:t>ladder, peak</a:t>
+              <a:t>a harmful agent that infects</a:t>
             </a:r>
             <a:endParaRPr lang="en-US" sz="850" dirty="0"/>
           </a:p>
@@ -32390,30 +31811,23 @@
         </p:nvSpPr>
         <p:spPr>
           <a:xfrm>
-            <a:off x="6519672" y="2258568"/>
-            <a:ext cx="1828800" cy="292608"/>
+            <a:off x="365760" y="3273552"/>
+            <a:ext cx="1371600" cy="658368"/>
           </a:xfrm>
           <a:prstGeom prst="rect">
             <a:avLst>
-              <a:gd name="adj" fmla="val 25000"/>
+              <a:gd name="adj" fmla="val 8333"/>
             </a:avLst>
           </a:prstGeom>
           <a:solidFill>
-            <a:srgbClr val="FCE7F3"/>
-          </a:solidFill>
-          <a:ln w="19050">
-            <a:solidFill>
-              <a:srgbClr val="DB2777"/>
-            </a:solidFill>
-            <a:prstDash val="solid"/>
-          </a:ln>
-          <a:effectLst>
-            <a:outerShdw sx="100000" sy="100000" kx="0" ky="0" algn="bl" rotWithShape="0" blurRad="101600" dist="38100" dir="8100000">
-              <a:srgbClr val="000000">
-                <a:alpha val="12000"/>
-              </a:srgbClr>
-            </a:outerShdw>
-          </a:effectLst>
+            <a:srgbClr val="E2E8F0"/>
+          </a:solidFill>
+          <a:ln w="12700">
+            <a:solidFill>
+              <a:srgbClr val="E2E8F0"/>
+            </a:solidFill>
+            <a:prstDash val="solid"/>
+          </a:ln>
         </p:spPr>
       </p:sp>
       <p:sp>
@@ -32424,90 +31838,117 @@
         </p:nvSpPr>
         <p:spPr>
           <a:xfrm>
-            <a:off x="6519672" y="2258568"/>
-            <a:ext cx="1828800" cy="292608"/>
-          </a:xfrm>
-          <a:prstGeom prst="rect">
-            <a:avLst/>
-          </a:prstGeom>
-          <a:noFill/>
-          <a:ln/>
-        </p:spPr>
-        <p:txBody>
-          <a:bodyPr wrap="square" lIns="0" tIns="0" rIns="0" bIns="0" rtlCol="0" anchor="ctr"/>
-          <a:lstStyle/>
-          <a:p>
-            <a:pPr algn="ctr" indent="0" marL="0">
-              <a:buNone/>
-            </a:pPr>
-            <a:r>
-              <a:rPr lang="en-US" sz="1300" b="1" dirty="0">
-                <a:solidFill>
-                  <a:srgbClr val="9D174D"/>
+            <a:off x="365760" y="3273552"/>
+            <a:ext cx="1371600" cy="658368"/>
+          </a:xfrm>
+          <a:prstGeom prst="rect">
+            <a:avLst/>
+          </a:prstGeom>
+          <a:noFill/>
+          <a:ln/>
+        </p:spPr>
+        <p:txBody>
+          <a:bodyPr wrap="square" lIns="0" tIns="0" rIns="0" bIns="0" rtlCol="0" anchor="ctr"/>
+          <a:lstStyle/>
+          <a:p>
+            <a:pPr algn="ctr" indent="0" marL="0">
+              <a:buNone/>
+            </a:pPr>
+            <a:r>
+              <a:rPr lang="en-US" sz="1100" b="1" dirty="0">
+                <a:solidFill>
+                  <a:srgbClr val="475569"/>
                 </a:solidFill>
                 <a:latin typeface="Trebuchet MS" pitchFamily="34" charset="0"/>
                 <a:ea typeface="Trebuchet MS" pitchFamily="34" charset="-122"/>
                 <a:cs typeface="Trebuchet MS" pitchFamily="34" charset="-120"/>
               </a:rPr>
-              <a:t>ax</a:t>
-            </a:r>
-            <a:endParaRPr lang="en-US" sz="1300" dirty="0"/>
-          </a:p>
-        </p:txBody>
-      </p:sp>
-      <p:sp>
-        <p:nvSpPr>
-          <p:cNvPr id="24" name="Text 22"/>
-          <p:cNvSpPr/>
-          <p:nvPr/>
-        </p:nvSpPr>
-        <p:spPr>
-          <a:xfrm>
-            <a:off x="6519672" y="2569464"/>
-            <a:ext cx="1828800" cy="201168"/>
-          </a:xfrm>
-          <a:prstGeom prst="rect">
-            <a:avLst/>
-          </a:prstGeom>
-          <a:noFill/>
-          <a:ln/>
-        </p:spPr>
-        <p:txBody>
-          <a:bodyPr wrap="square" lIns="0" tIns="0" rIns="0" bIns="0" rtlCol="0" anchor="t"/>
-          <a:lstStyle/>
-          <a:p>
-            <a:pPr algn="ctr" indent="0" marL="0">
-              <a:buNone/>
-            </a:pPr>
-            <a:r>
-              <a:rPr lang="en-US" sz="850" dirty="0">
-                <a:solidFill>
-                  <a:srgbClr val="475569"/>
+              <a:t>Syllables</a:t>
+            </a:r>
+            <a:endParaRPr lang="en-US" sz="1100" dirty="0"/>
+          </a:p>
+        </p:txBody>
+      </p:sp>
+      <p:sp>
+        <p:nvSpPr>
+          <p:cNvPr id="24" name="Shape 22"/>
+          <p:cNvSpPr/>
+          <p:nvPr/>
+        </p:nvSpPr>
+        <p:spPr>
+          <a:xfrm>
+            <a:off x="1874520" y="3273552"/>
+            <a:ext cx="6903720" cy="658368"/>
+          </a:xfrm>
+          <a:prstGeom prst="rect">
+            <a:avLst>
+              <a:gd name="adj" fmla="val 8333"/>
+            </a:avLst>
+          </a:prstGeom>
+          <a:solidFill>
+            <a:srgbClr val="F8FAFC"/>
+          </a:solidFill>
+          <a:ln w="12700">
+            <a:solidFill>
+              <a:srgbClr val="E2E8F0"/>
+            </a:solidFill>
+            <a:prstDash val="dash"/>
+          </a:ln>
+        </p:spPr>
+      </p:sp>
+      <p:sp>
+        <p:nvSpPr>
+          <p:cNvPr id="25" name="Text 23"/>
+          <p:cNvSpPr/>
+          <p:nvPr/>
+        </p:nvSpPr>
+        <p:spPr>
+          <a:xfrm>
+            <a:off x="1874520" y="3273552"/>
+            <a:ext cx="6903720" cy="658368"/>
+          </a:xfrm>
+          <a:prstGeom prst="rect">
+            <a:avLst/>
+          </a:prstGeom>
+          <a:noFill/>
+          <a:ln/>
+        </p:spPr>
+        <p:txBody>
+          <a:bodyPr wrap="square" rtlCol="0" anchor="ctr"/>
+          <a:lstStyle/>
+          <a:p>
+            <a:pPr algn="ctr" indent="0" marL="0">
+              <a:buNone/>
+            </a:pPr>
+            <a:r>
+              <a:rPr lang="en-US" sz="1100" i="1" dirty="0">
+                <a:solidFill>
+                  <a:srgbClr val="CBD5E1"/>
                 </a:solidFill>
                 <a:latin typeface="Calibri" pitchFamily="34" charset="0"/>
                 <a:ea typeface="Calibri" pitchFamily="34" charset="-122"/>
                 <a:cs typeface="Calibri" pitchFamily="34" charset="-120"/>
               </a:rPr>
-              <a:t>result, end point</a:t>
-            </a:r>
-            <a:endParaRPr lang="en-US" sz="850" dirty="0"/>
-          </a:p>
-        </p:txBody>
-      </p:sp>
-      <p:sp>
-        <p:nvSpPr>
-          <p:cNvPr id="25" name="Shape 23"/>
-          <p:cNvSpPr/>
-          <p:nvPr/>
-        </p:nvSpPr>
-        <p:spPr>
-          <a:xfrm>
-            <a:off x="365760" y="3273552"/>
-            <a:ext cx="1371600" cy="658368"/>
+              <a:t>Write here...</a:t>
+            </a:r>
+            <a:endParaRPr lang="en-US" sz="1100" dirty="0"/>
+          </a:p>
+        </p:txBody>
+      </p:sp>
+      <p:sp>
+        <p:nvSpPr>
+          <p:cNvPr id="26" name="Shape 24"/>
+          <p:cNvSpPr/>
+          <p:nvPr/>
+        </p:nvSpPr>
+        <p:spPr>
+          <a:xfrm>
+            <a:off x="365760" y="4096512"/>
+            <a:ext cx="1371600" cy="804672"/>
           </a:xfrm>
           <a:prstGeom prst="rect">
             <a:avLst>
-              <a:gd name="adj" fmla="val 8333"/>
+              <a:gd name="adj" fmla="val 6818"/>
             </a:avLst>
           </a:prstGeom>
           <a:solidFill>
@@ -32523,14 +31964,14 @@
       </p:sp>
       <p:sp>
         <p:nvSpPr>
-          <p:cNvPr id="26" name="Text 24"/>
-          <p:cNvSpPr/>
-          <p:nvPr/>
-        </p:nvSpPr>
-        <p:spPr>
-          <a:xfrm>
-            <a:off x="365760" y="3273552"/>
-            <a:ext cx="1371600" cy="658368"/>
+          <p:cNvPr id="27" name="Text 25"/>
+          <p:cNvSpPr/>
+          <p:nvPr/>
+        </p:nvSpPr>
+        <p:spPr>
+          <a:xfrm>
+            <a:off x="365760" y="4096512"/>
+            <a:ext cx="1371600" cy="804672"/>
           </a:xfrm>
           <a:prstGeom prst="rect">
             <a:avLst/>
@@ -32554,7 +31995,7 @@
                 <a:ea typeface="Trebuchet MS" pitchFamily="34" charset="-122"/>
                 <a:cs typeface="Trebuchet MS" pitchFamily="34" charset="-120"/>
               </a:rPr>
-              <a:t>Syllables</a:t>
+              <a:t>Phonemes</a:t>
             </a:r>
             <a:endParaRPr lang="en-US" sz="1100" dirty="0"/>
           </a:p>
@@ -32562,80 +32003,14 @@
       </p:sp>
       <p:sp>
         <p:nvSpPr>
-          <p:cNvPr id="27" name="Shape 25"/>
-          <p:cNvSpPr/>
-          <p:nvPr/>
-        </p:nvSpPr>
-        <p:spPr>
-          <a:xfrm>
-            <a:off x="1874520" y="3273552"/>
-            <a:ext cx="6903720" cy="658368"/>
-          </a:xfrm>
-          <a:prstGeom prst="rect">
-            <a:avLst>
-              <a:gd name="adj" fmla="val 8333"/>
-            </a:avLst>
-          </a:prstGeom>
-          <a:solidFill>
-            <a:srgbClr val="F8FAFC"/>
-          </a:solidFill>
-          <a:ln w="12700">
-            <a:solidFill>
-              <a:srgbClr val="E2E8F0"/>
-            </a:solidFill>
-            <a:prstDash val="dash"/>
-          </a:ln>
-        </p:spPr>
-      </p:sp>
-      <p:sp>
-        <p:nvSpPr>
-          <p:cNvPr id="28" name="Text 26"/>
-          <p:cNvSpPr/>
-          <p:nvPr/>
-        </p:nvSpPr>
-        <p:spPr>
-          <a:xfrm>
-            <a:off x="1874520" y="3273552"/>
-            <a:ext cx="6903720" cy="658368"/>
-          </a:xfrm>
-          <a:prstGeom prst="rect">
-            <a:avLst/>
-          </a:prstGeom>
-          <a:noFill/>
-          <a:ln/>
-        </p:spPr>
-        <p:txBody>
-          <a:bodyPr wrap="square" rtlCol="0" anchor="ctr"/>
-          <a:lstStyle/>
-          <a:p>
-            <a:pPr algn="ctr" indent="0" marL="0">
-              <a:buNone/>
-            </a:pPr>
-            <a:r>
-              <a:rPr lang="en-US" sz="1100" i="1" dirty="0">
-                <a:solidFill>
-                  <a:srgbClr val="CBD5E1"/>
-                </a:solidFill>
-                <a:latin typeface="Calibri" pitchFamily="34" charset="0"/>
-                <a:ea typeface="Calibri" pitchFamily="34" charset="-122"/>
-                <a:cs typeface="Calibri" pitchFamily="34" charset="-120"/>
-              </a:rPr>
-              <a:t>Write here...</a:t>
-            </a:r>
-            <a:endParaRPr lang="en-US" sz="1100" dirty="0"/>
-          </a:p>
-        </p:txBody>
-      </p:sp>
-      <p:sp>
-        <p:nvSpPr>
-          <p:cNvPr id="29" name="Shape 27"/>
-          <p:cNvSpPr/>
-          <p:nvPr/>
-        </p:nvSpPr>
-        <p:spPr>
-          <a:xfrm>
-            <a:off x="365760" y="4096512"/>
-            <a:ext cx="1371600" cy="804672"/>
+          <p:cNvPr id="28" name="Shape 26"/>
+          <p:cNvSpPr/>
+          <p:nvPr/>
+        </p:nvSpPr>
+        <p:spPr>
+          <a:xfrm>
+            <a:off x="1874520" y="4096512"/>
+            <a:ext cx="6903720" cy="804672"/>
           </a:xfrm>
           <a:prstGeom prst="rect">
             <a:avLst>
@@ -32643,85 +32018,19 @@
             </a:avLst>
           </a:prstGeom>
           <a:solidFill>
-            <a:srgbClr val="E2E8F0"/>
+            <a:srgbClr val="F8FAFC"/>
           </a:solidFill>
           <a:ln w="12700">
             <a:solidFill>
               <a:srgbClr val="E2E8F0"/>
             </a:solidFill>
-            <a:prstDash val="solid"/>
-          </a:ln>
-        </p:spPr>
-      </p:sp>
-      <p:sp>
-        <p:nvSpPr>
-          <p:cNvPr id="30" name="Text 28"/>
-          <p:cNvSpPr/>
-          <p:nvPr/>
-        </p:nvSpPr>
-        <p:spPr>
-          <a:xfrm>
-            <a:off x="365760" y="4096512"/>
-            <a:ext cx="1371600" cy="804672"/>
-          </a:xfrm>
-          <a:prstGeom prst="rect">
-            <a:avLst/>
-          </a:prstGeom>
-          <a:noFill/>
-          <a:ln/>
-        </p:spPr>
-        <p:txBody>
-          <a:bodyPr wrap="square" lIns="0" tIns="0" rIns="0" bIns="0" rtlCol="0" anchor="ctr"/>
-          <a:lstStyle/>
-          <a:p>
-            <a:pPr algn="ctr" indent="0" marL="0">
-              <a:buNone/>
-            </a:pPr>
-            <a:r>
-              <a:rPr lang="en-US" sz="1100" b="1" dirty="0">
-                <a:solidFill>
-                  <a:srgbClr val="475569"/>
-                </a:solidFill>
-                <a:latin typeface="Trebuchet MS" pitchFamily="34" charset="0"/>
-                <a:ea typeface="Trebuchet MS" pitchFamily="34" charset="-122"/>
-                <a:cs typeface="Trebuchet MS" pitchFamily="34" charset="-120"/>
-              </a:rPr>
-              <a:t>Phonemes</a:t>
-            </a:r>
-            <a:endParaRPr lang="en-US" sz="1100" dirty="0"/>
-          </a:p>
-        </p:txBody>
-      </p:sp>
-      <p:sp>
-        <p:nvSpPr>
-          <p:cNvPr id="31" name="Shape 29"/>
-          <p:cNvSpPr/>
-          <p:nvPr/>
-        </p:nvSpPr>
-        <p:spPr>
-          <a:xfrm>
-            <a:off x="1874520" y="4096512"/>
-            <a:ext cx="6903720" cy="804672"/>
-          </a:xfrm>
-          <a:prstGeom prst="rect">
-            <a:avLst>
-              <a:gd name="adj" fmla="val 6818"/>
-            </a:avLst>
-          </a:prstGeom>
-          <a:solidFill>
-            <a:srgbClr val="F8FAFC"/>
-          </a:solidFill>
-          <a:ln w="12700">
-            <a:solidFill>
-              <a:srgbClr val="E2E8F0"/>
-            </a:solidFill>
             <a:prstDash val="dash"/>
           </a:ln>
         </p:spPr>
       </p:sp>
       <p:sp>
         <p:nvSpPr>
-          <p:cNvPr id="32" name="Text 30"/>
+          <p:cNvPr id="29" name="Text 27"/>
           <p:cNvSpPr/>
           <p:nvPr/>
         </p:nvSpPr>
@@ -33183,7 +32492,7 @@
                 <a:ea typeface="Trebuchet MS" pitchFamily="34" charset="-122"/>
                 <a:cs typeface="Trebuchet MS" pitchFamily="34" charset="-120"/>
               </a:rPr>
-              <a:t>anticlimax</a:t>
+              <a:t>antivirus</a:t>
             </a:r>
             <a:endParaRPr lang="en-US" sz="2800" dirty="0"/>
           </a:p>
@@ -33263,7 +32572,7 @@
         </p:nvSpPr>
         <p:spPr>
           <a:xfrm>
-            <a:off x="2221992" y="2258568"/>
+            <a:off x="2938272" y="2258568"/>
             <a:ext cx="1828800" cy="292608"/>
           </a:xfrm>
           <a:prstGeom prst="rect">
@@ -33297,7 +32606,7 @@
         </p:nvSpPr>
         <p:spPr>
           <a:xfrm>
-            <a:off x="2221992" y="2258568"/>
+            <a:off x="2938272" y="2258568"/>
             <a:ext cx="1828800" cy="292608"/>
           </a:xfrm>
           <a:prstGeom prst="rect">
@@ -33336,7 +32645,7 @@
         </p:nvSpPr>
         <p:spPr>
           <a:xfrm>
-            <a:off x="2221992" y="2569464"/>
+            <a:off x="2938272" y="2569464"/>
             <a:ext cx="1828800" cy="201168"/>
           </a:xfrm>
           <a:prstGeom prst="rect">
@@ -33375,7 +32684,7 @@
         </p:nvSpPr>
         <p:spPr>
           <a:xfrm>
-            <a:off x="4370832" y="2258568"/>
+            <a:off x="5803392" y="2258568"/>
             <a:ext cx="1828800" cy="292608"/>
           </a:xfrm>
           <a:prstGeom prst="rect">
@@ -33409,7 +32718,7 @@
         </p:nvSpPr>
         <p:spPr>
           <a:xfrm>
-            <a:off x="4370832" y="2258568"/>
+            <a:off x="5803392" y="2258568"/>
             <a:ext cx="1828800" cy="292608"/>
           </a:xfrm>
           <a:prstGeom prst="rect">
@@ -33434,7 +32743,7 @@
                 <a:ea typeface="Trebuchet MS" pitchFamily="34" charset="-122"/>
                 <a:cs typeface="Trebuchet MS" pitchFamily="34" charset="-120"/>
               </a:rPr>
-              <a:t>clim</a:t>
+              <a:t>virus</a:t>
             </a:r>
             <a:endParaRPr lang="en-US" sz="1300" dirty="0"/>
           </a:p>
@@ -33448,7 +32757,7 @@
         </p:nvSpPr>
         <p:spPr>
           <a:xfrm>
-            <a:off x="4370832" y="2569464"/>
+            <a:off x="5803392" y="2569464"/>
             <a:ext cx="1828800" cy="201168"/>
           </a:xfrm>
           <a:prstGeom prst="rect">
@@ -33473,7 +32782,7 @@
                 <a:ea typeface="Calibri" pitchFamily="34" charset="-122"/>
                 <a:cs typeface="Calibri" pitchFamily="34" charset="-120"/>
               </a:rPr>
-              <a:t>ladder, peak</a:t>
+              <a:t>a harmful agent that infects</a:t>
             </a:r>
             <a:endParaRPr lang="en-US" sz="850" dirty="0"/>
           </a:p>
@@ -33487,30 +32796,23 @@
         </p:nvSpPr>
         <p:spPr>
           <a:xfrm>
-            <a:off x="6519672" y="2258568"/>
-            <a:ext cx="1828800" cy="292608"/>
+            <a:off x="365760" y="3273552"/>
+            <a:ext cx="1371600" cy="658368"/>
           </a:xfrm>
           <a:prstGeom prst="rect">
             <a:avLst>
-              <a:gd name="adj" fmla="val 25000"/>
+              <a:gd name="adj" fmla="val 8333"/>
             </a:avLst>
           </a:prstGeom>
           <a:solidFill>
-            <a:srgbClr val="FCE7F3"/>
-          </a:solidFill>
-          <a:ln w="19050">
-            <a:solidFill>
-              <a:srgbClr val="DB2777"/>
-            </a:solidFill>
-            <a:prstDash val="solid"/>
-          </a:ln>
-          <a:effectLst>
-            <a:outerShdw sx="100000" sy="100000" kx="0" ky="0" algn="bl" rotWithShape="0" blurRad="101600" dist="38100" dir="8100000">
-              <a:srgbClr val="000000">
-                <a:alpha val="12000"/>
-              </a:srgbClr>
-            </a:outerShdw>
-          </a:effectLst>
+            <a:srgbClr val="E2E8F0"/>
+          </a:solidFill>
+          <a:ln w="12700">
+            <a:solidFill>
+              <a:srgbClr val="E2E8F0"/>
+            </a:solidFill>
+            <a:prstDash val="solid"/>
+          </a:ln>
         </p:spPr>
       </p:sp>
       <p:sp>
@@ -33521,86 +32823,47 @@
         </p:nvSpPr>
         <p:spPr>
           <a:xfrm>
-            <a:off x="6519672" y="2258568"/>
-            <a:ext cx="1828800" cy="292608"/>
-          </a:xfrm>
-          <a:prstGeom prst="rect">
-            <a:avLst/>
-          </a:prstGeom>
-          <a:noFill/>
-          <a:ln/>
-        </p:spPr>
-        <p:txBody>
-          <a:bodyPr wrap="square" lIns="0" tIns="0" rIns="0" bIns="0" rtlCol="0" anchor="ctr"/>
-          <a:lstStyle/>
-          <a:p>
-            <a:pPr algn="ctr" indent="0" marL="0">
-              <a:buNone/>
-            </a:pPr>
-            <a:r>
-              <a:rPr lang="en-US" sz="1300" b="1" dirty="0">
-                <a:solidFill>
-                  <a:srgbClr val="9D174D"/>
+            <a:off x="365760" y="3273552"/>
+            <a:ext cx="1371600" cy="658368"/>
+          </a:xfrm>
+          <a:prstGeom prst="rect">
+            <a:avLst/>
+          </a:prstGeom>
+          <a:noFill/>
+          <a:ln/>
+        </p:spPr>
+        <p:txBody>
+          <a:bodyPr wrap="square" lIns="0" tIns="0" rIns="0" bIns="0" rtlCol="0" anchor="ctr"/>
+          <a:lstStyle/>
+          <a:p>
+            <a:pPr algn="ctr" indent="0" marL="0">
+              <a:buNone/>
+            </a:pPr>
+            <a:r>
+              <a:rPr lang="en-US" sz="1100" b="1" dirty="0">
+                <a:solidFill>
+                  <a:srgbClr val="475569"/>
                 </a:solidFill>
                 <a:latin typeface="Trebuchet MS" pitchFamily="34" charset="0"/>
                 <a:ea typeface="Trebuchet MS" pitchFamily="34" charset="-122"/>
                 <a:cs typeface="Trebuchet MS" pitchFamily="34" charset="-120"/>
               </a:rPr>
-              <a:t>ax</a:t>
-            </a:r>
-            <a:endParaRPr lang="en-US" sz="1300" dirty="0"/>
-          </a:p>
-        </p:txBody>
-      </p:sp>
-      <p:sp>
-        <p:nvSpPr>
-          <p:cNvPr id="24" name="Text 22"/>
-          <p:cNvSpPr/>
-          <p:nvPr/>
-        </p:nvSpPr>
-        <p:spPr>
-          <a:xfrm>
-            <a:off x="6519672" y="2569464"/>
-            <a:ext cx="1828800" cy="201168"/>
-          </a:xfrm>
-          <a:prstGeom prst="rect">
-            <a:avLst/>
-          </a:prstGeom>
-          <a:noFill/>
-          <a:ln/>
-        </p:spPr>
-        <p:txBody>
-          <a:bodyPr wrap="square" lIns="0" tIns="0" rIns="0" bIns="0" rtlCol="0" anchor="t"/>
-          <a:lstStyle/>
-          <a:p>
-            <a:pPr algn="ctr" indent="0" marL="0">
-              <a:buNone/>
-            </a:pPr>
-            <a:r>
-              <a:rPr lang="en-US" sz="850" dirty="0">
-                <a:solidFill>
-                  <a:srgbClr val="475569"/>
-                </a:solidFill>
-                <a:latin typeface="Calibri" pitchFamily="34" charset="0"/>
-                <a:ea typeface="Calibri" pitchFamily="34" charset="-122"/>
-                <a:cs typeface="Calibri" pitchFamily="34" charset="-120"/>
-              </a:rPr>
-              <a:t>result, end point</a:t>
-            </a:r>
-            <a:endParaRPr lang="en-US" sz="850" dirty="0"/>
-          </a:p>
-        </p:txBody>
-      </p:sp>
-      <p:sp>
-        <p:nvSpPr>
-          <p:cNvPr id="25" name="Shape 23"/>
-          <p:cNvSpPr/>
-          <p:nvPr/>
-        </p:nvSpPr>
-        <p:spPr>
-          <a:xfrm>
-            <a:off x="365760" y="3273552"/>
-            <a:ext cx="1371600" cy="658368"/>
+              <a:t>Syllables</a:t>
+            </a:r>
+            <a:endParaRPr lang="en-US" sz="1100" dirty="0"/>
+          </a:p>
+        </p:txBody>
+      </p:sp>
+      <p:sp>
+        <p:nvSpPr>
+          <p:cNvPr id="24" name="Shape 22"/>
+          <p:cNvSpPr/>
+          <p:nvPr/>
+        </p:nvSpPr>
+        <p:spPr>
+          <a:xfrm>
+            <a:off x="1874520" y="3273552"/>
+            <a:ext cx="6903720" cy="658368"/>
           </a:xfrm>
           <a:prstGeom prst="rect">
             <a:avLst>
@@ -33608,11 +32871,38 @@
             </a:avLst>
           </a:prstGeom>
           <a:solidFill>
-            <a:srgbClr val="E2E8F0"/>
-          </a:solidFill>
-          <a:ln w="12700">
-            <a:solidFill>
-              <a:srgbClr val="E2E8F0"/>
+            <a:srgbClr val="CCFBF1"/>
+          </a:solidFill>
+          <a:ln w="12700">
+            <a:solidFill>
+              <a:srgbClr val="0D9488"/>
+            </a:solidFill>
+            <a:prstDash val="solid"/>
+          </a:ln>
+        </p:spPr>
+      </p:sp>
+      <p:sp>
+        <p:nvSpPr>
+          <p:cNvPr id="25" name="Shape 23"/>
+          <p:cNvSpPr/>
+          <p:nvPr/>
+        </p:nvSpPr>
+        <p:spPr>
+          <a:xfrm>
+            <a:off x="1975104" y="3364992"/>
+            <a:ext cx="1554480" cy="475488"/>
+          </a:xfrm>
+          <a:prstGeom prst="rect">
+            <a:avLst>
+              <a:gd name="adj" fmla="val 9615"/>
+            </a:avLst>
+          </a:prstGeom>
+          <a:solidFill>
+            <a:srgbClr val="FFFFFF"/>
+          </a:solidFill>
+          <a:ln w="12700">
+            <a:solidFill>
+              <a:srgbClr val="0D9488"/>
             </a:solidFill>
             <a:prstDash val="solid"/>
           </a:ln>
@@ -33626,63 +32916,75 @@
         </p:nvSpPr>
         <p:spPr>
           <a:xfrm>
-            <a:off x="365760" y="3273552"/>
-            <a:ext cx="1371600" cy="658368"/>
-          </a:xfrm>
-          <a:prstGeom prst="rect">
-            <a:avLst/>
-          </a:prstGeom>
-          <a:noFill/>
-          <a:ln/>
-        </p:spPr>
-        <p:txBody>
-          <a:bodyPr wrap="square" lIns="0" tIns="0" rIns="0" bIns="0" rtlCol="0" anchor="ctr"/>
-          <a:lstStyle/>
-          <a:p>
-            <a:pPr algn="ctr" indent="0" marL="0">
-              <a:buNone/>
-            </a:pPr>
-            <a:r>
-              <a:rPr lang="en-US" sz="1100" b="1" dirty="0">
-                <a:solidFill>
-                  <a:srgbClr val="475569"/>
+            <a:off x="1975104" y="3364992"/>
+            <a:ext cx="1554480" cy="475488"/>
+          </a:xfrm>
+          <a:prstGeom prst="rect">
+            <a:avLst/>
+          </a:prstGeom>
+          <a:noFill/>
+          <a:ln/>
+        </p:spPr>
+        <p:txBody>
+          <a:bodyPr wrap="square" lIns="0" tIns="0" rIns="0" bIns="0" rtlCol="0" anchor="ctr"/>
+          <a:lstStyle/>
+          <a:p>
+            <a:pPr algn="ctr" indent="0" marL="0">
+              <a:buNone/>
+            </a:pPr>
+            <a:r>
+              <a:rPr lang="en-US" sz="1400" b="1" dirty="0">
+                <a:solidFill>
+                  <a:srgbClr val="0D9488"/>
                 </a:solidFill>
                 <a:latin typeface="Trebuchet MS" pitchFamily="34" charset="0"/>
                 <a:ea typeface="Trebuchet MS" pitchFamily="34" charset="-122"/>
                 <a:cs typeface="Trebuchet MS" pitchFamily="34" charset="-120"/>
               </a:rPr>
-              <a:t>Syllables</a:t>
-            </a:r>
-            <a:endParaRPr lang="en-US" sz="1100" dirty="0"/>
-          </a:p>
-        </p:txBody>
-      </p:sp>
-      <p:sp>
-        <p:nvSpPr>
-          <p:cNvPr id="27" name="Shape 25"/>
-          <p:cNvSpPr/>
-          <p:nvPr/>
-        </p:nvSpPr>
-        <p:spPr>
-          <a:xfrm>
-            <a:off x="1874520" y="3273552"/>
-            <a:ext cx="6903720" cy="658368"/>
-          </a:xfrm>
-          <a:prstGeom prst="rect">
-            <a:avLst>
-              <a:gd name="adj" fmla="val 8333"/>
-            </a:avLst>
-          </a:prstGeom>
-          <a:solidFill>
-            <a:srgbClr val="CCFBF1"/>
-          </a:solidFill>
-          <a:ln w="12700">
-            <a:solidFill>
-              <a:srgbClr val="0D9488"/>
-            </a:solidFill>
-            <a:prstDash val="solid"/>
-          </a:ln>
-        </p:spPr>
+              <a:t>an</a:t>
+            </a:r>
+            <a:endParaRPr lang="en-US" sz="1400" dirty="0"/>
+          </a:p>
+        </p:txBody>
+      </p:sp>
+      <p:sp>
+        <p:nvSpPr>
+          <p:cNvPr id="27" name="Text 25"/>
+          <p:cNvSpPr/>
+          <p:nvPr/>
+        </p:nvSpPr>
+        <p:spPr>
+          <a:xfrm>
+            <a:off x="3529584" y="3364992"/>
+            <a:ext cx="73152" cy="475488"/>
+          </a:xfrm>
+          <a:prstGeom prst="rect">
+            <a:avLst/>
+          </a:prstGeom>
+          <a:noFill/>
+          <a:ln/>
+        </p:spPr>
+        <p:txBody>
+          <a:bodyPr wrap="square" lIns="0" tIns="0" rIns="0" bIns="0" rtlCol="0" anchor="ctr"/>
+          <a:lstStyle/>
+          <a:p>
+            <a:pPr algn="ctr" indent="0" marL="0">
+              <a:buNone/>
+            </a:pPr>
+            <a:r>
+              <a:rPr lang="en-US" sz="1600" b="1" dirty="0">
+                <a:solidFill>
+                  <a:srgbClr val="0D9488"/>
+                </a:solidFill>
+                <a:latin typeface="Trebuchet MS" pitchFamily="34" charset="0"/>
+                <a:ea typeface="Trebuchet MS" pitchFamily="34" charset="-122"/>
+                <a:cs typeface="Trebuchet MS" pitchFamily="34" charset="-120"/>
+              </a:rPr>
+              <a:t>·</a:t>
+            </a:r>
+            <a:endParaRPr lang="en-US" sz="1600" dirty="0"/>
+          </a:p>
+        </p:txBody>
       </p:sp>
       <p:sp>
         <p:nvSpPr>
@@ -33692,7 +32994,7 @@
         </p:nvSpPr>
         <p:spPr>
           <a:xfrm>
-            <a:off x="1975104" y="3364992"/>
+            <a:off x="3602736" y="3364992"/>
             <a:ext cx="1554480" cy="475488"/>
           </a:xfrm>
           <a:prstGeom prst="rect">
@@ -33719,7 +33021,7 @@
         </p:nvSpPr>
         <p:spPr>
           <a:xfrm>
-            <a:off x="1975104" y="3364992"/>
+            <a:off x="3602736" y="3364992"/>
             <a:ext cx="1554480" cy="475488"/>
           </a:xfrm>
           <a:prstGeom prst="rect">
@@ -33744,7 +33046,7 @@
                 <a:ea typeface="Trebuchet MS" pitchFamily="34" charset="-122"/>
                 <a:cs typeface="Trebuchet MS" pitchFamily="34" charset="-120"/>
               </a:rPr>
-              <a:t>an</a:t>
+              <a:t>ti</a:t>
             </a:r>
             <a:endParaRPr lang="en-US" sz="1400" dirty="0"/>
           </a:p>
@@ -33758,7 +33060,7 @@
         </p:nvSpPr>
         <p:spPr>
           <a:xfrm>
-            <a:off x="3529584" y="3364992"/>
+            <a:off x="5157216" y="3364992"/>
             <a:ext cx="73152" cy="475488"/>
           </a:xfrm>
           <a:prstGeom prst="rect">
@@ -33797,7 +33099,7 @@
         </p:nvSpPr>
         <p:spPr>
           <a:xfrm>
-            <a:off x="3602736" y="3364992"/>
+            <a:off x="5230368" y="3364992"/>
             <a:ext cx="1554480" cy="475488"/>
           </a:xfrm>
           <a:prstGeom prst="rect">
@@ -33824,7 +33126,7 @@
         </p:nvSpPr>
         <p:spPr>
           <a:xfrm>
-            <a:off x="3602736" y="3364992"/>
+            <a:off x="5230368" y="3364992"/>
             <a:ext cx="1554480" cy="475488"/>
           </a:xfrm>
           <a:prstGeom prst="rect">
@@ -33849,7 +33151,7 @@
                 <a:ea typeface="Trebuchet MS" pitchFamily="34" charset="-122"/>
                 <a:cs typeface="Trebuchet MS" pitchFamily="34" charset="-120"/>
               </a:rPr>
-              <a:t>ti</a:t>
+              <a:t>vi</a:t>
             </a:r>
             <a:endParaRPr lang="en-US" sz="1400" dirty="0"/>
           </a:p>
@@ -33863,7 +33165,7 @@
         </p:nvSpPr>
         <p:spPr>
           <a:xfrm>
-            <a:off x="5157216" y="3364992"/>
+            <a:off x="6784848" y="3364992"/>
             <a:ext cx="73152" cy="475488"/>
           </a:xfrm>
           <a:prstGeom prst="rect">
@@ -33902,7 +33204,7 @@
         </p:nvSpPr>
         <p:spPr>
           <a:xfrm>
-            <a:off x="5230368" y="3364992"/>
+            <a:off x="6858000" y="3364992"/>
             <a:ext cx="1554480" cy="475488"/>
           </a:xfrm>
           <a:prstGeom prst="rect">
@@ -33929,7 +33231,7 @@
         </p:nvSpPr>
         <p:spPr>
           <a:xfrm>
-            <a:off x="5230368" y="3364992"/>
+            <a:off x="6858000" y="3364992"/>
             <a:ext cx="1554480" cy="475488"/>
           </a:xfrm>
           <a:prstGeom prst="rect">
@@ -33954,7 +33256,7 @@
                 <a:ea typeface="Trebuchet MS" pitchFamily="34" charset="-122"/>
                 <a:cs typeface="Trebuchet MS" pitchFamily="34" charset="-120"/>
               </a:rPr>
-              <a:t>cli</a:t>
+              <a:t>rus</a:t>
             </a:r>
             <a:endParaRPr lang="en-US" sz="1400" dirty="0"/>
           </a:p>
@@ -33962,119 +33264,80 @@
       </p:sp>
       <p:sp>
         <p:nvSpPr>
-          <p:cNvPr id="36" name="Text 34"/>
-          <p:cNvSpPr/>
-          <p:nvPr/>
-        </p:nvSpPr>
-        <p:spPr>
-          <a:xfrm>
-            <a:off x="6784848" y="3364992"/>
-            <a:ext cx="73152" cy="475488"/>
-          </a:xfrm>
-          <a:prstGeom prst="rect">
-            <a:avLst/>
-          </a:prstGeom>
-          <a:noFill/>
-          <a:ln/>
-        </p:spPr>
-        <p:txBody>
-          <a:bodyPr wrap="square" lIns="0" tIns="0" rIns="0" bIns="0" rtlCol="0" anchor="ctr"/>
-          <a:lstStyle/>
-          <a:p>
-            <a:pPr algn="ctr" indent="0" marL="0">
-              <a:buNone/>
-            </a:pPr>
-            <a:r>
-              <a:rPr lang="en-US" sz="1600" b="1" dirty="0">
-                <a:solidFill>
-                  <a:srgbClr val="0D9488"/>
+          <p:cNvPr id="36" name="Shape 34"/>
+          <p:cNvSpPr/>
+          <p:nvPr/>
+        </p:nvSpPr>
+        <p:spPr>
+          <a:xfrm>
+            <a:off x="365760" y="4096512"/>
+            <a:ext cx="1371600" cy="804672"/>
+          </a:xfrm>
+          <a:prstGeom prst="rect">
+            <a:avLst>
+              <a:gd name="adj" fmla="val 6818"/>
+            </a:avLst>
+          </a:prstGeom>
+          <a:solidFill>
+            <a:srgbClr val="E2E8F0"/>
+          </a:solidFill>
+          <a:ln w="12700">
+            <a:solidFill>
+              <a:srgbClr val="E2E8F0"/>
+            </a:solidFill>
+            <a:prstDash val="solid"/>
+          </a:ln>
+        </p:spPr>
+      </p:sp>
+      <p:sp>
+        <p:nvSpPr>
+          <p:cNvPr id="37" name="Text 35"/>
+          <p:cNvSpPr/>
+          <p:nvPr/>
+        </p:nvSpPr>
+        <p:spPr>
+          <a:xfrm>
+            <a:off x="365760" y="4096512"/>
+            <a:ext cx="1371600" cy="804672"/>
+          </a:xfrm>
+          <a:prstGeom prst="rect">
+            <a:avLst/>
+          </a:prstGeom>
+          <a:noFill/>
+          <a:ln/>
+        </p:spPr>
+        <p:txBody>
+          <a:bodyPr wrap="square" lIns="0" tIns="0" rIns="0" bIns="0" rtlCol="0" anchor="ctr"/>
+          <a:lstStyle/>
+          <a:p>
+            <a:pPr algn="ctr" indent="0" marL="0">
+              <a:buNone/>
+            </a:pPr>
+            <a:r>
+              <a:rPr lang="en-US" sz="1100" b="1" dirty="0">
+                <a:solidFill>
+                  <a:srgbClr val="475569"/>
                 </a:solidFill>
                 <a:latin typeface="Trebuchet MS" pitchFamily="34" charset="0"/>
                 <a:ea typeface="Trebuchet MS" pitchFamily="34" charset="-122"/>
                 <a:cs typeface="Trebuchet MS" pitchFamily="34" charset="-120"/>
               </a:rPr>
-              <a:t>·</a:t>
-            </a:r>
-            <a:endParaRPr lang="en-US" sz="1600" dirty="0"/>
-          </a:p>
-        </p:txBody>
-      </p:sp>
-      <p:sp>
-        <p:nvSpPr>
-          <p:cNvPr id="37" name="Shape 35"/>
-          <p:cNvSpPr/>
-          <p:nvPr/>
-        </p:nvSpPr>
-        <p:spPr>
-          <a:xfrm>
-            <a:off x="6858000" y="3364992"/>
-            <a:ext cx="1554480" cy="475488"/>
-          </a:xfrm>
-          <a:prstGeom prst="rect">
-            <a:avLst>
-              <a:gd name="adj" fmla="val 9615"/>
-            </a:avLst>
-          </a:prstGeom>
-          <a:solidFill>
-            <a:srgbClr val="FFFFFF"/>
-          </a:solidFill>
-          <a:ln w="12700">
-            <a:solidFill>
-              <a:srgbClr val="0D9488"/>
-            </a:solidFill>
-            <a:prstDash val="solid"/>
-          </a:ln>
-        </p:spPr>
-      </p:sp>
-      <p:sp>
-        <p:nvSpPr>
-          <p:cNvPr id="38" name="Text 36"/>
-          <p:cNvSpPr/>
-          <p:nvPr/>
-        </p:nvSpPr>
-        <p:spPr>
-          <a:xfrm>
-            <a:off x="6858000" y="3364992"/>
-            <a:ext cx="1554480" cy="475488"/>
-          </a:xfrm>
-          <a:prstGeom prst="rect">
-            <a:avLst/>
-          </a:prstGeom>
-          <a:noFill/>
-          <a:ln/>
-        </p:spPr>
-        <p:txBody>
-          <a:bodyPr wrap="square" lIns="0" tIns="0" rIns="0" bIns="0" rtlCol="0" anchor="ctr"/>
-          <a:lstStyle/>
-          <a:p>
-            <a:pPr algn="ctr" indent="0" marL="0">
-              <a:buNone/>
-            </a:pPr>
-            <a:r>
-              <a:rPr lang="en-US" sz="1400" b="1" dirty="0">
-                <a:solidFill>
-                  <a:srgbClr val="0D9488"/>
-                </a:solidFill>
-                <a:latin typeface="Trebuchet MS" pitchFamily="34" charset="0"/>
-                <a:ea typeface="Trebuchet MS" pitchFamily="34" charset="-122"/>
-                <a:cs typeface="Trebuchet MS" pitchFamily="34" charset="-120"/>
-              </a:rPr>
-              <a:t>max</a:t>
-            </a:r>
-            <a:endParaRPr lang="en-US" sz="1400" dirty="0"/>
-          </a:p>
-        </p:txBody>
-      </p:sp>
-      <p:sp>
-        <p:nvSpPr>
-          <p:cNvPr id="39" name="Shape 37"/>
-          <p:cNvSpPr/>
-          <p:nvPr/>
-        </p:nvSpPr>
-        <p:spPr>
-          <a:xfrm>
-            <a:off x="365760" y="4096512"/>
-            <a:ext cx="1371600" cy="804672"/>
+              <a:t>Phonemes</a:t>
+            </a:r>
+            <a:endParaRPr lang="en-US" sz="1100" dirty="0"/>
+          </a:p>
+        </p:txBody>
+      </p:sp>
+      <p:sp>
+        <p:nvSpPr>
+          <p:cNvPr id="38" name="Shape 36"/>
+          <p:cNvSpPr/>
+          <p:nvPr/>
+        </p:nvSpPr>
+        <p:spPr>
+          <a:xfrm>
+            <a:off x="1874520" y="4096512"/>
+            <a:ext cx="6903720" cy="804672"/>
           </a:xfrm>
           <a:prstGeom prst="rect">
             <a:avLst>
@@ -34082,85 +33345,19 @@
             </a:avLst>
           </a:prstGeom>
           <a:solidFill>
-            <a:srgbClr val="E2E8F0"/>
+            <a:srgbClr val="F8FAFC"/>
           </a:solidFill>
           <a:ln w="12700">
             <a:solidFill>
               <a:srgbClr val="E2E8F0"/>
             </a:solidFill>
-            <a:prstDash val="solid"/>
-          </a:ln>
-        </p:spPr>
-      </p:sp>
-      <p:sp>
-        <p:nvSpPr>
-          <p:cNvPr id="40" name="Text 38"/>
-          <p:cNvSpPr/>
-          <p:nvPr/>
-        </p:nvSpPr>
-        <p:spPr>
-          <a:xfrm>
-            <a:off x="365760" y="4096512"/>
-            <a:ext cx="1371600" cy="804672"/>
-          </a:xfrm>
-          <a:prstGeom prst="rect">
-            <a:avLst/>
-          </a:prstGeom>
-          <a:noFill/>
-          <a:ln/>
-        </p:spPr>
-        <p:txBody>
-          <a:bodyPr wrap="square" lIns="0" tIns="0" rIns="0" bIns="0" rtlCol="0" anchor="ctr"/>
-          <a:lstStyle/>
-          <a:p>
-            <a:pPr algn="ctr" indent="0" marL="0">
-              <a:buNone/>
-            </a:pPr>
-            <a:r>
-              <a:rPr lang="en-US" sz="1100" b="1" dirty="0">
-                <a:solidFill>
-                  <a:srgbClr val="475569"/>
-                </a:solidFill>
-                <a:latin typeface="Trebuchet MS" pitchFamily="34" charset="0"/>
-                <a:ea typeface="Trebuchet MS" pitchFamily="34" charset="-122"/>
-                <a:cs typeface="Trebuchet MS" pitchFamily="34" charset="-120"/>
-              </a:rPr>
-              <a:t>Phonemes</a:t>
-            </a:r>
-            <a:endParaRPr lang="en-US" sz="1100" dirty="0"/>
-          </a:p>
-        </p:txBody>
-      </p:sp>
-      <p:sp>
-        <p:nvSpPr>
-          <p:cNvPr id="41" name="Shape 39"/>
-          <p:cNvSpPr/>
-          <p:nvPr/>
-        </p:nvSpPr>
-        <p:spPr>
-          <a:xfrm>
-            <a:off x="1874520" y="4096512"/>
-            <a:ext cx="6903720" cy="804672"/>
-          </a:xfrm>
-          <a:prstGeom prst="rect">
-            <a:avLst>
-              <a:gd name="adj" fmla="val 6818"/>
-            </a:avLst>
-          </a:prstGeom>
-          <a:solidFill>
-            <a:srgbClr val="F8FAFC"/>
-          </a:solidFill>
-          <a:ln w="12700">
-            <a:solidFill>
-              <a:srgbClr val="E2E8F0"/>
-            </a:solidFill>
             <a:prstDash val="dash"/>
           </a:ln>
         </p:spPr>
       </p:sp>
       <p:sp>
         <p:nvSpPr>
-          <p:cNvPr id="42" name="Text 40"/>
+          <p:cNvPr id="39" name="Text 37"/>
           <p:cNvSpPr/>
           <p:nvPr/>
         </p:nvSpPr>
@@ -34622,7 +33819,7 @@
                 <a:ea typeface="Trebuchet MS" pitchFamily="34" charset="-122"/>
                 <a:cs typeface="Trebuchet MS" pitchFamily="34" charset="-120"/>
               </a:rPr>
-              <a:t>anticlimax</a:t>
+              <a:t>antivirus</a:t>
             </a:r>
             <a:endParaRPr lang="en-US" sz="2800" dirty="0"/>
           </a:p>
@@ -34702,7 +33899,7 @@
         </p:nvSpPr>
         <p:spPr>
           <a:xfrm>
-            <a:off x="2221992" y="2258568"/>
+            <a:off x="2938272" y="2258568"/>
             <a:ext cx="1828800" cy="292608"/>
           </a:xfrm>
           <a:prstGeom prst="rect">
@@ -34736,7 +33933,7 @@
         </p:nvSpPr>
         <p:spPr>
           <a:xfrm>
-            <a:off x="2221992" y="2258568"/>
+            <a:off x="2938272" y="2258568"/>
             <a:ext cx="1828800" cy="292608"/>
           </a:xfrm>
           <a:prstGeom prst="rect">
@@ -34775,7 +33972,7 @@
         </p:nvSpPr>
         <p:spPr>
           <a:xfrm>
-            <a:off x="2221992" y="2569464"/>
+            <a:off x="2938272" y="2569464"/>
             <a:ext cx="1828800" cy="201168"/>
           </a:xfrm>
           <a:prstGeom prst="rect">
@@ -34814,7 +34011,7 @@
         </p:nvSpPr>
         <p:spPr>
           <a:xfrm>
-            <a:off x="4370832" y="2258568"/>
+            <a:off x="5803392" y="2258568"/>
             <a:ext cx="1828800" cy="292608"/>
           </a:xfrm>
           <a:prstGeom prst="rect">
@@ -34848,7 +34045,7 @@
         </p:nvSpPr>
         <p:spPr>
           <a:xfrm>
-            <a:off x="4370832" y="2258568"/>
+            <a:off x="5803392" y="2258568"/>
             <a:ext cx="1828800" cy="292608"/>
           </a:xfrm>
           <a:prstGeom prst="rect">
@@ -34873,7 +34070,7 @@
                 <a:ea typeface="Trebuchet MS" pitchFamily="34" charset="-122"/>
                 <a:cs typeface="Trebuchet MS" pitchFamily="34" charset="-120"/>
               </a:rPr>
-              <a:t>clim</a:t>
+              <a:t>virus</a:t>
             </a:r>
             <a:endParaRPr lang="en-US" sz="1300" dirty="0"/>
           </a:p>
@@ -34887,7 +34084,7 @@
         </p:nvSpPr>
         <p:spPr>
           <a:xfrm>
-            <a:off x="4370832" y="2569464"/>
+            <a:off x="5803392" y="2569464"/>
             <a:ext cx="1828800" cy="201168"/>
           </a:xfrm>
           <a:prstGeom prst="rect">
@@ -34912,7 +34109,7 @@
                 <a:ea typeface="Calibri" pitchFamily="34" charset="-122"/>
                 <a:cs typeface="Calibri" pitchFamily="34" charset="-120"/>
               </a:rPr>
-              <a:t>ladder, peak</a:t>
+              <a:t>a harmful agent that infects</a:t>
             </a:r>
             <a:endParaRPr lang="en-US" sz="850" dirty="0"/>
           </a:p>
@@ -34926,30 +34123,23 @@
         </p:nvSpPr>
         <p:spPr>
           <a:xfrm>
-            <a:off x="6519672" y="2258568"/>
-            <a:ext cx="1828800" cy="292608"/>
+            <a:off x="365760" y="3273552"/>
+            <a:ext cx="1371600" cy="658368"/>
           </a:xfrm>
           <a:prstGeom prst="rect">
             <a:avLst>
-              <a:gd name="adj" fmla="val 25000"/>
+              <a:gd name="adj" fmla="val 8333"/>
             </a:avLst>
           </a:prstGeom>
           <a:solidFill>
-            <a:srgbClr val="FCE7F3"/>
-          </a:solidFill>
-          <a:ln w="19050">
-            <a:solidFill>
-              <a:srgbClr val="DB2777"/>
-            </a:solidFill>
-            <a:prstDash val="solid"/>
-          </a:ln>
-          <a:effectLst>
-            <a:outerShdw sx="100000" sy="100000" kx="0" ky="0" algn="bl" rotWithShape="0" blurRad="101600" dist="38100" dir="8100000">
-              <a:srgbClr val="000000">
-                <a:alpha val="12000"/>
-              </a:srgbClr>
-            </a:outerShdw>
-          </a:effectLst>
+            <a:srgbClr val="E2E8F0"/>
+          </a:solidFill>
+          <a:ln w="12700">
+            <a:solidFill>
+              <a:srgbClr val="E2E8F0"/>
+            </a:solidFill>
+            <a:prstDash val="solid"/>
+          </a:ln>
         </p:spPr>
       </p:sp>
       <p:sp>
@@ -34960,86 +34150,47 @@
         </p:nvSpPr>
         <p:spPr>
           <a:xfrm>
-            <a:off x="6519672" y="2258568"/>
-            <a:ext cx="1828800" cy="292608"/>
-          </a:xfrm>
-          <a:prstGeom prst="rect">
-            <a:avLst/>
-          </a:prstGeom>
-          <a:noFill/>
-          <a:ln/>
-        </p:spPr>
-        <p:txBody>
-          <a:bodyPr wrap="square" lIns="0" tIns="0" rIns="0" bIns="0" rtlCol="0" anchor="ctr"/>
-          <a:lstStyle/>
-          <a:p>
-            <a:pPr algn="ctr" indent="0" marL="0">
-              <a:buNone/>
-            </a:pPr>
-            <a:r>
-              <a:rPr lang="en-US" sz="1300" b="1" dirty="0">
-                <a:solidFill>
-                  <a:srgbClr val="9D174D"/>
+            <a:off x="365760" y="3273552"/>
+            <a:ext cx="1371600" cy="658368"/>
+          </a:xfrm>
+          <a:prstGeom prst="rect">
+            <a:avLst/>
+          </a:prstGeom>
+          <a:noFill/>
+          <a:ln/>
+        </p:spPr>
+        <p:txBody>
+          <a:bodyPr wrap="square" lIns="0" tIns="0" rIns="0" bIns="0" rtlCol="0" anchor="ctr"/>
+          <a:lstStyle/>
+          <a:p>
+            <a:pPr algn="ctr" indent="0" marL="0">
+              <a:buNone/>
+            </a:pPr>
+            <a:r>
+              <a:rPr lang="en-US" sz="1100" b="1" dirty="0">
+                <a:solidFill>
+                  <a:srgbClr val="475569"/>
                 </a:solidFill>
                 <a:latin typeface="Trebuchet MS" pitchFamily="34" charset="0"/>
                 <a:ea typeface="Trebuchet MS" pitchFamily="34" charset="-122"/>
                 <a:cs typeface="Trebuchet MS" pitchFamily="34" charset="-120"/>
               </a:rPr>
-              <a:t>ax</a:t>
-            </a:r>
-            <a:endParaRPr lang="en-US" sz="1300" dirty="0"/>
-          </a:p>
-        </p:txBody>
-      </p:sp>
-      <p:sp>
-        <p:nvSpPr>
-          <p:cNvPr id="24" name="Text 22"/>
-          <p:cNvSpPr/>
-          <p:nvPr/>
-        </p:nvSpPr>
-        <p:spPr>
-          <a:xfrm>
-            <a:off x="6519672" y="2569464"/>
-            <a:ext cx="1828800" cy="201168"/>
-          </a:xfrm>
-          <a:prstGeom prst="rect">
-            <a:avLst/>
-          </a:prstGeom>
-          <a:noFill/>
-          <a:ln/>
-        </p:spPr>
-        <p:txBody>
-          <a:bodyPr wrap="square" lIns="0" tIns="0" rIns="0" bIns="0" rtlCol="0" anchor="t"/>
-          <a:lstStyle/>
-          <a:p>
-            <a:pPr algn="ctr" indent="0" marL="0">
-              <a:buNone/>
-            </a:pPr>
-            <a:r>
-              <a:rPr lang="en-US" sz="850" dirty="0">
-                <a:solidFill>
-                  <a:srgbClr val="475569"/>
-                </a:solidFill>
-                <a:latin typeface="Calibri" pitchFamily="34" charset="0"/>
-                <a:ea typeface="Calibri" pitchFamily="34" charset="-122"/>
-                <a:cs typeface="Calibri" pitchFamily="34" charset="-120"/>
-              </a:rPr>
-              <a:t>result, end point</a:t>
-            </a:r>
-            <a:endParaRPr lang="en-US" sz="850" dirty="0"/>
-          </a:p>
-        </p:txBody>
-      </p:sp>
-      <p:sp>
-        <p:nvSpPr>
-          <p:cNvPr id="25" name="Shape 23"/>
-          <p:cNvSpPr/>
-          <p:nvPr/>
-        </p:nvSpPr>
-        <p:spPr>
-          <a:xfrm>
-            <a:off x="365760" y="3273552"/>
-            <a:ext cx="1371600" cy="658368"/>
+              <a:t>Syllables</a:t>
+            </a:r>
+            <a:endParaRPr lang="en-US" sz="1100" dirty="0"/>
+          </a:p>
+        </p:txBody>
+      </p:sp>
+      <p:sp>
+        <p:nvSpPr>
+          <p:cNvPr id="24" name="Shape 22"/>
+          <p:cNvSpPr/>
+          <p:nvPr/>
+        </p:nvSpPr>
+        <p:spPr>
+          <a:xfrm>
+            <a:off x="1874520" y="3273552"/>
+            <a:ext cx="6903720" cy="658368"/>
           </a:xfrm>
           <a:prstGeom prst="rect">
             <a:avLst>
@@ -35047,11 +34198,38 @@
             </a:avLst>
           </a:prstGeom>
           <a:solidFill>
-            <a:srgbClr val="E2E8F0"/>
-          </a:solidFill>
-          <a:ln w="12700">
-            <a:solidFill>
-              <a:srgbClr val="E2E8F0"/>
+            <a:srgbClr val="CCFBF1"/>
+          </a:solidFill>
+          <a:ln w="12700">
+            <a:solidFill>
+              <a:srgbClr val="0D9488"/>
+            </a:solidFill>
+            <a:prstDash val="solid"/>
+          </a:ln>
+        </p:spPr>
+      </p:sp>
+      <p:sp>
+        <p:nvSpPr>
+          <p:cNvPr id="25" name="Shape 23"/>
+          <p:cNvSpPr/>
+          <p:nvPr/>
+        </p:nvSpPr>
+        <p:spPr>
+          <a:xfrm>
+            <a:off x="1975104" y="3364992"/>
+            <a:ext cx="1554480" cy="475488"/>
+          </a:xfrm>
+          <a:prstGeom prst="rect">
+            <a:avLst>
+              <a:gd name="adj" fmla="val 9615"/>
+            </a:avLst>
+          </a:prstGeom>
+          <a:solidFill>
+            <a:srgbClr val="FFFFFF"/>
+          </a:solidFill>
+          <a:ln w="12700">
+            <a:solidFill>
+              <a:srgbClr val="0D9488"/>
             </a:solidFill>
             <a:prstDash val="solid"/>
           </a:ln>
@@ -35065,32 +34243,413 @@
         </p:nvSpPr>
         <p:spPr>
           <a:xfrm>
-            <a:off x="365760" y="3273552"/>
-            <a:ext cx="1371600" cy="658368"/>
-          </a:xfrm>
-          <a:prstGeom prst="rect">
-            <a:avLst/>
-          </a:prstGeom>
-          <a:noFill/>
-          <a:ln/>
-        </p:spPr>
-        <p:txBody>
-          <a:bodyPr wrap="square" lIns="0" tIns="0" rIns="0" bIns="0" rtlCol="0" anchor="ctr"/>
-          <a:lstStyle/>
-          <a:p>
-            <a:pPr algn="ctr" indent="0" marL="0">
-              <a:buNone/>
-            </a:pPr>
-            <a:r>
-              <a:rPr lang="en-US" sz="1100" b="1" dirty="0">
-                <a:solidFill>
-                  <a:srgbClr val="475569"/>
+            <a:off x="1975104" y="3364992"/>
+            <a:ext cx="1554480" cy="475488"/>
+          </a:xfrm>
+          <a:prstGeom prst="rect">
+            <a:avLst/>
+          </a:prstGeom>
+          <a:noFill/>
+          <a:ln/>
+        </p:spPr>
+        <p:txBody>
+          <a:bodyPr wrap="square" lIns="0" tIns="0" rIns="0" bIns="0" rtlCol="0" anchor="ctr"/>
+          <a:lstStyle/>
+          <a:p>
+            <a:pPr algn="ctr" indent="0" marL="0">
+              <a:buNone/>
+            </a:pPr>
+            <a:r>
+              <a:rPr lang="en-US" sz="1400" b="1" dirty="0">
+                <a:solidFill>
+                  <a:srgbClr val="0D9488"/>
                 </a:solidFill>
                 <a:latin typeface="Trebuchet MS" pitchFamily="34" charset="0"/>
                 <a:ea typeface="Trebuchet MS" pitchFamily="34" charset="-122"/>
                 <a:cs typeface="Trebuchet MS" pitchFamily="34" charset="-120"/>
               </a:rPr>
-              <a:t>Syllables</a:t>
+              <a:t>an</a:t>
+            </a:r>
+            <a:endParaRPr lang="en-US" sz="1400" dirty="0"/>
+          </a:p>
+        </p:txBody>
+      </p:sp>
+      <p:sp>
+        <p:nvSpPr>
+          <p:cNvPr id="27" name="Text 25"/>
+          <p:cNvSpPr/>
+          <p:nvPr/>
+        </p:nvSpPr>
+        <p:spPr>
+          <a:xfrm>
+            <a:off x="3529584" y="3364992"/>
+            <a:ext cx="73152" cy="475488"/>
+          </a:xfrm>
+          <a:prstGeom prst="rect">
+            <a:avLst/>
+          </a:prstGeom>
+          <a:noFill/>
+          <a:ln/>
+        </p:spPr>
+        <p:txBody>
+          <a:bodyPr wrap="square" lIns="0" tIns="0" rIns="0" bIns="0" rtlCol="0" anchor="ctr"/>
+          <a:lstStyle/>
+          <a:p>
+            <a:pPr algn="ctr" indent="0" marL="0">
+              <a:buNone/>
+            </a:pPr>
+            <a:r>
+              <a:rPr lang="en-US" sz="1600" b="1" dirty="0">
+                <a:solidFill>
+                  <a:srgbClr val="0D9488"/>
+                </a:solidFill>
+                <a:latin typeface="Trebuchet MS" pitchFamily="34" charset="0"/>
+                <a:ea typeface="Trebuchet MS" pitchFamily="34" charset="-122"/>
+                <a:cs typeface="Trebuchet MS" pitchFamily="34" charset="-120"/>
+              </a:rPr>
+              <a:t>·</a:t>
+            </a:r>
+            <a:endParaRPr lang="en-US" sz="1600" dirty="0"/>
+          </a:p>
+        </p:txBody>
+      </p:sp>
+      <p:sp>
+        <p:nvSpPr>
+          <p:cNvPr id="28" name="Shape 26"/>
+          <p:cNvSpPr/>
+          <p:nvPr/>
+        </p:nvSpPr>
+        <p:spPr>
+          <a:xfrm>
+            <a:off x="3602736" y="3364992"/>
+            <a:ext cx="1554480" cy="475488"/>
+          </a:xfrm>
+          <a:prstGeom prst="rect">
+            <a:avLst>
+              <a:gd name="adj" fmla="val 9615"/>
+            </a:avLst>
+          </a:prstGeom>
+          <a:solidFill>
+            <a:srgbClr val="FFFFFF"/>
+          </a:solidFill>
+          <a:ln w="12700">
+            <a:solidFill>
+              <a:srgbClr val="0D9488"/>
+            </a:solidFill>
+            <a:prstDash val="solid"/>
+          </a:ln>
+        </p:spPr>
+      </p:sp>
+      <p:sp>
+        <p:nvSpPr>
+          <p:cNvPr id="29" name="Text 27"/>
+          <p:cNvSpPr/>
+          <p:nvPr/>
+        </p:nvSpPr>
+        <p:spPr>
+          <a:xfrm>
+            <a:off x="3602736" y="3364992"/>
+            <a:ext cx="1554480" cy="475488"/>
+          </a:xfrm>
+          <a:prstGeom prst="rect">
+            <a:avLst/>
+          </a:prstGeom>
+          <a:noFill/>
+          <a:ln/>
+        </p:spPr>
+        <p:txBody>
+          <a:bodyPr wrap="square" lIns="0" tIns="0" rIns="0" bIns="0" rtlCol="0" anchor="ctr"/>
+          <a:lstStyle/>
+          <a:p>
+            <a:pPr algn="ctr" indent="0" marL="0">
+              <a:buNone/>
+            </a:pPr>
+            <a:r>
+              <a:rPr lang="en-US" sz="1400" b="1" dirty="0">
+                <a:solidFill>
+                  <a:srgbClr val="0D9488"/>
+                </a:solidFill>
+                <a:latin typeface="Trebuchet MS" pitchFamily="34" charset="0"/>
+                <a:ea typeface="Trebuchet MS" pitchFamily="34" charset="-122"/>
+                <a:cs typeface="Trebuchet MS" pitchFamily="34" charset="-120"/>
+              </a:rPr>
+              <a:t>ti</a:t>
+            </a:r>
+            <a:endParaRPr lang="en-US" sz="1400" dirty="0"/>
+          </a:p>
+        </p:txBody>
+      </p:sp>
+      <p:sp>
+        <p:nvSpPr>
+          <p:cNvPr id="30" name="Text 28"/>
+          <p:cNvSpPr/>
+          <p:nvPr/>
+        </p:nvSpPr>
+        <p:spPr>
+          <a:xfrm>
+            <a:off x="5157216" y="3364992"/>
+            <a:ext cx="73152" cy="475488"/>
+          </a:xfrm>
+          <a:prstGeom prst="rect">
+            <a:avLst/>
+          </a:prstGeom>
+          <a:noFill/>
+          <a:ln/>
+        </p:spPr>
+        <p:txBody>
+          <a:bodyPr wrap="square" lIns="0" tIns="0" rIns="0" bIns="0" rtlCol="0" anchor="ctr"/>
+          <a:lstStyle/>
+          <a:p>
+            <a:pPr algn="ctr" indent="0" marL="0">
+              <a:buNone/>
+            </a:pPr>
+            <a:r>
+              <a:rPr lang="en-US" sz="1600" b="1" dirty="0">
+                <a:solidFill>
+                  <a:srgbClr val="0D9488"/>
+                </a:solidFill>
+                <a:latin typeface="Trebuchet MS" pitchFamily="34" charset="0"/>
+                <a:ea typeface="Trebuchet MS" pitchFamily="34" charset="-122"/>
+                <a:cs typeface="Trebuchet MS" pitchFamily="34" charset="-120"/>
+              </a:rPr>
+              <a:t>·</a:t>
+            </a:r>
+            <a:endParaRPr lang="en-US" sz="1600" dirty="0"/>
+          </a:p>
+        </p:txBody>
+      </p:sp>
+      <p:sp>
+        <p:nvSpPr>
+          <p:cNvPr id="31" name="Shape 29"/>
+          <p:cNvSpPr/>
+          <p:nvPr/>
+        </p:nvSpPr>
+        <p:spPr>
+          <a:xfrm>
+            <a:off x="5230368" y="3364992"/>
+            <a:ext cx="1554480" cy="475488"/>
+          </a:xfrm>
+          <a:prstGeom prst="rect">
+            <a:avLst>
+              <a:gd name="adj" fmla="val 9615"/>
+            </a:avLst>
+          </a:prstGeom>
+          <a:solidFill>
+            <a:srgbClr val="FFFFFF"/>
+          </a:solidFill>
+          <a:ln w="12700">
+            <a:solidFill>
+              <a:srgbClr val="0D9488"/>
+            </a:solidFill>
+            <a:prstDash val="solid"/>
+          </a:ln>
+        </p:spPr>
+      </p:sp>
+      <p:sp>
+        <p:nvSpPr>
+          <p:cNvPr id="32" name="Text 30"/>
+          <p:cNvSpPr/>
+          <p:nvPr/>
+        </p:nvSpPr>
+        <p:spPr>
+          <a:xfrm>
+            <a:off x="5230368" y="3364992"/>
+            <a:ext cx="1554480" cy="475488"/>
+          </a:xfrm>
+          <a:prstGeom prst="rect">
+            <a:avLst/>
+          </a:prstGeom>
+          <a:noFill/>
+          <a:ln/>
+        </p:spPr>
+        <p:txBody>
+          <a:bodyPr wrap="square" lIns="0" tIns="0" rIns="0" bIns="0" rtlCol="0" anchor="ctr"/>
+          <a:lstStyle/>
+          <a:p>
+            <a:pPr algn="ctr" indent="0" marL="0">
+              <a:buNone/>
+            </a:pPr>
+            <a:r>
+              <a:rPr lang="en-US" sz="1400" b="1" dirty="0">
+                <a:solidFill>
+                  <a:srgbClr val="0D9488"/>
+                </a:solidFill>
+                <a:latin typeface="Trebuchet MS" pitchFamily="34" charset="0"/>
+                <a:ea typeface="Trebuchet MS" pitchFamily="34" charset="-122"/>
+                <a:cs typeface="Trebuchet MS" pitchFamily="34" charset="-120"/>
+              </a:rPr>
+              <a:t>vi</a:t>
+            </a:r>
+            <a:endParaRPr lang="en-US" sz="1400" dirty="0"/>
+          </a:p>
+        </p:txBody>
+      </p:sp>
+      <p:sp>
+        <p:nvSpPr>
+          <p:cNvPr id="33" name="Text 31"/>
+          <p:cNvSpPr/>
+          <p:nvPr/>
+        </p:nvSpPr>
+        <p:spPr>
+          <a:xfrm>
+            <a:off x="6784848" y="3364992"/>
+            <a:ext cx="73152" cy="475488"/>
+          </a:xfrm>
+          <a:prstGeom prst="rect">
+            <a:avLst/>
+          </a:prstGeom>
+          <a:noFill/>
+          <a:ln/>
+        </p:spPr>
+        <p:txBody>
+          <a:bodyPr wrap="square" lIns="0" tIns="0" rIns="0" bIns="0" rtlCol="0" anchor="ctr"/>
+          <a:lstStyle/>
+          <a:p>
+            <a:pPr algn="ctr" indent="0" marL="0">
+              <a:buNone/>
+            </a:pPr>
+            <a:r>
+              <a:rPr lang="en-US" sz="1600" b="1" dirty="0">
+                <a:solidFill>
+                  <a:srgbClr val="0D9488"/>
+                </a:solidFill>
+                <a:latin typeface="Trebuchet MS" pitchFamily="34" charset="0"/>
+                <a:ea typeface="Trebuchet MS" pitchFamily="34" charset="-122"/>
+                <a:cs typeface="Trebuchet MS" pitchFamily="34" charset="-120"/>
+              </a:rPr>
+              <a:t>·</a:t>
+            </a:r>
+            <a:endParaRPr lang="en-US" sz="1600" dirty="0"/>
+          </a:p>
+        </p:txBody>
+      </p:sp>
+      <p:sp>
+        <p:nvSpPr>
+          <p:cNvPr id="34" name="Shape 32"/>
+          <p:cNvSpPr/>
+          <p:nvPr/>
+        </p:nvSpPr>
+        <p:spPr>
+          <a:xfrm>
+            <a:off x="6858000" y="3364992"/>
+            <a:ext cx="1554480" cy="475488"/>
+          </a:xfrm>
+          <a:prstGeom prst="rect">
+            <a:avLst>
+              <a:gd name="adj" fmla="val 9615"/>
+            </a:avLst>
+          </a:prstGeom>
+          <a:solidFill>
+            <a:srgbClr val="FFFFFF"/>
+          </a:solidFill>
+          <a:ln w="12700">
+            <a:solidFill>
+              <a:srgbClr val="0D9488"/>
+            </a:solidFill>
+            <a:prstDash val="solid"/>
+          </a:ln>
+        </p:spPr>
+      </p:sp>
+      <p:sp>
+        <p:nvSpPr>
+          <p:cNvPr id="35" name="Text 33"/>
+          <p:cNvSpPr/>
+          <p:nvPr/>
+        </p:nvSpPr>
+        <p:spPr>
+          <a:xfrm>
+            <a:off x="6858000" y="3364992"/>
+            <a:ext cx="1554480" cy="475488"/>
+          </a:xfrm>
+          <a:prstGeom prst="rect">
+            <a:avLst/>
+          </a:prstGeom>
+          <a:noFill/>
+          <a:ln/>
+        </p:spPr>
+        <p:txBody>
+          <a:bodyPr wrap="square" lIns="0" tIns="0" rIns="0" bIns="0" rtlCol="0" anchor="ctr"/>
+          <a:lstStyle/>
+          <a:p>
+            <a:pPr algn="ctr" indent="0" marL="0">
+              <a:buNone/>
+            </a:pPr>
+            <a:r>
+              <a:rPr lang="en-US" sz="1400" b="1" dirty="0">
+                <a:solidFill>
+                  <a:srgbClr val="0D9488"/>
+                </a:solidFill>
+                <a:latin typeface="Trebuchet MS" pitchFamily="34" charset="0"/>
+                <a:ea typeface="Trebuchet MS" pitchFamily="34" charset="-122"/>
+                <a:cs typeface="Trebuchet MS" pitchFamily="34" charset="-120"/>
+              </a:rPr>
+              <a:t>rus</a:t>
+            </a:r>
+            <a:endParaRPr lang="en-US" sz="1400" dirty="0"/>
+          </a:p>
+        </p:txBody>
+      </p:sp>
+      <p:sp>
+        <p:nvSpPr>
+          <p:cNvPr id="36" name="Shape 34"/>
+          <p:cNvSpPr/>
+          <p:nvPr/>
+        </p:nvSpPr>
+        <p:spPr>
+          <a:xfrm>
+            <a:off x="365760" y="4096512"/>
+            <a:ext cx="1371600" cy="804672"/>
+          </a:xfrm>
+          <a:prstGeom prst="rect">
+            <a:avLst>
+              <a:gd name="adj" fmla="val 6818"/>
+            </a:avLst>
+          </a:prstGeom>
+          <a:solidFill>
+            <a:srgbClr val="E2E8F0"/>
+          </a:solidFill>
+          <a:ln w="12700">
+            <a:solidFill>
+              <a:srgbClr val="E2E8F0"/>
+            </a:solidFill>
+            <a:prstDash val="solid"/>
+          </a:ln>
+        </p:spPr>
+      </p:sp>
+      <p:sp>
+        <p:nvSpPr>
+          <p:cNvPr id="37" name="Text 35"/>
+          <p:cNvSpPr/>
+          <p:nvPr/>
+        </p:nvSpPr>
+        <p:spPr>
+          <a:xfrm>
+            <a:off x="365760" y="4096512"/>
+            <a:ext cx="1371600" cy="804672"/>
+          </a:xfrm>
+          <a:prstGeom prst="rect">
+            <a:avLst/>
+          </a:prstGeom>
+          <a:noFill/>
+          <a:ln/>
+        </p:spPr>
+        <p:txBody>
+          <a:bodyPr wrap="square" lIns="0" tIns="0" rIns="0" bIns="0" rtlCol="0" anchor="ctr"/>
+          <a:lstStyle/>
+          <a:p>
+            <a:pPr algn="ctr" indent="0" marL="0">
+              <a:buNone/>
+            </a:pPr>
+            <a:r>
+              <a:rPr lang="en-US" sz="1100" b="1" dirty="0">
+                <a:solidFill>
+                  <a:srgbClr val="475569"/>
+                </a:solidFill>
+                <a:latin typeface="Trebuchet MS" pitchFamily="34" charset="0"/>
+                <a:ea typeface="Trebuchet MS" pitchFamily="34" charset="-122"/>
+                <a:cs typeface="Trebuchet MS" pitchFamily="34" charset="-120"/>
+              </a:rPr>
+              <a:t>Phonemes</a:t>
             </a:r>
             <a:endParaRPr lang="en-US" sz="1100" dirty="0"/>
           </a:p>
@@ -35098,13 +34657,13 @@
       </p:sp>
       <p:sp>
         <p:nvSpPr>
-          <p:cNvPr id="27" name="Shape 25"/>
-          <p:cNvSpPr/>
-          <p:nvPr/>
-        </p:nvSpPr>
-        <p:spPr>
-          <a:xfrm>
-            <a:off x="1874520" y="3273552"/>
+          <p:cNvPr id="38" name="Shape 36"/>
+          <p:cNvSpPr/>
+          <p:nvPr/>
+        </p:nvSpPr>
+        <p:spPr>
+          <a:xfrm>
+            <a:off x="1874520" y="4096512"/>
             <a:ext cx="6903720" cy="658368"/>
           </a:xfrm>
           <a:prstGeom prst="rect">
@@ -35113,30 +34672,30 @@
             </a:avLst>
           </a:prstGeom>
           <a:solidFill>
-            <a:srgbClr val="CCFBF1"/>
-          </a:solidFill>
-          <a:ln w="12700">
-            <a:solidFill>
-              <a:srgbClr val="0D9488"/>
-            </a:solidFill>
-            <a:prstDash val="solid"/>
-          </a:ln>
-        </p:spPr>
-      </p:sp>
-      <p:sp>
-        <p:nvSpPr>
-          <p:cNvPr id="28" name="Shape 26"/>
-          <p:cNvSpPr/>
-          <p:nvPr/>
-        </p:nvSpPr>
-        <p:spPr>
-          <a:xfrm>
-            <a:off x="1975104" y="3364992"/>
-            <a:ext cx="1554480" cy="475488"/>
+            <a:srgbClr val="FCE7F3"/>
+          </a:solidFill>
+          <a:ln w="12700">
+            <a:solidFill>
+              <a:srgbClr val="DB2777"/>
+            </a:solidFill>
+            <a:prstDash val="solid"/>
+          </a:ln>
+        </p:spPr>
+      </p:sp>
+      <p:sp>
+        <p:nvSpPr>
+          <p:cNvPr id="39" name="Shape 37"/>
+          <p:cNvSpPr/>
+          <p:nvPr/>
+        </p:nvSpPr>
+        <p:spPr>
+          <a:xfrm>
+            <a:off x="1951330" y="4169664"/>
+            <a:ext cx="676656" cy="475488"/>
           </a:xfrm>
           <a:prstGeom prst="rect">
             <a:avLst>
-              <a:gd name="adj" fmla="val 9615"/>
+              <a:gd name="adj" fmla="val 7692"/>
             </a:avLst>
           </a:prstGeom>
           <a:solidFill>
@@ -35144,104 +34703,131 @@
           </a:solidFill>
           <a:ln w="12700">
             <a:solidFill>
-              <a:srgbClr val="0D9488"/>
-            </a:solidFill>
-            <a:prstDash val="solid"/>
-          </a:ln>
-        </p:spPr>
-      </p:sp>
-      <p:sp>
-        <p:nvSpPr>
-          <p:cNvPr id="29" name="Text 27"/>
-          <p:cNvSpPr/>
-          <p:nvPr/>
-        </p:nvSpPr>
-        <p:spPr>
-          <a:xfrm>
-            <a:off x="1975104" y="3364992"/>
-            <a:ext cx="1554480" cy="475488"/>
-          </a:xfrm>
-          <a:prstGeom prst="rect">
-            <a:avLst/>
-          </a:prstGeom>
-          <a:noFill/>
-          <a:ln/>
-        </p:spPr>
-        <p:txBody>
-          <a:bodyPr wrap="square" lIns="0" tIns="0" rIns="0" bIns="0" rtlCol="0" anchor="ctr"/>
-          <a:lstStyle/>
-          <a:p>
-            <a:pPr algn="ctr" indent="0" marL="0">
-              <a:buNone/>
-            </a:pPr>
-            <a:r>
-              <a:rPr lang="en-US" sz="1400" b="1" dirty="0">
-                <a:solidFill>
-                  <a:srgbClr val="0D9488"/>
+              <a:srgbClr val="DB2777"/>
+            </a:solidFill>
+            <a:prstDash val="solid"/>
+          </a:ln>
+        </p:spPr>
+      </p:sp>
+      <p:sp>
+        <p:nvSpPr>
+          <p:cNvPr id="40" name="Text 38"/>
+          <p:cNvSpPr/>
+          <p:nvPr/>
+        </p:nvSpPr>
+        <p:spPr>
+          <a:xfrm>
+            <a:off x="1951330" y="4169664"/>
+            <a:ext cx="676656" cy="475488"/>
+          </a:xfrm>
+          <a:prstGeom prst="rect">
+            <a:avLst/>
+          </a:prstGeom>
+          <a:noFill/>
+          <a:ln/>
+        </p:spPr>
+        <p:txBody>
+          <a:bodyPr wrap="square" lIns="0" tIns="0" rIns="0" bIns="0" rtlCol="0" anchor="ctr"/>
+          <a:lstStyle/>
+          <a:p>
+            <a:pPr algn="ctr" indent="0" marL="0">
+              <a:buNone/>
+            </a:pPr>
+            <a:r>
+              <a:rPr lang="en-US" sz="900" b="1" dirty="0">
+                <a:solidFill>
+                  <a:srgbClr val="9D174D"/>
                 </a:solidFill>
                 <a:latin typeface="Trebuchet MS" pitchFamily="34" charset="0"/>
                 <a:ea typeface="Trebuchet MS" pitchFamily="34" charset="-122"/>
                 <a:cs typeface="Trebuchet MS" pitchFamily="34" charset="-120"/>
               </a:rPr>
-              <a:t>an</a:t>
-            </a:r>
-            <a:endParaRPr lang="en-US" sz="1400" dirty="0"/>
-          </a:p>
-        </p:txBody>
-      </p:sp>
-      <p:sp>
-        <p:nvSpPr>
-          <p:cNvPr id="30" name="Text 28"/>
-          <p:cNvSpPr/>
-          <p:nvPr/>
-        </p:nvSpPr>
-        <p:spPr>
-          <a:xfrm>
-            <a:off x="3529584" y="3364992"/>
-            <a:ext cx="73152" cy="475488"/>
-          </a:xfrm>
-          <a:prstGeom prst="rect">
-            <a:avLst/>
-          </a:prstGeom>
-          <a:noFill/>
-          <a:ln/>
-        </p:spPr>
-        <p:txBody>
-          <a:bodyPr wrap="square" lIns="0" tIns="0" rIns="0" bIns="0" rtlCol="0" anchor="ctr"/>
-          <a:lstStyle/>
-          <a:p>
-            <a:pPr algn="ctr" indent="0" marL="0">
-              <a:buNone/>
-            </a:pPr>
-            <a:r>
-              <a:rPr lang="en-US" sz="1600" b="1" dirty="0">
-                <a:solidFill>
-                  <a:srgbClr val="0D9488"/>
+              <a:t>a</a:t>
+            </a:r>
+            <a:endParaRPr lang="en-US" sz="900" dirty="0"/>
+          </a:p>
+        </p:txBody>
+      </p:sp>
+      <p:sp>
+        <p:nvSpPr>
+          <p:cNvPr id="41" name="Shape 39"/>
+          <p:cNvSpPr/>
+          <p:nvPr/>
+        </p:nvSpPr>
+        <p:spPr>
+          <a:xfrm>
+            <a:off x="2677363" y="4169664"/>
+            <a:ext cx="676656" cy="475488"/>
+          </a:xfrm>
+          <a:prstGeom prst="rect">
+            <a:avLst>
+              <a:gd name="adj" fmla="val 7692"/>
+            </a:avLst>
+          </a:prstGeom>
+          <a:solidFill>
+            <a:srgbClr val="FFFFFF"/>
+          </a:solidFill>
+          <a:ln w="12700">
+            <a:solidFill>
+              <a:srgbClr val="DB2777"/>
+            </a:solidFill>
+            <a:prstDash val="solid"/>
+          </a:ln>
+        </p:spPr>
+      </p:sp>
+      <p:sp>
+        <p:nvSpPr>
+          <p:cNvPr id="42" name="Text 40"/>
+          <p:cNvSpPr/>
+          <p:nvPr/>
+        </p:nvSpPr>
+        <p:spPr>
+          <a:xfrm>
+            <a:off x="2677363" y="4169664"/>
+            <a:ext cx="676656" cy="475488"/>
+          </a:xfrm>
+          <a:prstGeom prst="rect">
+            <a:avLst/>
+          </a:prstGeom>
+          <a:noFill/>
+          <a:ln/>
+        </p:spPr>
+        <p:txBody>
+          <a:bodyPr wrap="square" lIns="0" tIns="0" rIns="0" bIns="0" rtlCol="0" anchor="ctr"/>
+          <a:lstStyle/>
+          <a:p>
+            <a:pPr algn="ctr" indent="0" marL="0">
+              <a:buNone/>
+            </a:pPr>
+            <a:r>
+              <a:rPr lang="en-US" sz="900" b="1" dirty="0">
+                <a:solidFill>
+                  <a:srgbClr val="9D174D"/>
                 </a:solidFill>
                 <a:latin typeface="Trebuchet MS" pitchFamily="34" charset="0"/>
                 <a:ea typeface="Trebuchet MS" pitchFamily="34" charset="-122"/>
                 <a:cs typeface="Trebuchet MS" pitchFamily="34" charset="-120"/>
               </a:rPr>
-              <a:t>·</a:t>
-            </a:r>
-            <a:endParaRPr lang="en-US" sz="1600" dirty="0"/>
-          </a:p>
-        </p:txBody>
-      </p:sp>
-      <p:sp>
-        <p:nvSpPr>
-          <p:cNvPr id="31" name="Shape 29"/>
-          <p:cNvSpPr/>
-          <p:nvPr/>
-        </p:nvSpPr>
-        <p:spPr>
-          <a:xfrm>
-            <a:off x="3602736" y="3364992"/>
-            <a:ext cx="1554480" cy="475488"/>
+              <a:t>n</a:t>
+            </a:r>
+            <a:endParaRPr lang="en-US" sz="900" dirty="0"/>
+          </a:p>
+        </p:txBody>
+      </p:sp>
+      <p:sp>
+        <p:nvSpPr>
+          <p:cNvPr id="43" name="Shape 41"/>
+          <p:cNvSpPr/>
+          <p:nvPr/>
+        </p:nvSpPr>
+        <p:spPr>
+          <a:xfrm>
+            <a:off x="3403397" y="4169664"/>
+            <a:ext cx="676656" cy="475488"/>
           </a:xfrm>
           <a:prstGeom prst="rect">
             <a:avLst>
-              <a:gd name="adj" fmla="val 9615"/>
+              <a:gd name="adj" fmla="val 7692"/>
             </a:avLst>
           </a:prstGeom>
           <a:solidFill>
@@ -35249,104 +34835,131 @@
           </a:solidFill>
           <a:ln w="12700">
             <a:solidFill>
-              <a:srgbClr val="0D9488"/>
-            </a:solidFill>
-            <a:prstDash val="solid"/>
-          </a:ln>
-        </p:spPr>
-      </p:sp>
-      <p:sp>
-        <p:nvSpPr>
-          <p:cNvPr id="32" name="Text 30"/>
-          <p:cNvSpPr/>
-          <p:nvPr/>
-        </p:nvSpPr>
-        <p:spPr>
-          <a:xfrm>
-            <a:off x="3602736" y="3364992"/>
-            <a:ext cx="1554480" cy="475488"/>
-          </a:xfrm>
-          <a:prstGeom prst="rect">
-            <a:avLst/>
-          </a:prstGeom>
-          <a:noFill/>
-          <a:ln/>
-        </p:spPr>
-        <p:txBody>
-          <a:bodyPr wrap="square" lIns="0" tIns="0" rIns="0" bIns="0" rtlCol="0" anchor="ctr"/>
-          <a:lstStyle/>
-          <a:p>
-            <a:pPr algn="ctr" indent="0" marL="0">
-              <a:buNone/>
-            </a:pPr>
-            <a:r>
-              <a:rPr lang="en-US" sz="1400" b="1" dirty="0">
-                <a:solidFill>
-                  <a:srgbClr val="0D9488"/>
+              <a:srgbClr val="DB2777"/>
+            </a:solidFill>
+            <a:prstDash val="solid"/>
+          </a:ln>
+        </p:spPr>
+      </p:sp>
+      <p:sp>
+        <p:nvSpPr>
+          <p:cNvPr id="44" name="Text 42"/>
+          <p:cNvSpPr/>
+          <p:nvPr/>
+        </p:nvSpPr>
+        <p:spPr>
+          <a:xfrm>
+            <a:off x="3403397" y="4169664"/>
+            <a:ext cx="676656" cy="475488"/>
+          </a:xfrm>
+          <a:prstGeom prst="rect">
+            <a:avLst/>
+          </a:prstGeom>
+          <a:noFill/>
+          <a:ln/>
+        </p:spPr>
+        <p:txBody>
+          <a:bodyPr wrap="square" lIns="0" tIns="0" rIns="0" bIns="0" rtlCol="0" anchor="ctr"/>
+          <a:lstStyle/>
+          <a:p>
+            <a:pPr algn="ctr" indent="0" marL="0">
+              <a:buNone/>
+            </a:pPr>
+            <a:r>
+              <a:rPr lang="en-US" sz="900" b="1" dirty="0">
+                <a:solidFill>
+                  <a:srgbClr val="9D174D"/>
                 </a:solidFill>
                 <a:latin typeface="Trebuchet MS" pitchFamily="34" charset="0"/>
                 <a:ea typeface="Trebuchet MS" pitchFamily="34" charset="-122"/>
                 <a:cs typeface="Trebuchet MS" pitchFamily="34" charset="-120"/>
               </a:rPr>
-              <a:t>ti</a:t>
-            </a:r>
-            <a:endParaRPr lang="en-US" sz="1400" dirty="0"/>
-          </a:p>
-        </p:txBody>
-      </p:sp>
-      <p:sp>
-        <p:nvSpPr>
-          <p:cNvPr id="33" name="Text 31"/>
-          <p:cNvSpPr/>
-          <p:nvPr/>
-        </p:nvSpPr>
-        <p:spPr>
-          <a:xfrm>
-            <a:off x="5157216" y="3364992"/>
-            <a:ext cx="73152" cy="475488"/>
-          </a:xfrm>
-          <a:prstGeom prst="rect">
-            <a:avLst/>
-          </a:prstGeom>
-          <a:noFill/>
-          <a:ln/>
-        </p:spPr>
-        <p:txBody>
-          <a:bodyPr wrap="square" lIns="0" tIns="0" rIns="0" bIns="0" rtlCol="0" anchor="ctr"/>
-          <a:lstStyle/>
-          <a:p>
-            <a:pPr algn="ctr" indent="0" marL="0">
-              <a:buNone/>
-            </a:pPr>
-            <a:r>
-              <a:rPr lang="en-US" sz="1600" b="1" dirty="0">
-                <a:solidFill>
-                  <a:srgbClr val="0D9488"/>
+              <a:t>t</a:t>
+            </a:r>
+            <a:endParaRPr lang="en-US" sz="900" dirty="0"/>
+          </a:p>
+        </p:txBody>
+      </p:sp>
+      <p:sp>
+        <p:nvSpPr>
+          <p:cNvPr id="45" name="Shape 43"/>
+          <p:cNvSpPr/>
+          <p:nvPr/>
+        </p:nvSpPr>
+        <p:spPr>
+          <a:xfrm>
+            <a:off x="4129430" y="4169664"/>
+            <a:ext cx="676656" cy="475488"/>
+          </a:xfrm>
+          <a:prstGeom prst="rect">
+            <a:avLst>
+              <a:gd name="adj" fmla="val 7692"/>
+            </a:avLst>
+          </a:prstGeom>
+          <a:solidFill>
+            <a:srgbClr val="FFFFFF"/>
+          </a:solidFill>
+          <a:ln w="12700">
+            <a:solidFill>
+              <a:srgbClr val="DB2777"/>
+            </a:solidFill>
+            <a:prstDash val="solid"/>
+          </a:ln>
+        </p:spPr>
+      </p:sp>
+      <p:sp>
+        <p:nvSpPr>
+          <p:cNvPr id="46" name="Text 44"/>
+          <p:cNvSpPr/>
+          <p:nvPr/>
+        </p:nvSpPr>
+        <p:spPr>
+          <a:xfrm>
+            <a:off x="4129430" y="4169664"/>
+            <a:ext cx="676656" cy="475488"/>
+          </a:xfrm>
+          <a:prstGeom prst="rect">
+            <a:avLst/>
+          </a:prstGeom>
+          <a:noFill/>
+          <a:ln/>
+        </p:spPr>
+        <p:txBody>
+          <a:bodyPr wrap="square" lIns="0" tIns="0" rIns="0" bIns="0" rtlCol="0" anchor="ctr"/>
+          <a:lstStyle/>
+          <a:p>
+            <a:pPr algn="ctr" indent="0" marL="0">
+              <a:buNone/>
+            </a:pPr>
+            <a:r>
+              <a:rPr lang="en-US" sz="900" b="1" dirty="0">
+                <a:solidFill>
+                  <a:srgbClr val="9D174D"/>
                 </a:solidFill>
                 <a:latin typeface="Trebuchet MS" pitchFamily="34" charset="0"/>
                 <a:ea typeface="Trebuchet MS" pitchFamily="34" charset="-122"/>
                 <a:cs typeface="Trebuchet MS" pitchFamily="34" charset="-120"/>
               </a:rPr>
-              <a:t>·</a:t>
-            </a:r>
-            <a:endParaRPr lang="en-US" sz="1600" dirty="0"/>
-          </a:p>
-        </p:txBody>
-      </p:sp>
-      <p:sp>
-        <p:nvSpPr>
-          <p:cNvPr id="34" name="Shape 32"/>
-          <p:cNvSpPr/>
-          <p:nvPr/>
-        </p:nvSpPr>
-        <p:spPr>
-          <a:xfrm>
-            <a:off x="5230368" y="3364992"/>
-            <a:ext cx="1554480" cy="475488"/>
+              <a:t>i</a:t>
+            </a:r>
+            <a:endParaRPr lang="en-US" sz="900" dirty="0"/>
+          </a:p>
+        </p:txBody>
+      </p:sp>
+      <p:sp>
+        <p:nvSpPr>
+          <p:cNvPr id="47" name="Shape 45"/>
+          <p:cNvSpPr/>
+          <p:nvPr/>
+        </p:nvSpPr>
+        <p:spPr>
+          <a:xfrm>
+            <a:off x="4855464" y="4169664"/>
+            <a:ext cx="676656" cy="475488"/>
           </a:xfrm>
           <a:prstGeom prst="rect">
             <a:avLst>
-              <a:gd name="adj" fmla="val 9615"/>
+              <a:gd name="adj" fmla="val 7692"/>
             </a:avLst>
           </a:prstGeom>
           <a:solidFill>
@@ -35354,104 +34967,131 @@
           </a:solidFill>
           <a:ln w="12700">
             <a:solidFill>
-              <a:srgbClr val="0D9488"/>
-            </a:solidFill>
-            <a:prstDash val="solid"/>
-          </a:ln>
-        </p:spPr>
-      </p:sp>
-      <p:sp>
-        <p:nvSpPr>
-          <p:cNvPr id="35" name="Text 33"/>
-          <p:cNvSpPr/>
-          <p:nvPr/>
-        </p:nvSpPr>
-        <p:spPr>
-          <a:xfrm>
-            <a:off x="5230368" y="3364992"/>
-            <a:ext cx="1554480" cy="475488"/>
-          </a:xfrm>
-          <a:prstGeom prst="rect">
-            <a:avLst/>
-          </a:prstGeom>
-          <a:noFill/>
-          <a:ln/>
-        </p:spPr>
-        <p:txBody>
-          <a:bodyPr wrap="square" lIns="0" tIns="0" rIns="0" bIns="0" rtlCol="0" anchor="ctr"/>
-          <a:lstStyle/>
-          <a:p>
-            <a:pPr algn="ctr" indent="0" marL="0">
-              <a:buNone/>
-            </a:pPr>
-            <a:r>
-              <a:rPr lang="en-US" sz="1400" b="1" dirty="0">
-                <a:solidFill>
-                  <a:srgbClr val="0D9488"/>
+              <a:srgbClr val="DB2777"/>
+            </a:solidFill>
+            <a:prstDash val="solid"/>
+          </a:ln>
+        </p:spPr>
+      </p:sp>
+      <p:sp>
+        <p:nvSpPr>
+          <p:cNvPr id="48" name="Text 46"/>
+          <p:cNvSpPr/>
+          <p:nvPr/>
+        </p:nvSpPr>
+        <p:spPr>
+          <a:xfrm>
+            <a:off x="4855464" y="4169664"/>
+            <a:ext cx="676656" cy="475488"/>
+          </a:xfrm>
+          <a:prstGeom prst="rect">
+            <a:avLst/>
+          </a:prstGeom>
+          <a:noFill/>
+          <a:ln/>
+        </p:spPr>
+        <p:txBody>
+          <a:bodyPr wrap="square" lIns="0" tIns="0" rIns="0" bIns="0" rtlCol="0" anchor="ctr"/>
+          <a:lstStyle/>
+          <a:p>
+            <a:pPr algn="ctr" indent="0" marL="0">
+              <a:buNone/>
+            </a:pPr>
+            <a:r>
+              <a:rPr lang="en-US" sz="900" b="1" dirty="0">
+                <a:solidFill>
+                  <a:srgbClr val="9D174D"/>
                 </a:solidFill>
                 <a:latin typeface="Trebuchet MS" pitchFamily="34" charset="0"/>
                 <a:ea typeface="Trebuchet MS" pitchFamily="34" charset="-122"/>
                 <a:cs typeface="Trebuchet MS" pitchFamily="34" charset="-120"/>
               </a:rPr>
-              <a:t>cli</a:t>
-            </a:r>
-            <a:endParaRPr lang="en-US" sz="1400" dirty="0"/>
-          </a:p>
-        </p:txBody>
-      </p:sp>
-      <p:sp>
-        <p:nvSpPr>
-          <p:cNvPr id="36" name="Text 34"/>
-          <p:cNvSpPr/>
-          <p:nvPr/>
-        </p:nvSpPr>
-        <p:spPr>
-          <a:xfrm>
-            <a:off x="6784848" y="3364992"/>
-            <a:ext cx="73152" cy="475488"/>
-          </a:xfrm>
-          <a:prstGeom prst="rect">
-            <a:avLst/>
-          </a:prstGeom>
-          <a:noFill/>
-          <a:ln/>
-        </p:spPr>
-        <p:txBody>
-          <a:bodyPr wrap="square" lIns="0" tIns="0" rIns="0" bIns="0" rtlCol="0" anchor="ctr"/>
-          <a:lstStyle/>
-          <a:p>
-            <a:pPr algn="ctr" indent="0" marL="0">
-              <a:buNone/>
-            </a:pPr>
-            <a:r>
-              <a:rPr lang="en-US" sz="1600" b="1" dirty="0">
-                <a:solidFill>
-                  <a:srgbClr val="0D9488"/>
+              <a:t>v</a:t>
+            </a:r>
+            <a:endParaRPr lang="en-US" sz="900" dirty="0"/>
+          </a:p>
+        </p:txBody>
+      </p:sp>
+      <p:sp>
+        <p:nvSpPr>
+          <p:cNvPr id="49" name="Shape 47"/>
+          <p:cNvSpPr/>
+          <p:nvPr/>
+        </p:nvSpPr>
+        <p:spPr>
+          <a:xfrm>
+            <a:off x="5581498" y="4169664"/>
+            <a:ext cx="676656" cy="475488"/>
+          </a:xfrm>
+          <a:prstGeom prst="rect">
+            <a:avLst>
+              <a:gd name="adj" fmla="val 7692"/>
+            </a:avLst>
+          </a:prstGeom>
+          <a:solidFill>
+            <a:srgbClr val="FFFFFF"/>
+          </a:solidFill>
+          <a:ln w="12700">
+            <a:solidFill>
+              <a:srgbClr val="DB2777"/>
+            </a:solidFill>
+            <a:prstDash val="solid"/>
+          </a:ln>
+        </p:spPr>
+      </p:sp>
+      <p:sp>
+        <p:nvSpPr>
+          <p:cNvPr id="50" name="Text 48"/>
+          <p:cNvSpPr/>
+          <p:nvPr/>
+        </p:nvSpPr>
+        <p:spPr>
+          <a:xfrm>
+            <a:off x="5581498" y="4169664"/>
+            <a:ext cx="676656" cy="475488"/>
+          </a:xfrm>
+          <a:prstGeom prst="rect">
+            <a:avLst/>
+          </a:prstGeom>
+          <a:noFill/>
+          <a:ln/>
+        </p:spPr>
+        <p:txBody>
+          <a:bodyPr wrap="square" lIns="0" tIns="0" rIns="0" bIns="0" rtlCol="0" anchor="ctr"/>
+          <a:lstStyle/>
+          <a:p>
+            <a:pPr algn="ctr" indent="0" marL="0">
+              <a:buNone/>
+            </a:pPr>
+            <a:r>
+              <a:rPr lang="en-US" sz="900" b="1" dirty="0">
+                <a:solidFill>
+                  <a:srgbClr val="9D174D"/>
                 </a:solidFill>
                 <a:latin typeface="Trebuchet MS" pitchFamily="34" charset="0"/>
                 <a:ea typeface="Trebuchet MS" pitchFamily="34" charset="-122"/>
                 <a:cs typeface="Trebuchet MS" pitchFamily="34" charset="-120"/>
               </a:rPr>
-              <a:t>·</a:t>
-            </a:r>
-            <a:endParaRPr lang="en-US" sz="1600" dirty="0"/>
-          </a:p>
-        </p:txBody>
-      </p:sp>
-      <p:sp>
-        <p:nvSpPr>
-          <p:cNvPr id="37" name="Shape 35"/>
-          <p:cNvSpPr/>
-          <p:nvPr/>
-        </p:nvSpPr>
-        <p:spPr>
-          <a:xfrm>
-            <a:off x="6858000" y="3364992"/>
-            <a:ext cx="1554480" cy="475488"/>
+              <a:t>i</a:t>
+            </a:r>
+            <a:endParaRPr lang="en-US" sz="900" dirty="0"/>
+          </a:p>
+        </p:txBody>
+      </p:sp>
+      <p:sp>
+        <p:nvSpPr>
+          <p:cNvPr id="51" name="Shape 49"/>
+          <p:cNvSpPr/>
+          <p:nvPr/>
+        </p:nvSpPr>
+        <p:spPr>
+          <a:xfrm>
+            <a:off x="6307531" y="4169664"/>
+            <a:ext cx="676656" cy="475488"/>
           </a:xfrm>
           <a:prstGeom prst="rect">
             <a:avLst>
-              <a:gd name="adj" fmla="val 9615"/>
+              <a:gd name="adj" fmla="val 7692"/>
             </a:avLst>
           </a:prstGeom>
           <a:solidFill>
@@ -35459,135 +35099,135 @@
           </a:solidFill>
           <a:ln w="12700">
             <a:solidFill>
-              <a:srgbClr val="0D9488"/>
-            </a:solidFill>
-            <a:prstDash val="solid"/>
-          </a:ln>
-        </p:spPr>
-      </p:sp>
-      <p:sp>
-        <p:nvSpPr>
-          <p:cNvPr id="38" name="Text 36"/>
-          <p:cNvSpPr/>
-          <p:nvPr/>
-        </p:nvSpPr>
-        <p:spPr>
-          <a:xfrm>
-            <a:off x="6858000" y="3364992"/>
-            <a:ext cx="1554480" cy="475488"/>
-          </a:xfrm>
-          <a:prstGeom prst="rect">
-            <a:avLst/>
-          </a:prstGeom>
-          <a:noFill/>
-          <a:ln/>
-        </p:spPr>
-        <p:txBody>
-          <a:bodyPr wrap="square" lIns="0" tIns="0" rIns="0" bIns="0" rtlCol="0" anchor="ctr"/>
-          <a:lstStyle/>
-          <a:p>
-            <a:pPr algn="ctr" indent="0" marL="0">
-              <a:buNone/>
-            </a:pPr>
-            <a:r>
-              <a:rPr lang="en-US" sz="1400" b="1" dirty="0">
-                <a:solidFill>
-                  <a:srgbClr val="0D9488"/>
+              <a:srgbClr val="DB2777"/>
+            </a:solidFill>
+            <a:prstDash val="solid"/>
+          </a:ln>
+        </p:spPr>
+      </p:sp>
+      <p:sp>
+        <p:nvSpPr>
+          <p:cNvPr id="52" name="Text 50"/>
+          <p:cNvSpPr/>
+          <p:nvPr/>
+        </p:nvSpPr>
+        <p:spPr>
+          <a:xfrm>
+            <a:off x="6307531" y="4169664"/>
+            <a:ext cx="676656" cy="475488"/>
+          </a:xfrm>
+          <a:prstGeom prst="rect">
+            <a:avLst/>
+          </a:prstGeom>
+          <a:noFill/>
+          <a:ln/>
+        </p:spPr>
+        <p:txBody>
+          <a:bodyPr wrap="square" lIns="0" tIns="0" rIns="0" bIns="0" rtlCol="0" anchor="ctr"/>
+          <a:lstStyle/>
+          <a:p>
+            <a:pPr algn="ctr" indent="0" marL="0">
+              <a:buNone/>
+            </a:pPr>
+            <a:r>
+              <a:rPr lang="en-US" sz="900" b="1" dirty="0">
+                <a:solidFill>
+                  <a:srgbClr val="9D174D"/>
                 </a:solidFill>
                 <a:latin typeface="Trebuchet MS" pitchFamily="34" charset="0"/>
                 <a:ea typeface="Trebuchet MS" pitchFamily="34" charset="-122"/>
                 <a:cs typeface="Trebuchet MS" pitchFamily="34" charset="-120"/>
               </a:rPr>
-              <a:t>max</a:t>
-            </a:r>
-            <a:endParaRPr lang="en-US" sz="1400" dirty="0"/>
-          </a:p>
-        </p:txBody>
-      </p:sp>
-      <p:sp>
-        <p:nvSpPr>
-          <p:cNvPr id="39" name="Shape 37"/>
-          <p:cNvSpPr/>
-          <p:nvPr/>
-        </p:nvSpPr>
-        <p:spPr>
-          <a:xfrm>
-            <a:off x="365760" y="4096512"/>
-            <a:ext cx="1371600" cy="804672"/>
+              <a:t>r</a:t>
+            </a:r>
+            <a:endParaRPr lang="en-US" sz="900" dirty="0"/>
+          </a:p>
+        </p:txBody>
+      </p:sp>
+      <p:sp>
+        <p:nvSpPr>
+          <p:cNvPr id="53" name="Shape 51"/>
+          <p:cNvSpPr/>
+          <p:nvPr/>
+        </p:nvSpPr>
+        <p:spPr>
+          <a:xfrm>
+            <a:off x="7033565" y="4169664"/>
+            <a:ext cx="676656" cy="475488"/>
           </a:xfrm>
           <a:prstGeom prst="rect">
             <a:avLst>
-              <a:gd name="adj" fmla="val 6818"/>
+              <a:gd name="adj" fmla="val 7692"/>
             </a:avLst>
           </a:prstGeom>
           <a:solidFill>
-            <a:srgbClr val="E2E8F0"/>
-          </a:solidFill>
-          <a:ln w="12700">
-            <a:solidFill>
-              <a:srgbClr val="E2E8F0"/>
-            </a:solidFill>
-            <a:prstDash val="solid"/>
-          </a:ln>
-        </p:spPr>
-      </p:sp>
-      <p:sp>
-        <p:nvSpPr>
-          <p:cNvPr id="40" name="Text 38"/>
-          <p:cNvSpPr/>
-          <p:nvPr/>
-        </p:nvSpPr>
-        <p:spPr>
-          <a:xfrm>
-            <a:off x="365760" y="4096512"/>
-            <a:ext cx="1371600" cy="804672"/>
-          </a:xfrm>
-          <a:prstGeom prst="rect">
-            <a:avLst/>
-          </a:prstGeom>
-          <a:noFill/>
-          <a:ln/>
-        </p:spPr>
-        <p:txBody>
-          <a:bodyPr wrap="square" lIns="0" tIns="0" rIns="0" bIns="0" rtlCol="0" anchor="ctr"/>
-          <a:lstStyle/>
-          <a:p>
-            <a:pPr algn="ctr" indent="0" marL="0">
-              <a:buNone/>
-            </a:pPr>
-            <a:r>
-              <a:rPr lang="en-US" sz="1100" b="1" dirty="0">
-                <a:solidFill>
-                  <a:srgbClr val="475569"/>
+            <a:srgbClr val="FFFFFF"/>
+          </a:solidFill>
+          <a:ln w="12700">
+            <a:solidFill>
+              <a:srgbClr val="DB2777"/>
+            </a:solidFill>
+            <a:prstDash val="solid"/>
+          </a:ln>
+        </p:spPr>
+      </p:sp>
+      <p:sp>
+        <p:nvSpPr>
+          <p:cNvPr id="54" name="Text 52"/>
+          <p:cNvSpPr/>
+          <p:nvPr/>
+        </p:nvSpPr>
+        <p:spPr>
+          <a:xfrm>
+            <a:off x="7033565" y="4169664"/>
+            <a:ext cx="676656" cy="475488"/>
+          </a:xfrm>
+          <a:prstGeom prst="rect">
+            <a:avLst/>
+          </a:prstGeom>
+          <a:noFill/>
+          <a:ln/>
+        </p:spPr>
+        <p:txBody>
+          <a:bodyPr wrap="square" lIns="0" tIns="0" rIns="0" bIns="0" rtlCol="0" anchor="ctr"/>
+          <a:lstStyle/>
+          <a:p>
+            <a:pPr algn="ctr" indent="0" marL="0">
+              <a:buNone/>
+            </a:pPr>
+            <a:r>
+              <a:rPr lang="en-US" sz="900" b="1" dirty="0">
+                <a:solidFill>
+                  <a:srgbClr val="9D174D"/>
                 </a:solidFill>
                 <a:latin typeface="Trebuchet MS" pitchFamily="34" charset="0"/>
                 <a:ea typeface="Trebuchet MS" pitchFamily="34" charset="-122"/>
                 <a:cs typeface="Trebuchet MS" pitchFamily="34" charset="-120"/>
               </a:rPr>
-              <a:t>Phonemes</a:t>
-            </a:r>
-            <a:endParaRPr lang="en-US" sz="1100" dirty="0"/>
-          </a:p>
-        </p:txBody>
-      </p:sp>
-      <p:sp>
-        <p:nvSpPr>
-          <p:cNvPr id="41" name="Shape 39"/>
-          <p:cNvSpPr/>
-          <p:nvPr/>
-        </p:nvSpPr>
-        <p:spPr>
-          <a:xfrm>
-            <a:off x="1874520" y="4096512"/>
-            <a:ext cx="6903720" cy="804672"/>
+              <a:t>u</a:t>
+            </a:r>
+            <a:endParaRPr lang="en-US" sz="900" dirty="0"/>
+          </a:p>
+        </p:txBody>
+      </p:sp>
+      <p:sp>
+        <p:nvSpPr>
+          <p:cNvPr id="55" name="Shape 53"/>
+          <p:cNvSpPr/>
+          <p:nvPr/>
+        </p:nvSpPr>
+        <p:spPr>
+          <a:xfrm>
+            <a:off x="7759598" y="4169664"/>
+            <a:ext cx="676656" cy="475488"/>
           </a:xfrm>
           <a:prstGeom prst="rect">
             <a:avLst>
-              <a:gd name="adj" fmla="val 6818"/>
+              <a:gd name="adj" fmla="val 7692"/>
             </a:avLst>
           </a:prstGeom>
           <a:solidFill>
-            <a:srgbClr val="FCE7F3"/>
+            <a:srgbClr val="FFFFFF"/>
           </a:solidFill>
           <a:ln w="12700">
             <a:solidFill>
@@ -35599,41 +35239,14 @@
       </p:sp>
       <p:sp>
         <p:nvSpPr>
-          <p:cNvPr id="42" name="Shape 40"/>
-          <p:cNvSpPr/>
-          <p:nvPr/>
-        </p:nvSpPr>
-        <p:spPr>
-          <a:xfrm>
-            <a:off x="1951828" y="4169664"/>
-            <a:ext cx="603504" cy="384048"/>
-          </a:xfrm>
-          <a:prstGeom prst="rect">
-            <a:avLst>
-              <a:gd name="adj" fmla="val 9524"/>
-            </a:avLst>
-          </a:prstGeom>
-          <a:solidFill>
-            <a:srgbClr val="FFFFFF"/>
-          </a:solidFill>
-          <a:ln w="12700">
-            <a:solidFill>
-              <a:srgbClr val="DB2777"/>
-            </a:solidFill>
-            <a:prstDash val="solid"/>
-          </a:ln>
-        </p:spPr>
-      </p:sp>
-      <p:sp>
-        <p:nvSpPr>
-          <p:cNvPr id="43" name="Text 41"/>
-          <p:cNvSpPr/>
-          <p:nvPr/>
-        </p:nvSpPr>
-        <p:spPr>
-          <a:xfrm>
-            <a:off x="1951828" y="4169664"/>
-            <a:ext cx="603504" cy="384048"/>
+          <p:cNvPr id="56" name="Text 54"/>
+          <p:cNvSpPr/>
+          <p:nvPr/>
+        </p:nvSpPr>
+        <p:spPr>
+          <a:xfrm>
+            <a:off x="7759598" y="4169664"/>
+            <a:ext cx="676656" cy="475488"/>
           </a:xfrm>
           <a:prstGeom prst="rect">
             <a:avLst/>
@@ -35657,681 +35270,9 @@
                 <a:ea typeface="Trebuchet MS" pitchFamily="34" charset="-122"/>
                 <a:cs typeface="Trebuchet MS" pitchFamily="34" charset="-120"/>
               </a:rPr>
-              <a:t>a</a:t>
+              <a:t>s</a:t>
             </a:r>
             <a:endParaRPr lang="en-US" sz="900" dirty="0"/>
-          </a:p>
-        </p:txBody>
-      </p:sp>
-      <p:sp>
-        <p:nvSpPr>
-          <p:cNvPr id="44" name="Shape 42"/>
-          <p:cNvSpPr/>
-          <p:nvPr/>
-        </p:nvSpPr>
-        <p:spPr>
-          <a:xfrm>
-            <a:off x="2605209" y="4169664"/>
-            <a:ext cx="603504" cy="384048"/>
-          </a:xfrm>
-          <a:prstGeom prst="rect">
-            <a:avLst>
-              <a:gd name="adj" fmla="val 9524"/>
-            </a:avLst>
-          </a:prstGeom>
-          <a:solidFill>
-            <a:srgbClr val="FFFFFF"/>
-          </a:solidFill>
-          <a:ln w="12700">
-            <a:solidFill>
-              <a:srgbClr val="DB2777"/>
-            </a:solidFill>
-            <a:prstDash val="solid"/>
-          </a:ln>
-        </p:spPr>
-      </p:sp>
-      <p:sp>
-        <p:nvSpPr>
-          <p:cNvPr id="45" name="Text 43"/>
-          <p:cNvSpPr/>
-          <p:nvPr/>
-        </p:nvSpPr>
-        <p:spPr>
-          <a:xfrm>
-            <a:off x="2605209" y="4169664"/>
-            <a:ext cx="603504" cy="384048"/>
-          </a:xfrm>
-          <a:prstGeom prst="rect">
-            <a:avLst/>
-          </a:prstGeom>
-          <a:noFill/>
-          <a:ln/>
-        </p:spPr>
-        <p:txBody>
-          <a:bodyPr wrap="square" lIns="0" tIns="0" rIns="0" bIns="0" rtlCol="0" anchor="ctr"/>
-          <a:lstStyle/>
-          <a:p>
-            <a:pPr algn="ctr" indent="0" marL="0">
-              <a:buNone/>
-            </a:pPr>
-            <a:r>
-              <a:rPr lang="en-US" sz="900" b="1" dirty="0">
-                <a:solidFill>
-                  <a:srgbClr val="9D174D"/>
-                </a:solidFill>
-                <a:latin typeface="Trebuchet MS" pitchFamily="34" charset="0"/>
-                <a:ea typeface="Trebuchet MS" pitchFamily="34" charset="-122"/>
-                <a:cs typeface="Trebuchet MS" pitchFamily="34" charset="-120"/>
-              </a:rPr>
-              <a:t>n</a:t>
-            </a:r>
-            <a:endParaRPr lang="en-US" sz="900" dirty="0"/>
-          </a:p>
-        </p:txBody>
-      </p:sp>
-      <p:sp>
-        <p:nvSpPr>
-          <p:cNvPr id="46" name="Shape 44"/>
-          <p:cNvSpPr/>
-          <p:nvPr/>
-        </p:nvSpPr>
-        <p:spPr>
-          <a:xfrm>
-            <a:off x="3258589" y="4169664"/>
-            <a:ext cx="603504" cy="384048"/>
-          </a:xfrm>
-          <a:prstGeom prst="rect">
-            <a:avLst>
-              <a:gd name="adj" fmla="val 9524"/>
-            </a:avLst>
-          </a:prstGeom>
-          <a:solidFill>
-            <a:srgbClr val="FFFFFF"/>
-          </a:solidFill>
-          <a:ln w="12700">
-            <a:solidFill>
-              <a:srgbClr val="DB2777"/>
-            </a:solidFill>
-            <a:prstDash val="solid"/>
-          </a:ln>
-        </p:spPr>
-      </p:sp>
-      <p:sp>
-        <p:nvSpPr>
-          <p:cNvPr id="47" name="Text 45"/>
-          <p:cNvSpPr/>
-          <p:nvPr/>
-        </p:nvSpPr>
-        <p:spPr>
-          <a:xfrm>
-            <a:off x="3258589" y="4169664"/>
-            <a:ext cx="603504" cy="384048"/>
-          </a:xfrm>
-          <a:prstGeom prst="rect">
-            <a:avLst/>
-          </a:prstGeom>
-          <a:noFill/>
-          <a:ln/>
-        </p:spPr>
-        <p:txBody>
-          <a:bodyPr wrap="square" lIns="0" tIns="0" rIns="0" bIns="0" rtlCol="0" anchor="ctr"/>
-          <a:lstStyle/>
-          <a:p>
-            <a:pPr algn="ctr" indent="0" marL="0">
-              <a:buNone/>
-            </a:pPr>
-            <a:r>
-              <a:rPr lang="en-US" sz="900" b="1" dirty="0">
-                <a:solidFill>
-                  <a:srgbClr val="9D174D"/>
-                </a:solidFill>
-                <a:latin typeface="Trebuchet MS" pitchFamily="34" charset="0"/>
-                <a:ea typeface="Trebuchet MS" pitchFamily="34" charset="-122"/>
-                <a:cs typeface="Trebuchet MS" pitchFamily="34" charset="-120"/>
-              </a:rPr>
-              <a:t>t</a:t>
-            </a:r>
-            <a:endParaRPr lang="en-US" sz="900" dirty="0"/>
-          </a:p>
-        </p:txBody>
-      </p:sp>
-      <p:sp>
-        <p:nvSpPr>
-          <p:cNvPr id="48" name="Shape 46"/>
-          <p:cNvSpPr/>
-          <p:nvPr/>
-        </p:nvSpPr>
-        <p:spPr>
-          <a:xfrm>
-            <a:off x="3911969" y="4169664"/>
-            <a:ext cx="603504" cy="384048"/>
-          </a:xfrm>
-          <a:prstGeom prst="rect">
-            <a:avLst>
-              <a:gd name="adj" fmla="val 9524"/>
-            </a:avLst>
-          </a:prstGeom>
-          <a:solidFill>
-            <a:srgbClr val="FFFFFF"/>
-          </a:solidFill>
-          <a:ln w="12700">
-            <a:solidFill>
-              <a:srgbClr val="DB2777"/>
-            </a:solidFill>
-            <a:prstDash val="solid"/>
-          </a:ln>
-        </p:spPr>
-      </p:sp>
-      <p:sp>
-        <p:nvSpPr>
-          <p:cNvPr id="49" name="Text 47"/>
-          <p:cNvSpPr/>
-          <p:nvPr/>
-        </p:nvSpPr>
-        <p:spPr>
-          <a:xfrm>
-            <a:off x="3911969" y="4169664"/>
-            <a:ext cx="603504" cy="384048"/>
-          </a:xfrm>
-          <a:prstGeom prst="rect">
-            <a:avLst/>
-          </a:prstGeom>
-          <a:noFill/>
-          <a:ln/>
-        </p:spPr>
-        <p:txBody>
-          <a:bodyPr wrap="square" lIns="0" tIns="0" rIns="0" bIns="0" rtlCol="0" anchor="ctr"/>
-          <a:lstStyle/>
-          <a:p>
-            <a:pPr algn="ctr" indent="0" marL="0">
-              <a:buNone/>
-            </a:pPr>
-            <a:r>
-              <a:rPr lang="en-US" sz="900" b="1" dirty="0">
-                <a:solidFill>
-                  <a:srgbClr val="9D174D"/>
-                </a:solidFill>
-                <a:latin typeface="Trebuchet MS" pitchFamily="34" charset="0"/>
-                <a:ea typeface="Trebuchet MS" pitchFamily="34" charset="-122"/>
-                <a:cs typeface="Trebuchet MS" pitchFamily="34" charset="-120"/>
-              </a:rPr>
-              <a:t>i</a:t>
-            </a:r>
-            <a:endParaRPr lang="en-US" sz="900" dirty="0"/>
-          </a:p>
-        </p:txBody>
-      </p:sp>
-      <p:sp>
-        <p:nvSpPr>
-          <p:cNvPr id="50" name="Shape 48"/>
-          <p:cNvSpPr/>
-          <p:nvPr/>
-        </p:nvSpPr>
-        <p:spPr>
-          <a:xfrm>
-            <a:off x="4565350" y="4169664"/>
-            <a:ext cx="603504" cy="384048"/>
-          </a:xfrm>
-          <a:prstGeom prst="rect">
-            <a:avLst>
-              <a:gd name="adj" fmla="val 9524"/>
-            </a:avLst>
-          </a:prstGeom>
-          <a:solidFill>
-            <a:srgbClr val="FFFFFF"/>
-          </a:solidFill>
-          <a:ln w="12700">
-            <a:solidFill>
-              <a:srgbClr val="DB2777"/>
-            </a:solidFill>
-            <a:prstDash val="solid"/>
-          </a:ln>
-        </p:spPr>
-      </p:sp>
-      <p:sp>
-        <p:nvSpPr>
-          <p:cNvPr id="51" name="Text 49"/>
-          <p:cNvSpPr/>
-          <p:nvPr/>
-        </p:nvSpPr>
-        <p:spPr>
-          <a:xfrm>
-            <a:off x="4565350" y="4169664"/>
-            <a:ext cx="603504" cy="384048"/>
-          </a:xfrm>
-          <a:prstGeom prst="rect">
-            <a:avLst/>
-          </a:prstGeom>
-          <a:noFill/>
-          <a:ln/>
-        </p:spPr>
-        <p:txBody>
-          <a:bodyPr wrap="square" lIns="0" tIns="0" rIns="0" bIns="0" rtlCol="0" anchor="ctr"/>
-          <a:lstStyle/>
-          <a:p>
-            <a:pPr algn="ctr" indent="0" marL="0">
-              <a:buNone/>
-            </a:pPr>
-            <a:r>
-              <a:rPr lang="en-US" sz="900" b="1" dirty="0">
-                <a:solidFill>
-                  <a:srgbClr val="9D174D"/>
-                </a:solidFill>
-                <a:latin typeface="Trebuchet MS" pitchFamily="34" charset="0"/>
-                <a:ea typeface="Trebuchet MS" pitchFamily="34" charset="-122"/>
-                <a:cs typeface="Trebuchet MS" pitchFamily="34" charset="-120"/>
-              </a:rPr>
-              <a:t>c</a:t>
-            </a:r>
-            <a:endParaRPr lang="en-US" sz="900" dirty="0"/>
-          </a:p>
-        </p:txBody>
-      </p:sp>
-      <p:sp>
-        <p:nvSpPr>
-          <p:cNvPr id="52" name="Text 50"/>
-          <p:cNvSpPr/>
-          <p:nvPr/>
-        </p:nvSpPr>
-        <p:spPr>
-          <a:xfrm>
-            <a:off x="4565350" y="4572000"/>
-            <a:ext cx="603504" cy="219456"/>
-          </a:xfrm>
-          <a:prstGeom prst="rect">
-            <a:avLst/>
-          </a:prstGeom>
-          <a:noFill/>
-          <a:ln/>
-        </p:spPr>
-        <p:txBody>
-          <a:bodyPr wrap="square" lIns="0" tIns="0" rIns="0" bIns="0" rtlCol="0" anchor="t"/>
-          <a:lstStyle/>
-          <a:p>
-            <a:pPr algn="ctr" indent="0" marL="0">
-              <a:buNone/>
-            </a:pPr>
-            <a:r>
-              <a:rPr lang="en-US" sz="750" i="1" dirty="0">
-                <a:solidFill>
-                  <a:srgbClr val="94A3B8"/>
-                </a:solidFill>
-                <a:latin typeface="Calibri" pitchFamily="34" charset="0"/>
-                <a:ea typeface="Calibri" pitchFamily="34" charset="-122"/>
-                <a:cs typeface="Calibri" pitchFamily="34" charset="-120"/>
-              </a:rPr>
-              <a:t>/k/</a:t>
-            </a:r>
-            <a:endParaRPr lang="en-US" sz="750" dirty="0"/>
-          </a:p>
-        </p:txBody>
-      </p:sp>
-      <p:sp>
-        <p:nvSpPr>
-          <p:cNvPr id="53" name="Shape 51"/>
-          <p:cNvSpPr/>
-          <p:nvPr/>
-        </p:nvSpPr>
-        <p:spPr>
-          <a:xfrm>
-            <a:off x="5218730" y="4169664"/>
-            <a:ext cx="603504" cy="384048"/>
-          </a:xfrm>
-          <a:prstGeom prst="rect">
-            <a:avLst>
-              <a:gd name="adj" fmla="val 9524"/>
-            </a:avLst>
-          </a:prstGeom>
-          <a:solidFill>
-            <a:srgbClr val="FFFFFF"/>
-          </a:solidFill>
-          <a:ln w="12700">
-            <a:solidFill>
-              <a:srgbClr val="DB2777"/>
-            </a:solidFill>
-            <a:prstDash val="solid"/>
-          </a:ln>
-        </p:spPr>
-      </p:sp>
-      <p:sp>
-        <p:nvSpPr>
-          <p:cNvPr id="54" name="Text 52"/>
-          <p:cNvSpPr/>
-          <p:nvPr/>
-        </p:nvSpPr>
-        <p:spPr>
-          <a:xfrm>
-            <a:off x="5218730" y="4169664"/>
-            <a:ext cx="603504" cy="384048"/>
-          </a:xfrm>
-          <a:prstGeom prst="rect">
-            <a:avLst/>
-          </a:prstGeom>
-          <a:noFill/>
-          <a:ln/>
-        </p:spPr>
-        <p:txBody>
-          <a:bodyPr wrap="square" lIns="0" tIns="0" rIns="0" bIns="0" rtlCol="0" anchor="ctr"/>
-          <a:lstStyle/>
-          <a:p>
-            <a:pPr algn="ctr" indent="0" marL="0">
-              <a:buNone/>
-            </a:pPr>
-            <a:r>
-              <a:rPr lang="en-US" sz="900" b="1" dirty="0">
-                <a:solidFill>
-                  <a:srgbClr val="9D174D"/>
-                </a:solidFill>
-                <a:latin typeface="Trebuchet MS" pitchFamily="34" charset="0"/>
-                <a:ea typeface="Trebuchet MS" pitchFamily="34" charset="-122"/>
-                <a:cs typeface="Trebuchet MS" pitchFamily="34" charset="-120"/>
-              </a:rPr>
-              <a:t>l</a:t>
-            </a:r>
-            <a:endParaRPr lang="en-US" sz="900" dirty="0"/>
-          </a:p>
-        </p:txBody>
-      </p:sp>
-      <p:sp>
-        <p:nvSpPr>
-          <p:cNvPr id="55" name="Shape 53"/>
-          <p:cNvSpPr/>
-          <p:nvPr/>
-        </p:nvSpPr>
-        <p:spPr>
-          <a:xfrm>
-            <a:off x="5872111" y="4169664"/>
-            <a:ext cx="603504" cy="384048"/>
-          </a:xfrm>
-          <a:prstGeom prst="rect">
-            <a:avLst>
-              <a:gd name="adj" fmla="val 9524"/>
-            </a:avLst>
-          </a:prstGeom>
-          <a:solidFill>
-            <a:srgbClr val="FFFFFF"/>
-          </a:solidFill>
-          <a:ln w="12700">
-            <a:solidFill>
-              <a:srgbClr val="DB2777"/>
-            </a:solidFill>
-            <a:prstDash val="solid"/>
-          </a:ln>
-        </p:spPr>
-      </p:sp>
-      <p:sp>
-        <p:nvSpPr>
-          <p:cNvPr id="56" name="Text 54"/>
-          <p:cNvSpPr/>
-          <p:nvPr/>
-        </p:nvSpPr>
-        <p:spPr>
-          <a:xfrm>
-            <a:off x="5872111" y="4169664"/>
-            <a:ext cx="603504" cy="384048"/>
-          </a:xfrm>
-          <a:prstGeom prst="rect">
-            <a:avLst/>
-          </a:prstGeom>
-          <a:noFill/>
-          <a:ln/>
-        </p:spPr>
-        <p:txBody>
-          <a:bodyPr wrap="square" lIns="0" tIns="0" rIns="0" bIns="0" rtlCol="0" anchor="ctr"/>
-          <a:lstStyle/>
-          <a:p>
-            <a:pPr algn="ctr" indent="0" marL="0">
-              <a:buNone/>
-            </a:pPr>
-            <a:r>
-              <a:rPr lang="en-US" sz="900" b="1" dirty="0">
-                <a:solidFill>
-                  <a:srgbClr val="9D174D"/>
-                </a:solidFill>
-                <a:latin typeface="Trebuchet MS" pitchFamily="34" charset="0"/>
-                <a:ea typeface="Trebuchet MS" pitchFamily="34" charset="-122"/>
-                <a:cs typeface="Trebuchet MS" pitchFamily="34" charset="-120"/>
-              </a:rPr>
-              <a:t>i</a:t>
-            </a:r>
-            <a:endParaRPr lang="en-US" sz="900" dirty="0"/>
-          </a:p>
-        </p:txBody>
-      </p:sp>
-      <p:sp>
-        <p:nvSpPr>
-          <p:cNvPr id="57" name="Shape 55"/>
-          <p:cNvSpPr/>
-          <p:nvPr/>
-        </p:nvSpPr>
-        <p:spPr>
-          <a:xfrm>
-            <a:off x="6525491" y="4169664"/>
-            <a:ext cx="603504" cy="384048"/>
-          </a:xfrm>
-          <a:prstGeom prst="rect">
-            <a:avLst>
-              <a:gd name="adj" fmla="val 9524"/>
-            </a:avLst>
-          </a:prstGeom>
-          <a:solidFill>
-            <a:srgbClr val="FFFFFF"/>
-          </a:solidFill>
-          <a:ln w="12700">
-            <a:solidFill>
-              <a:srgbClr val="DB2777"/>
-            </a:solidFill>
-            <a:prstDash val="solid"/>
-          </a:ln>
-        </p:spPr>
-      </p:sp>
-      <p:sp>
-        <p:nvSpPr>
-          <p:cNvPr id="58" name="Text 56"/>
-          <p:cNvSpPr/>
-          <p:nvPr/>
-        </p:nvSpPr>
-        <p:spPr>
-          <a:xfrm>
-            <a:off x="6525491" y="4169664"/>
-            <a:ext cx="603504" cy="384048"/>
-          </a:xfrm>
-          <a:prstGeom prst="rect">
-            <a:avLst/>
-          </a:prstGeom>
-          <a:noFill/>
-          <a:ln/>
-        </p:spPr>
-        <p:txBody>
-          <a:bodyPr wrap="square" lIns="0" tIns="0" rIns="0" bIns="0" rtlCol="0" anchor="ctr"/>
-          <a:lstStyle/>
-          <a:p>
-            <a:pPr algn="ctr" indent="0" marL="0">
-              <a:buNone/>
-            </a:pPr>
-            <a:r>
-              <a:rPr lang="en-US" sz="900" b="1" dirty="0">
-                <a:solidFill>
-                  <a:srgbClr val="9D174D"/>
-                </a:solidFill>
-                <a:latin typeface="Trebuchet MS" pitchFamily="34" charset="0"/>
-                <a:ea typeface="Trebuchet MS" pitchFamily="34" charset="-122"/>
-                <a:cs typeface="Trebuchet MS" pitchFamily="34" charset="-120"/>
-              </a:rPr>
-              <a:t>m</a:t>
-            </a:r>
-            <a:endParaRPr lang="en-US" sz="900" dirty="0"/>
-          </a:p>
-        </p:txBody>
-      </p:sp>
-      <p:sp>
-        <p:nvSpPr>
-          <p:cNvPr id="59" name="Shape 57"/>
-          <p:cNvSpPr/>
-          <p:nvPr/>
-        </p:nvSpPr>
-        <p:spPr>
-          <a:xfrm>
-            <a:off x="7178871" y="4169664"/>
-            <a:ext cx="603504" cy="384048"/>
-          </a:xfrm>
-          <a:prstGeom prst="rect">
-            <a:avLst>
-              <a:gd name="adj" fmla="val 9524"/>
-            </a:avLst>
-          </a:prstGeom>
-          <a:solidFill>
-            <a:srgbClr val="FFFFFF"/>
-          </a:solidFill>
-          <a:ln w="12700">
-            <a:solidFill>
-              <a:srgbClr val="DB2777"/>
-            </a:solidFill>
-            <a:prstDash val="solid"/>
-          </a:ln>
-        </p:spPr>
-      </p:sp>
-      <p:sp>
-        <p:nvSpPr>
-          <p:cNvPr id="60" name="Text 58"/>
-          <p:cNvSpPr/>
-          <p:nvPr/>
-        </p:nvSpPr>
-        <p:spPr>
-          <a:xfrm>
-            <a:off x="7178871" y="4169664"/>
-            <a:ext cx="603504" cy="384048"/>
-          </a:xfrm>
-          <a:prstGeom prst="rect">
-            <a:avLst/>
-          </a:prstGeom>
-          <a:noFill/>
-          <a:ln/>
-        </p:spPr>
-        <p:txBody>
-          <a:bodyPr wrap="square" lIns="0" tIns="0" rIns="0" bIns="0" rtlCol="0" anchor="ctr"/>
-          <a:lstStyle/>
-          <a:p>
-            <a:pPr algn="ctr" indent="0" marL="0">
-              <a:buNone/>
-            </a:pPr>
-            <a:r>
-              <a:rPr lang="en-US" sz="900" b="1" dirty="0">
-                <a:solidFill>
-                  <a:srgbClr val="9D174D"/>
-                </a:solidFill>
-                <a:latin typeface="Trebuchet MS" pitchFamily="34" charset="0"/>
-                <a:ea typeface="Trebuchet MS" pitchFamily="34" charset="-122"/>
-                <a:cs typeface="Trebuchet MS" pitchFamily="34" charset="-120"/>
-              </a:rPr>
-              <a:t>a</a:t>
-            </a:r>
-            <a:endParaRPr lang="en-US" sz="900" dirty="0"/>
-          </a:p>
-        </p:txBody>
-      </p:sp>
-      <p:sp>
-        <p:nvSpPr>
-          <p:cNvPr id="61" name="Shape 59"/>
-          <p:cNvSpPr/>
-          <p:nvPr/>
-        </p:nvSpPr>
-        <p:spPr>
-          <a:xfrm>
-            <a:off x="7832252" y="4169664"/>
-            <a:ext cx="603504" cy="384048"/>
-          </a:xfrm>
-          <a:prstGeom prst="rect">
-            <a:avLst>
-              <a:gd name="adj" fmla="val 9524"/>
-            </a:avLst>
-          </a:prstGeom>
-          <a:solidFill>
-            <a:srgbClr val="FFFFFF"/>
-          </a:solidFill>
-          <a:ln w="12700">
-            <a:solidFill>
-              <a:srgbClr val="DB2777"/>
-            </a:solidFill>
-            <a:prstDash val="solid"/>
-          </a:ln>
-        </p:spPr>
-      </p:sp>
-      <p:sp>
-        <p:nvSpPr>
-          <p:cNvPr id="62" name="Text 60"/>
-          <p:cNvSpPr/>
-          <p:nvPr/>
-        </p:nvSpPr>
-        <p:spPr>
-          <a:xfrm>
-            <a:off x="7832252" y="4169664"/>
-            <a:ext cx="603504" cy="384048"/>
-          </a:xfrm>
-          <a:prstGeom prst="rect">
-            <a:avLst/>
-          </a:prstGeom>
-          <a:noFill/>
-          <a:ln/>
-        </p:spPr>
-        <p:txBody>
-          <a:bodyPr wrap="square" lIns="0" tIns="0" rIns="0" bIns="0" rtlCol="0" anchor="ctr"/>
-          <a:lstStyle/>
-          <a:p>
-            <a:pPr algn="ctr" indent="0" marL="0">
-              <a:buNone/>
-            </a:pPr>
-            <a:r>
-              <a:rPr lang="en-US" sz="900" b="1" dirty="0">
-                <a:solidFill>
-                  <a:srgbClr val="9D174D"/>
-                </a:solidFill>
-                <a:latin typeface="Trebuchet MS" pitchFamily="34" charset="0"/>
-                <a:ea typeface="Trebuchet MS" pitchFamily="34" charset="-122"/>
-                <a:cs typeface="Trebuchet MS" pitchFamily="34" charset="-120"/>
-              </a:rPr>
-              <a:t>x</a:t>
-            </a:r>
-            <a:endParaRPr lang="en-US" sz="900" dirty="0"/>
-          </a:p>
-        </p:txBody>
-      </p:sp>
-      <p:sp>
-        <p:nvSpPr>
-          <p:cNvPr id="63" name="Text 61"/>
-          <p:cNvSpPr/>
-          <p:nvPr/>
-        </p:nvSpPr>
-        <p:spPr>
-          <a:xfrm>
-            <a:off x="7832252" y="4572000"/>
-            <a:ext cx="603504" cy="219456"/>
-          </a:xfrm>
-          <a:prstGeom prst="rect">
-            <a:avLst/>
-          </a:prstGeom>
-          <a:noFill/>
-          <a:ln/>
-        </p:spPr>
-        <p:txBody>
-          <a:bodyPr wrap="square" lIns="0" tIns="0" rIns="0" bIns="0" rtlCol="0" anchor="t"/>
-          <a:lstStyle/>
-          <a:p>
-            <a:pPr algn="ctr" indent="0" marL="0">
-              <a:buNone/>
-            </a:pPr>
-            <a:r>
-              <a:rPr lang="en-US" sz="750" i="1" dirty="0">
-                <a:solidFill>
-                  <a:srgbClr val="94A3B8"/>
-                </a:solidFill>
-                <a:latin typeface="Calibri" pitchFamily="34" charset="0"/>
-                <a:ea typeface="Calibri" pitchFamily="34" charset="-122"/>
-                <a:cs typeface="Calibri" pitchFamily="34" charset="-120"/>
-              </a:rPr>
-              <a:t>/ks/</a:t>
-            </a:r>
-            <a:endParaRPr lang="en-US" sz="750" dirty="0"/>
           </a:p>
         </p:txBody>
       </p:sp>
@@ -38372,7 +37313,7 @@
                 <a:ea typeface="Trebuchet MS" pitchFamily="34" charset="-122"/>
                 <a:cs typeface="Trebuchet MS" pitchFamily="34" charset="-120"/>
               </a:rPr>
-              <a:t>-ic</a:t>
+              <a:t>-ist</a:t>
             </a:r>
             <a:endParaRPr lang="en-US" sz="1300" dirty="0"/>
           </a:p>
@@ -38525,7 +37466,7 @@
                 <a:ea typeface="Trebuchet MS" pitchFamily="34" charset="-122"/>
                 <a:cs typeface="Trebuchet MS" pitchFamily="34" charset="-120"/>
               </a:rPr>
-              <a:t>-ism</a:t>
+              <a:t>-ic</a:t>
             </a:r>
             <a:endParaRPr lang="en-US" sz="1300" dirty="0"/>
           </a:p>
@@ -38614,7 +37555,7 @@
                 <a:ea typeface="Trebuchet MS" pitchFamily="34" charset="-122"/>
                 <a:cs typeface="Trebuchet MS" pitchFamily="34" charset="-120"/>
               </a:rPr>
-              <a:t>dote</a:t>
+              <a:t>clockwise</a:t>
             </a:r>
             <a:endParaRPr lang="en-US" sz="1300" dirty="0"/>
           </a:p>
@@ -38678,7 +37619,7 @@
                 <a:ea typeface="Trebuchet MS" pitchFamily="34" charset="-122"/>
                 <a:cs typeface="Trebuchet MS" pitchFamily="34" charset="-120"/>
               </a:rPr>
-              <a:t>-ist</a:t>
+              <a:t>-ism</a:t>
             </a:r>
             <a:endParaRPr lang="en-US" sz="1300" dirty="0"/>
           </a:p>
@@ -38831,7 +37772,7 @@
                 <a:ea typeface="Trebuchet MS" pitchFamily="34" charset="-122"/>
                 <a:cs typeface="Trebuchet MS" pitchFamily="34" charset="-120"/>
               </a:rPr>
-              <a:t>-ent</a:t>
+              <a:t>-ally</a:t>
             </a:r>
             <a:endParaRPr lang="en-US" sz="1300" dirty="0"/>
           </a:p>
@@ -39134,7 +38075,7 @@
                 <a:ea typeface="Trebuchet MS" pitchFamily="34" charset="-122"/>
                 <a:cs typeface="Trebuchet MS" pitchFamily="34" charset="-120"/>
               </a:rPr>
-              <a:t>antidote</a:t>
+              <a:t>antibiotic</a:t>
             </a:r>
             <a:endParaRPr lang="en-US" sz="1200" dirty="0"/>
           </a:p>
@@ -39200,7 +38141,7 @@
                 <a:ea typeface="Trebuchet MS" pitchFamily="34" charset="-122"/>
                 <a:cs typeface="Trebuchet MS" pitchFamily="34" charset="-120"/>
               </a:rPr>
-              <a:t>antibiotic</a:t>
+              <a:t>antidote</a:t>
             </a:r>
             <a:endParaRPr lang="en-US" sz="1200" dirty="0"/>
           </a:p>
@@ -39266,7 +38207,7 @@
                 <a:ea typeface="Trebuchet MS" pitchFamily="34" charset="-122"/>
                 <a:cs typeface="Trebuchet MS" pitchFamily="34" charset="-120"/>
               </a:rPr>
-              <a:t>anticlockwise</a:t>
+              <a:t>anticlimax</a:t>
             </a:r>
             <a:endParaRPr lang="en-US" sz="1200" dirty="0"/>
           </a:p>
@@ -39332,7 +38273,7 @@
                 <a:ea typeface="Trebuchet MS" pitchFamily="34" charset="-122"/>
                 <a:cs typeface="Trebuchet MS" pitchFamily="34" charset="-120"/>
               </a:rPr>
-              <a:t>anticlimax</a:t>
+              <a:t>anticlockwise</a:t>
             </a:r>
             <a:endParaRPr lang="en-US" sz="1200" dirty="0"/>
           </a:p>
@@ -40586,7 +39527,7 @@
                 <a:ea typeface="Calibri" pitchFamily="34" charset="-122"/>
                 <a:cs typeface="Calibri" pitchFamily="34" charset="-120"/>
               </a:rPr>
-              <a:t>1.  The prefix 'anti-' means against or opposing something.</a:t>
+              <a:t>1.  The word 'anticipate' contains the prefix 'anti-' meaning against.</a:t>
             </a:r>
             <a:endParaRPr lang="en-US" sz="1300" dirty="0"/>
           </a:p>
@@ -40609,11 +39550,11 @@
             </a:avLst>
           </a:prstGeom>
           <a:solidFill>
-            <a:srgbClr val="DCFCE7"/>
-          </a:solidFill>
-          <a:ln w="12700">
-            <a:solidFill>
-              <a:srgbClr val="16A34A"/>
+            <a:srgbClr val="FEE2E2"/>
+          </a:solidFill>
+          <a:ln w="12700">
+            <a:solidFill>
+              <a:srgbClr val="DC2626"/>
             </a:solidFill>
             <a:prstDash val="solid"/>
           </a:ln>
@@ -40646,13 +39587,13 @@
             <a:r>
               <a:rPr lang="en-US" sz="1100" b="1" dirty="0">
                 <a:solidFill>
-                  <a:srgbClr val="16A34A"/>
+                  <a:srgbClr val="DC2626"/>
                 </a:solidFill>
                 <a:latin typeface="Trebuchet MS" pitchFamily="34" charset="0"/>
                 <a:ea typeface="Trebuchet MS" pitchFamily="34" charset="-122"/>
                 <a:cs typeface="Trebuchet MS" pitchFamily="34" charset="-120"/>
               </a:rPr>
-              <a:t>TRUE</a:t>
+              <a:t>FALSE</a:t>
             </a:r>
             <a:endParaRPr lang="en-US" sz="1100" dirty="0"/>
           </a:p>
@@ -40725,7 +39666,7 @@
                 <a:ea typeface="Calibri" pitchFamily="34" charset="-122"/>
                 <a:cs typeface="Calibri" pitchFamily="34" charset="-120"/>
               </a:rPr>
-              <a:t>2.  The prefix 'anti-' comes from Latin.</a:t>
+              <a:t>2.  'Anti-' always changes its spelling when added to a base word.</a:t>
             </a:r>
             <a:endParaRPr lang="en-US" sz="1300" dirty="0"/>
           </a:p>
@@ -40864,7 +39805,7 @@
                 <a:ea typeface="Calibri" pitchFamily="34" charset="-122"/>
                 <a:cs typeface="Calibri" pitchFamily="34" charset="-120"/>
               </a:rPr>
-              <a:t>3.  An antidote works against a poison.</a:t>
+              <a:t>3.  An antibiotic works against harmful bacteria in your body.</a:t>
             </a:r>
             <a:endParaRPr lang="en-US" sz="1300" dirty="0"/>
           </a:p>
@@ -41003,7 +39944,7 @@
                 <a:ea typeface="Calibri" pitchFamily="34" charset="-122"/>
                 <a:cs typeface="Calibri" pitchFamily="34" charset="-120"/>
               </a:rPr>
-              <a:t>4.  Antibiotic medicine helps fight bacterial infections.</a:t>
+              <a:t>4.  The prefix 'anti-' means against or opposing something.</a:t>
             </a:r>
             <a:endParaRPr lang="en-US" sz="1300" dirty="0"/>
           </a:p>
@@ -41142,7 +40083,7 @@
                 <a:ea typeface="Calibri" pitchFamily="34" charset="-122"/>
                 <a:cs typeface="Calibri" pitchFamily="34" charset="-120"/>
               </a:rPr>
-              <a:t>5.  Anticlockwise means moving in the same direction as clock hands.</a:t>
+              <a:t>5.  The prefix 'anti-' comes from the Greek language.</a:t>
             </a:r>
             <a:endParaRPr lang="en-US" sz="1300" dirty="0"/>
           </a:p>
@@ -41165,11 +40106,11 @@
             </a:avLst>
           </a:prstGeom>
           <a:solidFill>
-            <a:srgbClr val="FEE2E2"/>
-          </a:solidFill>
-          <a:ln w="12700">
-            <a:solidFill>
-              <a:srgbClr val="DC2626"/>
+            <a:srgbClr val="DCFCE7"/>
+          </a:solidFill>
+          <a:ln w="12700">
+            <a:solidFill>
+              <a:srgbClr val="16A34A"/>
             </a:solidFill>
             <a:prstDash val="solid"/>
           </a:ln>
@@ -41202,13 +40143,13 @@
             <a:r>
               <a:rPr lang="en-US" sz="1100" b="1" dirty="0">
                 <a:solidFill>
-                  <a:srgbClr val="DC2626"/>
+                  <a:srgbClr val="16A34A"/>
                 </a:solidFill>
                 <a:latin typeface="Trebuchet MS" pitchFamily="34" charset="0"/>
                 <a:ea typeface="Trebuchet MS" pitchFamily="34" charset="-122"/>
                 <a:cs typeface="Trebuchet MS" pitchFamily="34" charset="-120"/>
               </a:rPr>
-              <a:t>FALSE</a:t>
+              <a:t>TRUE</a:t>
             </a:r>
             <a:endParaRPr lang="en-US" sz="1100" dirty="0"/>
           </a:p>
@@ -41979,7 +40920,7 @@
                 <a:ea typeface="Trebuchet MS" pitchFamily="34" charset="-122"/>
                 <a:cs typeface="Trebuchet MS" pitchFamily="34" charset="-120"/>
               </a:rPr>
-              <a:t>antidote</a:t>
+              <a:t>antibiotic</a:t>
             </a:r>
             <a:endParaRPr lang="en-US" sz="1300" dirty="0"/>
           </a:p>
@@ -42045,7 +40986,7 @@
                 <a:ea typeface="Trebuchet MS" pitchFamily="34" charset="-122"/>
                 <a:cs typeface="Trebuchet MS" pitchFamily="34" charset="-120"/>
               </a:rPr>
-              <a:t>antibiotic</a:t>
+              <a:t>antidote</a:t>
             </a:r>
             <a:endParaRPr lang="en-US" sz="1300" dirty="0"/>
           </a:p>
@@ -42111,7 +41052,7 @@
                 <a:ea typeface="Trebuchet MS" pitchFamily="34" charset="-122"/>
                 <a:cs typeface="Trebuchet MS" pitchFamily="34" charset="-120"/>
               </a:rPr>
-              <a:t>anticlockwise</a:t>
+              <a:t>anticlimax</a:t>
             </a:r>
             <a:endParaRPr lang="en-US" sz="1300" dirty="0"/>
           </a:p>
@@ -42177,7 +41118,7 @@
                 <a:ea typeface="Trebuchet MS" pitchFamily="34" charset="-122"/>
                 <a:cs typeface="Trebuchet MS" pitchFamily="34" charset="-120"/>
               </a:rPr>
-              <a:t>anticlimax</a:t>
+              <a:t>anticlockwise</a:t>
             </a:r>
             <a:endParaRPr lang="en-US" sz="1300" dirty="0"/>
           </a:p>
@@ -43051,7 +41992,7 @@
                 <a:ea typeface="Trebuchet MS" pitchFamily="34" charset="-122"/>
                 <a:cs typeface="Trebuchet MS" pitchFamily="34" charset="-120"/>
               </a:rPr>
-              <a:t>-ic</a:t>
+              <a:t>-ist</a:t>
             </a:r>
             <a:endParaRPr lang="en-US" sz="1300" dirty="0"/>
           </a:p>
@@ -43204,7 +42145,7 @@
                 <a:ea typeface="Trebuchet MS" pitchFamily="34" charset="-122"/>
                 <a:cs typeface="Trebuchet MS" pitchFamily="34" charset="-120"/>
               </a:rPr>
-              <a:t>-ism</a:t>
+              <a:t>-ic</a:t>
             </a:r>
             <a:endParaRPr lang="en-US" sz="1300" dirty="0"/>
           </a:p>
@@ -43293,7 +42234,7 @@
                 <a:ea typeface="Trebuchet MS" pitchFamily="34" charset="-122"/>
                 <a:cs typeface="Trebuchet MS" pitchFamily="34" charset="-120"/>
               </a:rPr>
-              <a:t>dote</a:t>
+              <a:t>clockwise</a:t>
             </a:r>
             <a:endParaRPr lang="en-US" sz="1300" dirty="0"/>
           </a:p>
@@ -43357,7 +42298,7 @@
                 <a:ea typeface="Trebuchet MS" pitchFamily="34" charset="-122"/>
                 <a:cs typeface="Trebuchet MS" pitchFamily="34" charset="-120"/>
               </a:rPr>
-              <a:t>-ist</a:t>
+              <a:t>-ism</a:t>
             </a:r>
             <a:endParaRPr lang="en-US" sz="1300" dirty="0"/>
           </a:p>
@@ -43510,7 +42451,7 @@
                 <a:ea typeface="Trebuchet MS" pitchFamily="34" charset="-122"/>
                 <a:cs typeface="Trebuchet MS" pitchFamily="34" charset="-120"/>
               </a:rPr>
-              <a:t>-ent</a:t>
+              <a:t>-ally</a:t>
             </a:r>
             <a:endParaRPr lang="en-US" sz="1300" dirty="0"/>
           </a:p>
@@ -44421,7 +43362,7 @@
                 <a:ea typeface="Calibri" pitchFamily="34" charset="-122"/>
                 <a:cs typeface="Calibri" pitchFamily="34" charset="-120"/>
               </a:rPr>
-              <a:t>A medicine that fights against bacterial infections in your body.</a:t>
+              <a:t>A substance that stops a poison from harming the body.</a:t>
             </a:r>
             <a:endParaRPr lang="en-US" sz="1200" dirty="0"/>
           </a:p>
@@ -44560,7 +43501,7 @@
                 <a:ea typeface="Calibri" pitchFamily="34" charset="-122"/>
                 <a:cs typeface="Calibri" pitchFamily="34" charset="-120"/>
               </a:rPr>
-              <a:t>A medicine that works against a poison to make someone better.</a:t>
+              <a:t>A medicine that kills harmful bacteria and helps your body fight certain infections.</a:t>
             </a:r>
             <a:endParaRPr lang="en-US" sz="1200" dirty="0"/>
           </a:p>
@@ -44699,7 +43640,7 @@
                 <a:ea typeface="Calibri" pitchFamily="34" charset="-122"/>
                 <a:cs typeface="Calibri" pitchFamily="34" charset="-120"/>
               </a:rPr>
-              <a:t>Moving in the opposite direction to the hands of a clock.</a:t>
+              <a:t>A disappointing ending after you were expecting something exciting.</a:t>
             </a:r>
             <a:endParaRPr lang="en-US" sz="1200" dirty="0"/>
           </a:p>
@@ -44772,7 +43713,7 @@
                 <a:ea typeface="Trebuchet MS" pitchFamily="34" charset="-122"/>
                 <a:cs typeface="Trebuchet MS" pitchFamily="34" charset="-120"/>
               </a:rPr>
-              <a:t>antidote</a:t>
+              <a:t>antibiotic</a:t>
             </a:r>
             <a:endParaRPr lang="en-US" sz="1200" dirty="0"/>
           </a:p>
@@ -44838,7 +43779,7 @@
                 <a:ea typeface="Calibri" pitchFamily="34" charset="-122"/>
                 <a:cs typeface="Calibri" pitchFamily="34" charset="-120"/>
               </a:rPr>
-              <a:t>A liquid added to car engines to stop water from freezing in cold weather.</a:t>
+              <a:t>A liquid added to car engines to stop the water inside from freezing in cold weather.</a:t>
             </a:r>
             <a:endParaRPr lang="en-US" sz="1200" dirty="0"/>
           </a:p>
@@ -44911,7 +43852,7 @@
                 <a:ea typeface="Trebuchet MS" pitchFamily="34" charset="-122"/>
                 <a:cs typeface="Trebuchet MS" pitchFamily="34" charset="-120"/>
               </a:rPr>
-              <a:t>antibiotic</a:t>
+              <a:t>antidote</a:t>
             </a:r>
             <a:endParaRPr lang="en-US" sz="1200" dirty="0"/>
           </a:p>
@@ -44977,7 +43918,7 @@
                 <a:ea typeface="Calibri" pitchFamily="34" charset="-122"/>
                 <a:cs typeface="Calibri" pitchFamily="34" charset="-120"/>
               </a:rPr>
-              <a:t>When something exciting is expected but the result turns out to be disappointing.</a:t>
+              <a:t>Moving in the opposite direction to the hands of a clock.</a:t>
             </a:r>
             <a:endParaRPr lang="en-US" sz="1200" dirty="0"/>
           </a:p>
@@ -45050,7 +43991,7 @@
                 <a:ea typeface="Trebuchet MS" pitchFamily="34" charset="-122"/>
                 <a:cs typeface="Trebuchet MS" pitchFamily="34" charset="-120"/>
               </a:rPr>
-              <a:t>anticlockwise</a:t>
+              <a:t>anticlimax</a:t>
             </a:r>
             <a:endParaRPr lang="en-US" sz="1200" dirty="0"/>
           </a:p>
@@ -45189,7 +44130,7 @@
                 <a:ea typeface="Trebuchet MS" pitchFamily="34" charset="-122"/>
                 <a:cs typeface="Trebuchet MS" pitchFamily="34" charset="-120"/>
               </a:rPr>
-              <a:t>anticlimax</a:t>
+              <a:t>anticlockwise</a:t>
             </a:r>
             <a:endParaRPr lang="en-US" sz="1200" dirty="0"/>
           </a:p>
@@ -45255,7 +44196,7 @@
                 <a:ea typeface="Calibri" pitchFamily="34" charset="-122"/>
                 <a:cs typeface="Calibri" pitchFamily="34" charset="-120"/>
               </a:rPr>
-              <a:t>A substance that kills germs and stops infections from spreading.</a:t>
+              <a:t>A substance that kills germs and stops infection in cuts or wounds.</a:t>
             </a:r>
             <a:endParaRPr lang="en-US" sz="1200" dirty="0"/>
           </a:p>
@@ -45750,7 +44691,7 @@
                 <a:ea typeface="Calibri" pitchFamily="34" charset="-122"/>
                 <a:cs typeface="Calibri" pitchFamily="34" charset="-120"/>
               </a:rPr>
-              <a:t>The nurse used an antiseptic wipe to clean the cut before putting on a bandage.</a:t>
+              <a:t>The nurse used an antiseptic spray to clean the cut before putting on a bandage.</a:t>
             </a:r>
             <a:endParaRPr lang="en-US" sz="1500" dirty="0"/>
           </a:p>
@@ -45914,7 +44855,7 @@
                 <a:ea typeface="Calibri" pitchFamily="34" charset="-122"/>
                 <a:cs typeface="Calibri" pitchFamily="34" charset="-120"/>
               </a:rPr>
-              <a:t>Mum put antifreeze in the car before our road trip through the snowy mountains.</a:t>
+              <a:t>My dad puts antifreeze in the car every winter so the engine doesn't freeze overnight.</a:t>
             </a:r>
             <a:endParaRPr lang="en-US" sz="1500" dirty="0"/>
           </a:p>
@@ -46078,7 +45019,7 @@
                 <a:ea typeface="Calibri" pitchFamily="34" charset="-122"/>
                 <a:cs typeface="Calibri" pitchFamily="34" charset="-120"/>
               </a:rPr>
-              <a:t>The doctor prescribed an antibiotic to help fight the infection in Jack's throat.</a:t>
+              <a:t>The doctor prescribed an antibiotic to help Mia recover from her throat infection.</a:t>
             </a:r>
             <a:endParaRPr lang="en-US" sz="1500" dirty="0"/>
           </a:p>
